--- a/public/downloads/games/flag-quiz/rules.pptx
+++ b/public/downloads/games/flag-quiz/rules.pptx
@@ -69,20 +69,17 @@
     <p:sldId id="317" r:id="rId67"/>
     <p:sldId id="318" r:id="rId68"/>
     <p:sldId id="319" r:id="rId69"/>
+    <p:sldId id="320" r:id="rId70"/>
   </p:sldIdLst>
   <p:sldSz cx="18288000" cy="10287000"/>
   <p:notesSz cx="6858000" cy="9144000"/>
   <p:embeddedFontLst>
     <p:embeddedFont>
-      <p:font typeface="Jua" charset="1" panose="00000000000000000000"/>
-      <p:regular r:id="rId70"/>
-    </p:embeddedFont>
-    <p:embeddedFont>
-      <p:font typeface="TDTD갬성명조" charset="1" panose="02000503000000000000"/>
+      <p:font typeface="무궁화 고딕" charset="1" panose="02020603020101020101"/>
       <p:regular r:id="rId71"/>
     </p:embeddedFont>
     <p:embeddedFont>
-      <p:font typeface="TDTD가온" charset="1" panose="02000503000000000000"/>
+      <p:font typeface="무궁화 고딕 Bold" charset="1" panose="02020603020101020101"/>
       <p:regular r:id="rId72"/>
     </p:embeddedFont>
   </p:embeddedFontLst>
@@ -3201,8 +3198,8 @@
         </p:nvSpPr>
         <p:spPr>
           <a:xfrm rot="0">
-            <a:off x="1028700" y="3892867"/>
-            <a:ext cx="15555091" cy="2200275"/>
+            <a:off x="1028700" y="4178617"/>
+            <a:ext cx="15555091" cy="1914525"/>
           </a:xfrm>
           <a:prstGeom prst="rect">
             <a:avLst/>
@@ -3224,10 +3221,10 @@
                 <a:solidFill>
                   <a:srgbClr val="FFFAEF"/>
                 </a:solidFill>
-                <a:latin typeface="Jua"/>
-                <a:ea typeface="Jua"/>
-                <a:cs typeface="Jua"/>
-                <a:sym typeface="Jua"/>
+                <a:latin typeface="무궁화 고딕"/>
+                <a:ea typeface="무궁화 고딕"/>
+                <a:cs typeface="무궁화 고딕"/>
+                <a:sym typeface="무궁화 고딕"/>
               </a:rPr>
               <a:t>나라 맞추기</a:t>
             </a:r>
@@ -3242,8 +3239,8 @@
         </p:nvSpPr>
         <p:spPr>
           <a:xfrm rot="0">
-            <a:off x="15264803" y="9812655"/>
-            <a:ext cx="2637975" cy="474345"/>
+            <a:off x="14783540" y="9822180"/>
+            <a:ext cx="3119239" cy="464820"/>
           </a:xfrm>
           <a:prstGeom prst="rect">
             <a:avLst/>
@@ -3268,10 +3265,10 @@
                 <a:solidFill>
                   <a:srgbClr val="FFFFFF"/>
                 </a:solidFill>
-                <a:latin typeface="TDTD갬성명조"/>
-                <a:ea typeface="TDTD갬성명조"/>
-                <a:cs typeface="TDTD갬성명조"/>
-                <a:sym typeface="TDTD갬성명조"/>
+                <a:latin typeface="무궁화 고딕"/>
+                <a:ea typeface="무궁화 고딕"/>
+                <a:cs typeface="무궁화 고딕"/>
+                <a:sym typeface="무궁화 고딕"/>
               </a:rPr>
               <a:t>ⓒ 2026. Sunday Play</a:t>
             </a:r>
@@ -3310,51 +3307,96 @@
           <a:chExt cx="0" cy="0"/>
         </a:xfrm>
       </p:grpSpPr>
-      <p:sp>
-        <p:nvSpPr>
-          <p:cNvPr name="Freeform 2" id="2"/>
-          <p:cNvSpPr/>
-          <p:nvPr/>
-        </p:nvSpPr>
+      <p:pic>
+        <p:nvPicPr>
+          <p:cNvPr name="Picture 2" id="2"/>
+          <p:cNvPicPr>
+            <a:picLocks noChangeAspect="true"/>
+          </p:cNvPicPr>
+          <p:nvPr/>
+        </p:nvPicPr>
+        <p:blipFill>
+          <a:blip r:embed="rId2"/>
+          <a:srcRect l="0" t="0" r="0" b="0"/>
+          <a:stretch>
+            <a:fillRect/>
+          </a:stretch>
+        </p:blipFill>
         <p:spPr>
           <a:xfrm flipH="false" flipV="false" rot="0">
-            <a:off x="1414697" y="0"/>
-            <a:ext cx="15458607" cy="10287000"/>
-          </a:xfrm>
-          <a:custGeom>
-            <a:avLst/>
-            <a:gdLst/>
-            <a:ahLst/>
-            <a:cxnLst/>
-            <a:rect r="r" b="b" t="t" l="l"/>
-            <a:pathLst>
-              <a:path h="10287000" w="15458607">
-                <a:moveTo>
-                  <a:pt x="0" y="0"/>
-                </a:moveTo>
-                <a:lnTo>
-                  <a:pt x="15458606" y="0"/>
-                </a:lnTo>
-                <a:lnTo>
-                  <a:pt x="15458606" y="10287000"/>
-                </a:lnTo>
-                <a:lnTo>
-                  <a:pt x="0" y="10287000"/>
-                </a:lnTo>
-                <a:lnTo>
-                  <a:pt x="0" y="0"/>
-                </a:lnTo>
-                <a:close/>
-              </a:path>
-            </a:pathLst>
-          </a:custGeom>
-          <a:blipFill>
-            <a:blip r:embed="rId2"/>
-            <a:stretch>
-              <a:fillRect l="0" t="0" r="0" b="0"/>
-            </a:stretch>
-          </a:blipFill>
-        </p:spPr>
+            <a:off x="13655377" y="6809666"/>
+            <a:ext cx="6229999" cy="6954669"/>
+          </a:xfrm>
+          <a:prstGeom prst="rect">
+            <a:avLst/>
+          </a:prstGeom>
+        </p:spPr>
+      </p:pic>
+      <p:pic>
+        <p:nvPicPr>
+          <p:cNvPr name="Picture 3" id="3"/>
+          <p:cNvPicPr>
+            <a:picLocks noChangeAspect="true"/>
+          </p:cNvPicPr>
+          <p:nvPr/>
+        </p:nvPicPr>
+        <p:blipFill>
+          <a:blip r:embed="rId3"/>
+          <a:srcRect l="0" t="0" r="0" b="0"/>
+          <a:stretch>
+            <a:fillRect/>
+          </a:stretch>
+        </p:blipFill>
+        <p:spPr>
+          <a:xfrm flipH="false" flipV="false" rot="0">
+            <a:off x="0" y="0"/>
+            <a:ext cx="6925457" cy="4700654"/>
+          </a:xfrm>
+          <a:prstGeom prst="rect">
+            <a:avLst/>
+          </a:prstGeom>
+        </p:spPr>
+      </p:pic>
+      <p:sp>
+        <p:nvSpPr>
+          <p:cNvPr name="TextBox 4" id="4"/>
+          <p:cNvSpPr txBox="true"/>
+          <p:nvPr/>
+        </p:nvSpPr>
+        <p:spPr>
+          <a:xfrm rot="0">
+            <a:off x="2717556" y="4181475"/>
+            <a:ext cx="12852888" cy="1914525"/>
+          </a:xfrm>
+          <a:prstGeom prst="rect">
+            <a:avLst/>
+          </a:prstGeom>
+        </p:spPr>
+        <p:txBody>
+          <a:bodyPr anchor="t" rtlCol="false" tIns="0" lIns="0" bIns="0" rIns="0">
+            <a:spAutoFit/>
+          </a:bodyPr>
+          <a:lstStyle/>
+          <a:p>
+            <a:pPr algn="ctr">
+              <a:lnSpc>
+                <a:spcPts val="15000"/>
+              </a:lnSpc>
+            </a:pPr>
+            <a:r>
+              <a:rPr lang="en-US" sz="12500">
+                <a:solidFill>
+                  <a:srgbClr val="000000"/>
+                </a:solidFill>
+                <a:latin typeface="무궁화 고딕"/>
+                <a:ea typeface="무궁화 고딕"/>
+                <a:cs typeface="무궁화 고딕"/>
+                <a:sym typeface="무궁화 고딕"/>
+              </a:rPr>
+              <a:t>일본</a:t>
+            </a:r>
+          </a:p>
+        </p:txBody>
       </p:sp>
     </p:spTree>
   </p:cSld>
@@ -3388,96 +3430,51 @@
           <a:chExt cx="0" cy="0"/>
         </a:xfrm>
       </p:grpSpPr>
-      <p:pic>
-        <p:nvPicPr>
-          <p:cNvPr name="Picture 2" id="2"/>
-          <p:cNvPicPr>
-            <a:picLocks noChangeAspect="true"/>
-          </p:cNvPicPr>
-          <p:nvPr/>
-        </p:nvPicPr>
-        <p:blipFill>
-          <a:blip r:embed="rId2"/>
-          <a:srcRect l="0" t="0" r="0" b="0"/>
-          <a:stretch>
-            <a:fillRect/>
-          </a:stretch>
-        </p:blipFill>
+      <p:sp>
+        <p:nvSpPr>
+          <p:cNvPr name="Freeform 2" id="2"/>
+          <p:cNvSpPr/>
+          <p:nvPr/>
+        </p:nvSpPr>
         <p:spPr>
           <a:xfrm flipH="false" flipV="false" rot="0">
-            <a:off x="13655377" y="6809666"/>
-            <a:ext cx="6229999" cy="6954669"/>
-          </a:xfrm>
-          <a:prstGeom prst="rect">
-            <a:avLst/>
-          </a:prstGeom>
-        </p:spPr>
-      </p:pic>
-      <p:pic>
-        <p:nvPicPr>
-          <p:cNvPr name="Picture 3" id="3"/>
-          <p:cNvPicPr>
-            <a:picLocks noChangeAspect="true"/>
-          </p:cNvPicPr>
-          <p:nvPr/>
-        </p:nvPicPr>
-        <p:blipFill>
-          <a:blip r:embed="rId3"/>
-          <a:srcRect l="0" t="0" r="0" b="0"/>
-          <a:stretch>
-            <a:fillRect/>
-          </a:stretch>
-        </p:blipFill>
-        <p:spPr>
-          <a:xfrm flipH="false" flipV="false" rot="0">
-            <a:off x="0" y="0"/>
-            <a:ext cx="6925457" cy="4700654"/>
-          </a:xfrm>
-          <a:prstGeom prst="rect">
-            <a:avLst/>
-          </a:prstGeom>
-        </p:spPr>
-      </p:pic>
-      <p:sp>
-        <p:nvSpPr>
-          <p:cNvPr name="TextBox 4" id="4"/>
-          <p:cNvSpPr txBox="true"/>
-          <p:nvPr/>
-        </p:nvSpPr>
-        <p:spPr>
-          <a:xfrm rot="0">
-            <a:off x="2717556" y="3895725"/>
-            <a:ext cx="12852888" cy="2200275"/>
-          </a:xfrm>
-          <a:prstGeom prst="rect">
-            <a:avLst/>
-          </a:prstGeom>
-        </p:spPr>
-        <p:txBody>
-          <a:bodyPr anchor="t" rtlCol="false" tIns="0" lIns="0" bIns="0" rIns="0">
-            <a:spAutoFit/>
-          </a:bodyPr>
-          <a:lstStyle/>
-          <a:p>
-            <a:pPr algn="ctr">
-              <a:lnSpc>
-                <a:spcPts val="15000"/>
-              </a:lnSpc>
-            </a:pPr>
-            <a:r>
-              <a:rPr lang="en-US" sz="12500">
-                <a:solidFill>
-                  <a:srgbClr val="000000"/>
-                </a:solidFill>
-                <a:latin typeface="Jua"/>
-                <a:ea typeface="Jua"/>
-                <a:cs typeface="Jua"/>
-                <a:sym typeface="Jua"/>
-              </a:rPr>
-              <a:t>중국</a:t>
-            </a:r>
-          </a:p>
-        </p:txBody>
+            <a:off x="1414697" y="0"/>
+            <a:ext cx="15458607" cy="10287000"/>
+          </a:xfrm>
+          <a:custGeom>
+            <a:avLst/>
+            <a:gdLst/>
+            <a:ahLst/>
+            <a:cxnLst/>
+            <a:rect r="r" b="b" t="t" l="l"/>
+            <a:pathLst>
+              <a:path h="10287000" w="15458607">
+                <a:moveTo>
+                  <a:pt x="0" y="0"/>
+                </a:moveTo>
+                <a:lnTo>
+                  <a:pt x="15458606" y="0"/>
+                </a:lnTo>
+                <a:lnTo>
+                  <a:pt x="15458606" y="10287000"/>
+                </a:lnTo>
+                <a:lnTo>
+                  <a:pt x="0" y="10287000"/>
+                </a:lnTo>
+                <a:lnTo>
+                  <a:pt x="0" y="0"/>
+                </a:lnTo>
+                <a:close/>
+              </a:path>
+            </a:pathLst>
+          </a:custGeom>
+          <a:blipFill>
+            <a:blip r:embed="rId2"/>
+            <a:stretch>
+              <a:fillRect l="0" t="0" r="0" b="0"/>
+            </a:stretch>
+          </a:blipFill>
+        </p:spPr>
       </p:sp>
     </p:spTree>
   </p:cSld>
@@ -3511,51 +3508,96 @@
           <a:chExt cx="0" cy="0"/>
         </a:xfrm>
       </p:grpSpPr>
-      <p:sp>
-        <p:nvSpPr>
-          <p:cNvPr name="Freeform 2" id="2"/>
-          <p:cNvSpPr/>
-          <p:nvPr/>
-        </p:nvSpPr>
+      <p:pic>
+        <p:nvPicPr>
+          <p:cNvPr name="Picture 2" id="2"/>
+          <p:cNvPicPr>
+            <a:picLocks noChangeAspect="true"/>
+          </p:cNvPicPr>
+          <p:nvPr/>
+        </p:nvPicPr>
+        <p:blipFill>
+          <a:blip r:embed="rId2"/>
+          <a:srcRect l="0" t="0" r="0" b="0"/>
+          <a:stretch>
+            <a:fillRect/>
+          </a:stretch>
+        </p:blipFill>
         <p:spPr>
           <a:xfrm flipH="false" flipV="false" rot="0">
-            <a:off x="0" y="571500"/>
-            <a:ext cx="18288000" cy="9144000"/>
-          </a:xfrm>
-          <a:custGeom>
-            <a:avLst/>
-            <a:gdLst/>
-            <a:ahLst/>
-            <a:cxnLst/>
-            <a:rect r="r" b="b" t="t" l="l"/>
-            <a:pathLst>
-              <a:path h="9144000" w="18288000">
-                <a:moveTo>
-                  <a:pt x="0" y="0"/>
-                </a:moveTo>
-                <a:lnTo>
-                  <a:pt x="18288000" y="0"/>
-                </a:lnTo>
-                <a:lnTo>
-                  <a:pt x="18288000" y="9144000"/>
-                </a:lnTo>
-                <a:lnTo>
-                  <a:pt x="0" y="9144000"/>
-                </a:lnTo>
-                <a:lnTo>
-                  <a:pt x="0" y="0"/>
-                </a:lnTo>
-                <a:close/>
-              </a:path>
-            </a:pathLst>
-          </a:custGeom>
-          <a:blipFill>
-            <a:blip r:embed="rId2"/>
-            <a:stretch>
-              <a:fillRect l="0" t="0" r="0" b="0"/>
-            </a:stretch>
-          </a:blipFill>
-        </p:spPr>
+            <a:off x="13655377" y="6809666"/>
+            <a:ext cx="6229999" cy="6954669"/>
+          </a:xfrm>
+          <a:prstGeom prst="rect">
+            <a:avLst/>
+          </a:prstGeom>
+        </p:spPr>
+      </p:pic>
+      <p:pic>
+        <p:nvPicPr>
+          <p:cNvPr name="Picture 3" id="3"/>
+          <p:cNvPicPr>
+            <a:picLocks noChangeAspect="true"/>
+          </p:cNvPicPr>
+          <p:nvPr/>
+        </p:nvPicPr>
+        <p:blipFill>
+          <a:blip r:embed="rId3"/>
+          <a:srcRect l="0" t="0" r="0" b="0"/>
+          <a:stretch>
+            <a:fillRect/>
+          </a:stretch>
+        </p:blipFill>
+        <p:spPr>
+          <a:xfrm flipH="false" flipV="false" rot="0">
+            <a:off x="0" y="0"/>
+            <a:ext cx="6925457" cy="4700654"/>
+          </a:xfrm>
+          <a:prstGeom prst="rect">
+            <a:avLst/>
+          </a:prstGeom>
+        </p:spPr>
+      </p:pic>
+      <p:sp>
+        <p:nvSpPr>
+          <p:cNvPr name="TextBox 4" id="4"/>
+          <p:cNvSpPr txBox="true"/>
+          <p:nvPr/>
+        </p:nvSpPr>
+        <p:spPr>
+          <a:xfrm rot="0">
+            <a:off x="2717556" y="4181475"/>
+            <a:ext cx="12852888" cy="1914525"/>
+          </a:xfrm>
+          <a:prstGeom prst="rect">
+            <a:avLst/>
+          </a:prstGeom>
+        </p:spPr>
+        <p:txBody>
+          <a:bodyPr anchor="t" rtlCol="false" tIns="0" lIns="0" bIns="0" rIns="0">
+            <a:spAutoFit/>
+          </a:bodyPr>
+          <a:lstStyle/>
+          <a:p>
+            <a:pPr algn="ctr">
+              <a:lnSpc>
+                <a:spcPts val="15000"/>
+              </a:lnSpc>
+            </a:pPr>
+            <a:r>
+              <a:rPr lang="en-US" sz="12500">
+                <a:solidFill>
+                  <a:srgbClr val="000000"/>
+                </a:solidFill>
+                <a:latin typeface="무궁화 고딕"/>
+                <a:ea typeface="무궁화 고딕"/>
+                <a:cs typeface="무궁화 고딕"/>
+                <a:sym typeface="무궁화 고딕"/>
+              </a:rPr>
+              <a:t>중국</a:t>
+            </a:r>
+          </a:p>
+        </p:txBody>
       </p:sp>
     </p:spTree>
   </p:cSld>
@@ -3589,96 +3631,51 @@
           <a:chExt cx="0" cy="0"/>
         </a:xfrm>
       </p:grpSpPr>
-      <p:pic>
-        <p:nvPicPr>
-          <p:cNvPr name="Picture 2" id="2"/>
-          <p:cNvPicPr>
-            <a:picLocks noChangeAspect="true"/>
-          </p:cNvPicPr>
-          <p:nvPr/>
-        </p:nvPicPr>
-        <p:blipFill>
-          <a:blip r:embed="rId2"/>
-          <a:srcRect l="0" t="0" r="0" b="0"/>
-          <a:stretch>
-            <a:fillRect/>
-          </a:stretch>
-        </p:blipFill>
+      <p:sp>
+        <p:nvSpPr>
+          <p:cNvPr name="Freeform 2" id="2"/>
+          <p:cNvSpPr/>
+          <p:nvPr/>
+        </p:nvSpPr>
         <p:spPr>
           <a:xfrm flipH="false" flipV="false" rot="0">
-            <a:off x="13655377" y="6809666"/>
-            <a:ext cx="6229999" cy="6954669"/>
-          </a:xfrm>
-          <a:prstGeom prst="rect">
-            <a:avLst/>
-          </a:prstGeom>
-        </p:spPr>
-      </p:pic>
-      <p:pic>
-        <p:nvPicPr>
-          <p:cNvPr name="Picture 3" id="3"/>
-          <p:cNvPicPr>
-            <a:picLocks noChangeAspect="true"/>
-          </p:cNvPicPr>
-          <p:nvPr/>
-        </p:nvPicPr>
-        <p:blipFill>
-          <a:blip r:embed="rId3"/>
-          <a:srcRect l="0" t="0" r="0" b="0"/>
-          <a:stretch>
-            <a:fillRect/>
-          </a:stretch>
-        </p:blipFill>
-        <p:spPr>
-          <a:xfrm flipH="false" flipV="false" rot="0">
-            <a:off x="0" y="0"/>
-            <a:ext cx="6925457" cy="4700654"/>
-          </a:xfrm>
-          <a:prstGeom prst="rect">
-            <a:avLst/>
-          </a:prstGeom>
-        </p:spPr>
-      </p:pic>
-      <p:sp>
-        <p:nvSpPr>
-          <p:cNvPr name="TextBox 4" id="4"/>
-          <p:cNvSpPr txBox="true"/>
-          <p:nvPr/>
-        </p:nvSpPr>
-        <p:spPr>
-          <a:xfrm rot="0">
-            <a:off x="2717556" y="3895725"/>
-            <a:ext cx="12852888" cy="2200275"/>
-          </a:xfrm>
-          <a:prstGeom prst="rect">
-            <a:avLst/>
-          </a:prstGeom>
-        </p:spPr>
-        <p:txBody>
-          <a:bodyPr anchor="t" rtlCol="false" tIns="0" lIns="0" bIns="0" rIns="0">
-            <a:spAutoFit/>
-          </a:bodyPr>
-          <a:lstStyle/>
-          <a:p>
-            <a:pPr algn="ctr">
-              <a:lnSpc>
-                <a:spcPts val="15000"/>
-              </a:lnSpc>
-            </a:pPr>
-            <a:r>
-              <a:rPr lang="en-US" sz="12500">
-                <a:solidFill>
-                  <a:srgbClr val="000000"/>
-                </a:solidFill>
-                <a:latin typeface="Jua"/>
-                <a:ea typeface="Jua"/>
-                <a:cs typeface="Jua"/>
-                <a:sym typeface="Jua"/>
-              </a:rPr>
-              <a:t>영국</a:t>
-            </a:r>
-          </a:p>
-        </p:txBody>
+            <a:off x="0" y="571500"/>
+            <a:ext cx="18288000" cy="9144000"/>
+          </a:xfrm>
+          <a:custGeom>
+            <a:avLst/>
+            <a:gdLst/>
+            <a:ahLst/>
+            <a:cxnLst/>
+            <a:rect r="r" b="b" t="t" l="l"/>
+            <a:pathLst>
+              <a:path h="9144000" w="18288000">
+                <a:moveTo>
+                  <a:pt x="0" y="0"/>
+                </a:moveTo>
+                <a:lnTo>
+                  <a:pt x="18288000" y="0"/>
+                </a:lnTo>
+                <a:lnTo>
+                  <a:pt x="18288000" y="9144000"/>
+                </a:lnTo>
+                <a:lnTo>
+                  <a:pt x="0" y="9144000"/>
+                </a:lnTo>
+                <a:lnTo>
+                  <a:pt x="0" y="0"/>
+                </a:lnTo>
+                <a:close/>
+              </a:path>
+            </a:pathLst>
+          </a:custGeom>
+          <a:blipFill>
+            <a:blip r:embed="rId2"/>
+            <a:stretch>
+              <a:fillRect l="0" t="0" r="0" b="0"/>
+            </a:stretch>
+          </a:blipFill>
+        </p:spPr>
       </p:sp>
     </p:spTree>
   </p:cSld>
@@ -3712,51 +3709,96 @@
           <a:chExt cx="0" cy="0"/>
         </a:xfrm>
       </p:grpSpPr>
-      <p:sp>
-        <p:nvSpPr>
-          <p:cNvPr name="Freeform 2" id="2"/>
-          <p:cNvSpPr/>
-          <p:nvPr/>
-        </p:nvSpPr>
+      <p:pic>
+        <p:nvPicPr>
+          <p:cNvPr name="Picture 2" id="2"/>
+          <p:cNvPicPr>
+            <a:picLocks noChangeAspect="true"/>
+          </p:cNvPicPr>
+          <p:nvPr/>
+        </p:nvPicPr>
+        <p:blipFill>
+          <a:blip r:embed="rId2"/>
+          <a:srcRect l="0" t="0" r="0" b="0"/>
+          <a:stretch>
+            <a:fillRect/>
+          </a:stretch>
+        </p:blipFill>
         <p:spPr>
           <a:xfrm flipH="false" flipV="false" rot="0">
-            <a:off x="1837520" y="0"/>
-            <a:ext cx="14612960" cy="10287000"/>
-          </a:xfrm>
-          <a:custGeom>
-            <a:avLst/>
-            <a:gdLst/>
-            <a:ahLst/>
-            <a:cxnLst/>
-            <a:rect r="r" b="b" t="t" l="l"/>
-            <a:pathLst>
-              <a:path h="10287000" w="14612960">
-                <a:moveTo>
-                  <a:pt x="0" y="0"/>
-                </a:moveTo>
-                <a:lnTo>
-                  <a:pt x="14612960" y="0"/>
-                </a:lnTo>
-                <a:lnTo>
-                  <a:pt x="14612960" y="10287000"/>
-                </a:lnTo>
-                <a:lnTo>
-                  <a:pt x="0" y="10287000"/>
-                </a:lnTo>
-                <a:lnTo>
-                  <a:pt x="0" y="0"/>
-                </a:lnTo>
-                <a:close/>
-              </a:path>
-            </a:pathLst>
-          </a:custGeom>
-          <a:blipFill>
-            <a:blip r:embed="rId2"/>
-            <a:stretch>
-              <a:fillRect l="0" t="0" r="-5383" b="0"/>
-            </a:stretch>
-          </a:blipFill>
-        </p:spPr>
+            <a:off x="13655377" y="6809666"/>
+            <a:ext cx="6229999" cy="6954669"/>
+          </a:xfrm>
+          <a:prstGeom prst="rect">
+            <a:avLst/>
+          </a:prstGeom>
+        </p:spPr>
+      </p:pic>
+      <p:pic>
+        <p:nvPicPr>
+          <p:cNvPr name="Picture 3" id="3"/>
+          <p:cNvPicPr>
+            <a:picLocks noChangeAspect="true"/>
+          </p:cNvPicPr>
+          <p:nvPr/>
+        </p:nvPicPr>
+        <p:blipFill>
+          <a:blip r:embed="rId3"/>
+          <a:srcRect l="0" t="0" r="0" b="0"/>
+          <a:stretch>
+            <a:fillRect/>
+          </a:stretch>
+        </p:blipFill>
+        <p:spPr>
+          <a:xfrm flipH="false" flipV="false" rot="0">
+            <a:off x="0" y="0"/>
+            <a:ext cx="6925457" cy="4700654"/>
+          </a:xfrm>
+          <a:prstGeom prst="rect">
+            <a:avLst/>
+          </a:prstGeom>
+        </p:spPr>
+      </p:pic>
+      <p:sp>
+        <p:nvSpPr>
+          <p:cNvPr name="TextBox 4" id="4"/>
+          <p:cNvSpPr txBox="true"/>
+          <p:nvPr/>
+        </p:nvSpPr>
+        <p:spPr>
+          <a:xfrm rot="0">
+            <a:off x="2717556" y="4181475"/>
+            <a:ext cx="12852888" cy="1914525"/>
+          </a:xfrm>
+          <a:prstGeom prst="rect">
+            <a:avLst/>
+          </a:prstGeom>
+        </p:spPr>
+        <p:txBody>
+          <a:bodyPr anchor="t" rtlCol="false" tIns="0" lIns="0" bIns="0" rIns="0">
+            <a:spAutoFit/>
+          </a:bodyPr>
+          <a:lstStyle/>
+          <a:p>
+            <a:pPr algn="ctr">
+              <a:lnSpc>
+                <a:spcPts val="15000"/>
+              </a:lnSpc>
+            </a:pPr>
+            <a:r>
+              <a:rPr lang="en-US" sz="12500">
+                <a:solidFill>
+                  <a:srgbClr val="000000"/>
+                </a:solidFill>
+                <a:latin typeface="무궁화 고딕"/>
+                <a:ea typeface="무궁화 고딕"/>
+                <a:cs typeface="무궁화 고딕"/>
+                <a:sym typeface="무궁화 고딕"/>
+              </a:rPr>
+              <a:t>영국</a:t>
+            </a:r>
+          </a:p>
+        </p:txBody>
       </p:sp>
     </p:spTree>
   </p:cSld>
@@ -3790,96 +3832,51 @@
           <a:chExt cx="0" cy="0"/>
         </a:xfrm>
       </p:grpSpPr>
-      <p:pic>
-        <p:nvPicPr>
-          <p:cNvPr name="Picture 2" id="2"/>
-          <p:cNvPicPr>
-            <a:picLocks noChangeAspect="true"/>
-          </p:cNvPicPr>
-          <p:nvPr/>
-        </p:nvPicPr>
-        <p:blipFill>
-          <a:blip r:embed="rId2"/>
-          <a:srcRect l="0" t="0" r="0" b="0"/>
-          <a:stretch>
-            <a:fillRect/>
-          </a:stretch>
-        </p:blipFill>
+      <p:sp>
+        <p:nvSpPr>
+          <p:cNvPr name="Freeform 2" id="2"/>
+          <p:cNvSpPr/>
+          <p:nvPr/>
+        </p:nvSpPr>
         <p:spPr>
           <a:xfrm flipH="false" flipV="false" rot="0">
-            <a:off x="13655377" y="6809666"/>
-            <a:ext cx="6229999" cy="6954669"/>
-          </a:xfrm>
-          <a:prstGeom prst="rect">
-            <a:avLst/>
-          </a:prstGeom>
-        </p:spPr>
-      </p:pic>
-      <p:pic>
-        <p:nvPicPr>
-          <p:cNvPr name="Picture 3" id="3"/>
-          <p:cNvPicPr>
-            <a:picLocks noChangeAspect="true"/>
-          </p:cNvPicPr>
-          <p:nvPr/>
-        </p:nvPicPr>
-        <p:blipFill>
-          <a:blip r:embed="rId3"/>
-          <a:srcRect l="0" t="0" r="0" b="0"/>
-          <a:stretch>
-            <a:fillRect/>
-          </a:stretch>
-        </p:blipFill>
-        <p:spPr>
-          <a:xfrm flipH="false" flipV="false" rot="0">
-            <a:off x="0" y="0"/>
-            <a:ext cx="6925457" cy="4700654"/>
-          </a:xfrm>
-          <a:prstGeom prst="rect">
-            <a:avLst/>
-          </a:prstGeom>
-        </p:spPr>
-      </p:pic>
-      <p:sp>
-        <p:nvSpPr>
-          <p:cNvPr name="TextBox 4" id="4"/>
-          <p:cNvSpPr txBox="true"/>
-          <p:nvPr/>
-        </p:nvSpPr>
-        <p:spPr>
-          <a:xfrm rot="0">
-            <a:off x="2717556" y="3895725"/>
-            <a:ext cx="12852888" cy="2200275"/>
-          </a:xfrm>
-          <a:prstGeom prst="rect">
-            <a:avLst/>
-          </a:prstGeom>
-        </p:spPr>
-        <p:txBody>
-          <a:bodyPr anchor="t" rtlCol="false" tIns="0" lIns="0" bIns="0" rIns="0">
-            <a:spAutoFit/>
-          </a:bodyPr>
-          <a:lstStyle/>
-          <a:p>
-            <a:pPr algn="ctr">
-              <a:lnSpc>
-                <a:spcPts val="15000"/>
-              </a:lnSpc>
-            </a:pPr>
-            <a:r>
-              <a:rPr lang="en-US" sz="12500">
-                <a:solidFill>
-                  <a:srgbClr val="000000"/>
-                </a:solidFill>
-                <a:latin typeface="Jua"/>
-                <a:ea typeface="Jua"/>
-                <a:cs typeface="Jua"/>
-                <a:sym typeface="Jua"/>
-              </a:rPr>
-              <a:t>프랑스</a:t>
-            </a:r>
-          </a:p>
-        </p:txBody>
+            <a:off x="1837520" y="0"/>
+            <a:ext cx="14612960" cy="10287000"/>
+          </a:xfrm>
+          <a:custGeom>
+            <a:avLst/>
+            <a:gdLst/>
+            <a:ahLst/>
+            <a:cxnLst/>
+            <a:rect r="r" b="b" t="t" l="l"/>
+            <a:pathLst>
+              <a:path h="10287000" w="14612960">
+                <a:moveTo>
+                  <a:pt x="0" y="0"/>
+                </a:moveTo>
+                <a:lnTo>
+                  <a:pt x="14612960" y="0"/>
+                </a:lnTo>
+                <a:lnTo>
+                  <a:pt x="14612960" y="10287000"/>
+                </a:lnTo>
+                <a:lnTo>
+                  <a:pt x="0" y="10287000"/>
+                </a:lnTo>
+                <a:lnTo>
+                  <a:pt x="0" y="0"/>
+                </a:lnTo>
+                <a:close/>
+              </a:path>
+            </a:pathLst>
+          </a:custGeom>
+          <a:blipFill>
+            <a:blip r:embed="rId2"/>
+            <a:stretch>
+              <a:fillRect l="0" t="0" r="-5383" b="0"/>
+            </a:stretch>
+          </a:blipFill>
+        </p:spPr>
       </p:sp>
     </p:spTree>
   </p:cSld>
@@ -3913,51 +3910,96 @@
           <a:chExt cx="0" cy="0"/>
         </a:xfrm>
       </p:grpSpPr>
-      <p:sp>
-        <p:nvSpPr>
-          <p:cNvPr name="Freeform 2" id="2"/>
-          <p:cNvSpPr/>
-          <p:nvPr/>
-        </p:nvSpPr>
+      <p:pic>
+        <p:nvPicPr>
+          <p:cNvPr name="Picture 2" id="2"/>
+          <p:cNvPicPr>
+            <a:picLocks noChangeAspect="true"/>
+          </p:cNvPicPr>
+          <p:nvPr/>
+        </p:nvPicPr>
+        <p:blipFill>
+          <a:blip r:embed="rId2"/>
+          <a:srcRect l="0" t="0" r="0" b="0"/>
+          <a:stretch>
+            <a:fillRect/>
+          </a:stretch>
+        </p:blipFill>
         <p:spPr>
           <a:xfrm flipH="false" flipV="false" rot="0">
-            <a:off x="571500" y="0"/>
-            <a:ext cx="17145000" cy="10287000"/>
-          </a:xfrm>
-          <a:custGeom>
-            <a:avLst/>
-            <a:gdLst/>
-            <a:ahLst/>
-            <a:cxnLst/>
-            <a:rect r="r" b="b" t="t" l="l"/>
-            <a:pathLst>
-              <a:path h="10287000" w="17145000">
-                <a:moveTo>
-                  <a:pt x="0" y="0"/>
-                </a:moveTo>
-                <a:lnTo>
-                  <a:pt x="17145000" y="0"/>
-                </a:lnTo>
-                <a:lnTo>
-                  <a:pt x="17145000" y="10287000"/>
-                </a:lnTo>
-                <a:lnTo>
-                  <a:pt x="0" y="10287000"/>
-                </a:lnTo>
-                <a:lnTo>
-                  <a:pt x="0" y="0"/>
-                </a:lnTo>
-                <a:close/>
-              </a:path>
-            </a:pathLst>
-          </a:custGeom>
-          <a:blipFill>
-            <a:blip r:embed="rId2"/>
-            <a:stretch>
-              <a:fillRect l="0" t="0" r="0" b="0"/>
-            </a:stretch>
-          </a:blipFill>
-        </p:spPr>
+            <a:off x="13655377" y="6809666"/>
+            <a:ext cx="6229999" cy="6954669"/>
+          </a:xfrm>
+          <a:prstGeom prst="rect">
+            <a:avLst/>
+          </a:prstGeom>
+        </p:spPr>
+      </p:pic>
+      <p:pic>
+        <p:nvPicPr>
+          <p:cNvPr name="Picture 3" id="3"/>
+          <p:cNvPicPr>
+            <a:picLocks noChangeAspect="true"/>
+          </p:cNvPicPr>
+          <p:nvPr/>
+        </p:nvPicPr>
+        <p:blipFill>
+          <a:blip r:embed="rId3"/>
+          <a:srcRect l="0" t="0" r="0" b="0"/>
+          <a:stretch>
+            <a:fillRect/>
+          </a:stretch>
+        </p:blipFill>
+        <p:spPr>
+          <a:xfrm flipH="false" flipV="false" rot="0">
+            <a:off x="0" y="0"/>
+            <a:ext cx="6925457" cy="4700654"/>
+          </a:xfrm>
+          <a:prstGeom prst="rect">
+            <a:avLst/>
+          </a:prstGeom>
+        </p:spPr>
+      </p:pic>
+      <p:sp>
+        <p:nvSpPr>
+          <p:cNvPr name="TextBox 4" id="4"/>
+          <p:cNvSpPr txBox="true"/>
+          <p:nvPr/>
+        </p:nvSpPr>
+        <p:spPr>
+          <a:xfrm rot="0">
+            <a:off x="2717556" y="4181475"/>
+            <a:ext cx="12852888" cy="1914525"/>
+          </a:xfrm>
+          <a:prstGeom prst="rect">
+            <a:avLst/>
+          </a:prstGeom>
+        </p:spPr>
+        <p:txBody>
+          <a:bodyPr anchor="t" rtlCol="false" tIns="0" lIns="0" bIns="0" rIns="0">
+            <a:spAutoFit/>
+          </a:bodyPr>
+          <a:lstStyle/>
+          <a:p>
+            <a:pPr algn="ctr">
+              <a:lnSpc>
+                <a:spcPts val="15000"/>
+              </a:lnSpc>
+            </a:pPr>
+            <a:r>
+              <a:rPr lang="en-US" sz="12500">
+                <a:solidFill>
+                  <a:srgbClr val="000000"/>
+                </a:solidFill>
+                <a:latin typeface="무궁화 고딕"/>
+                <a:ea typeface="무궁화 고딕"/>
+                <a:cs typeface="무궁화 고딕"/>
+                <a:sym typeface="무궁화 고딕"/>
+              </a:rPr>
+              <a:t>프랑스</a:t>
+            </a:r>
+          </a:p>
+        </p:txBody>
       </p:sp>
     </p:spTree>
   </p:cSld>
@@ -3991,96 +4033,51 @@
           <a:chExt cx="0" cy="0"/>
         </a:xfrm>
       </p:grpSpPr>
-      <p:pic>
-        <p:nvPicPr>
-          <p:cNvPr name="Picture 2" id="2"/>
-          <p:cNvPicPr>
-            <a:picLocks noChangeAspect="true"/>
-          </p:cNvPicPr>
-          <p:nvPr/>
-        </p:nvPicPr>
-        <p:blipFill>
-          <a:blip r:embed="rId2"/>
-          <a:srcRect l="0" t="0" r="0" b="0"/>
-          <a:stretch>
-            <a:fillRect/>
-          </a:stretch>
-        </p:blipFill>
+      <p:sp>
+        <p:nvSpPr>
+          <p:cNvPr name="Freeform 2" id="2"/>
+          <p:cNvSpPr/>
+          <p:nvPr/>
+        </p:nvSpPr>
         <p:spPr>
           <a:xfrm flipH="false" flipV="false" rot="0">
-            <a:off x="13655377" y="6809666"/>
-            <a:ext cx="6229999" cy="6954669"/>
-          </a:xfrm>
-          <a:prstGeom prst="rect">
-            <a:avLst/>
-          </a:prstGeom>
-        </p:spPr>
-      </p:pic>
-      <p:pic>
-        <p:nvPicPr>
-          <p:cNvPr name="Picture 3" id="3"/>
-          <p:cNvPicPr>
-            <a:picLocks noChangeAspect="true"/>
-          </p:cNvPicPr>
-          <p:nvPr/>
-        </p:nvPicPr>
-        <p:blipFill>
-          <a:blip r:embed="rId3"/>
-          <a:srcRect l="0" t="0" r="0" b="0"/>
-          <a:stretch>
-            <a:fillRect/>
-          </a:stretch>
-        </p:blipFill>
-        <p:spPr>
-          <a:xfrm flipH="false" flipV="false" rot="0">
-            <a:off x="0" y="0"/>
-            <a:ext cx="6925457" cy="4700654"/>
-          </a:xfrm>
-          <a:prstGeom prst="rect">
-            <a:avLst/>
-          </a:prstGeom>
-        </p:spPr>
-      </p:pic>
-      <p:sp>
-        <p:nvSpPr>
-          <p:cNvPr name="TextBox 4" id="4"/>
-          <p:cNvSpPr txBox="true"/>
-          <p:nvPr/>
-        </p:nvSpPr>
-        <p:spPr>
-          <a:xfrm rot="0">
-            <a:off x="2717556" y="3895725"/>
-            <a:ext cx="12852888" cy="2200275"/>
-          </a:xfrm>
-          <a:prstGeom prst="rect">
-            <a:avLst/>
-          </a:prstGeom>
-        </p:spPr>
-        <p:txBody>
-          <a:bodyPr anchor="t" rtlCol="false" tIns="0" lIns="0" bIns="0" rIns="0">
-            <a:spAutoFit/>
-          </a:bodyPr>
-          <a:lstStyle/>
-          <a:p>
-            <a:pPr algn="ctr">
-              <a:lnSpc>
-                <a:spcPts val="15000"/>
-              </a:lnSpc>
-            </a:pPr>
-            <a:r>
-              <a:rPr lang="en-US" sz="12500">
-                <a:solidFill>
-                  <a:srgbClr val="000000"/>
-                </a:solidFill>
-                <a:latin typeface="Jua"/>
-                <a:ea typeface="Jua"/>
-                <a:cs typeface="Jua"/>
-                <a:sym typeface="Jua"/>
-              </a:rPr>
-              <a:t>독일</a:t>
-            </a:r>
-          </a:p>
-        </p:txBody>
+            <a:off x="571500" y="0"/>
+            <a:ext cx="17145000" cy="10287000"/>
+          </a:xfrm>
+          <a:custGeom>
+            <a:avLst/>
+            <a:gdLst/>
+            <a:ahLst/>
+            <a:cxnLst/>
+            <a:rect r="r" b="b" t="t" l="l"/>
+            <a:pathLst>
+              <a:path h="10287000" w="17145000">
+                <a:moveTo>
+                  <a:pt x="0" y="0"/>
+                </a:moveTo>
+                <a:lnTo>
+                  <a:pt x="17145000" y="0"/>
+                </a:lnTo>
+                <a:lnTo>
+                  <a:pt x="17145000" y="10287000"/>
+                </a:lnTo>
+                <a:lnTo>
+                  <a:pt x="0" y="10287000"/>
+                </a:lnTo>
+                <a:lnTo>
+                  <a:pt x="0" y="0"/>
+                </a:lnTo>
+                <a:close/>
+              </a:path>
+            </a:pathLst>
+          </a:custGeom>
+          <a:blipFill>
+            <a:blip r:embed="rId2"/>
+            <a:stretch>
+              <a:fillRect l="0" t="0" r="0" b="0"/>
+            </a:stretch>
+          </a:blipFill>
+        </p:spPr>
       </p:sp>
     </p:spTree>
   </p:cSld>
@@ -4114,51 +4111,96 @@
           <a:chExt cx="0" cy="0"/>
         </a:xfrm>
       </p:grpSpPr>
-      <p:sp>
-        <p:nvSpPr>
-          <p:cNvPr name="Freeform 2" id="2"/>
-          <p:cNvSpPr/>
-          <p:nvPr/>
-        </p:nvSpPr>
+      <p:pic>
+        <p:nvPicPr>
+          <p:cNvPr name="Picture 2" id="2"/>
+          <p:cNvPicPr>
+            <a:picLocks noChangeAspect="true"/>
+          </p:cNvPicPr>
+          <p:nvPr/>
+        </p:nvPicPr>
+        <p:blipFill>
+          <a:blip r:embed="rId2"/>
+          <a:srcRect l="0" t="0" r="0" b="0"/>
+          <a:stretch>
+            <a:fillRect/>
+          </a:stretch>
+        </p:blipFill>
         <p:spPr>
           <a:xfrm flipH="false" flipV="false" rot="0">
-            <a:off x="0" y="571500"/>
-            <a:ext cx="18288000" cy="9144000"/>
-          </a:xfrm>
-          <a:custGeom>
-            <a:avLst/>
-            <a:gdLst/>
-            <a:ahLst/>
-            <a:cxnLst/>
-            <a:rect r="r" b="b" t="t" l="l"/>
-            <a:pathLst>
-              <a:path h="9144000" w="18288000">
-                <a:moveTo>
-                  <a:pt x="0" y="0"/>
-                </a:moveTo>
-                <a:lnTo>
-                  <a:pt x="18288000" y="0"/>
-                </a:lnTo>
-                <a:lnTo>
-                  <a:pt x="18288000" y="9144000"/>
-                </a:lnTo>
-                <a:lnTo>
-                  <a:pt x="0" y="9144000"/>
-                </a:lnTo>
-                <a:lnTo>
-                  <a:pt x="0" y="0"/>
-                </a:lnTo>
-                <a:close/>
-              </a:path>
-            </a:pathLst>
-          </a:custGeom>
-          <a:blipFill>
-            <a:blip r:embed="rId2"/>
-            <a:stretch>
-              <a:fillRect l="0" t="0" r="0" b="0"/>
-            </a:stretch>
-          </a:blipFill>
-        </p:spPr>
+            <a:off x="13655377" y="6809666"/>
+            <a:ext cx="6229999" cy="6954669"/>
+          </a:xfrm>
+          <a:prstGeom prst="rect">
+            <a:avLst/>
+          </a:prstGeom>
+        </p:spPr>
+      </p:pic>
+      <p:pic>
+        <p:nvPicPr>
+          <p:cNvPr name="Picture 3" id="3"/>
+          <p:cNvPicPr>
+            <a:picLocks noChangeAspect="true"/>
+          </p:cNvPicPr>
+          <p:nvPr/>
+        </p:nvPicPr>
+        <p:blipFill>
+          <a:blip r:embed="rId3"/>
+          <a:srcRect l="0" t="0" r="0" b="0"/>
+          <a:stretch>
+            <a:fillRect/>
+          </a:stretch>
+        </p:blipFill>
+        <p:spPr>
+          <a:xfrm flipH="false" flipV="false" rot="0">
+            <a:off x="0" y="0"/>
+            <a:ext cx="6925457" cy="4700654"/>
+          </a:xfrm>
+          <a:prstGeom prst="rect">
+            <a:avLst/>
+          </a:prstGeom>
+        </p:spPr>
+      </p:pic>
+      <p:sp>
+        <p:nvSpPr>
+          <p:cNvPr name="TextBox 4" id="4"/>
+          <p:cNvSpPr txBox="true"/>
+          <p:nvPr/>
+        </p:nvSpPr>
+        <p:spPr>
+          <a:xfrm rot="0">
+            <a:off x="2717556" y="4181475"/>
+            <a:ext cx="12852888" cy="1914525"/>
+          </a:xfrm>
+          <a:prstGeom prst="rect">
+            <a:avLst/>
+          </a:prstGeom>
+        </p:spPr>
+        <p:txBody>
+          <a:bodyPr anchor="t" rtlCol="false" tIns="0" lIns="0" bIns="0" rIns="0">
+            <a:spAutoFit/>
+          </a:bodyPr>
+          <a:lstStyle/>
+          <a:p>
+            <a:pPr algn="ctr">
+              <a:lnSpc>
+                <a:spcPts val="15000"/>
+              </a:lnSpc>
+            </a:pPr>
+            <a:r>
+              <a:rPr lang="en-US" sz="12500">
+                <a:solidFill>
+                  <a:srgbClr val="000000"/>
+                </a:solidFill>
+                <a:latin typeface="무궁화 고딕"/>
+                <a:ea typeface="무궁화 고딕"/>
+                <a:cs typeface="무궁화 고딕"/>
+                <a:sym typeface="무궁화 고딕"/>
+              </a:rPr>
+              <a:t>독일</a:t>
+            </a:r>
+          </a:p>
+        </p:txBody>
       </p:sp>
     </p:spTree>
   </p:cSld>
@@ -4192,96 +4234,51 @@
           <a:chExt cx="0" cy="0"/>
         </a:xfrm>
       </p:grpSpPr>
-      <p:pic>
-        <p:nvPicPr>
-          <p:cNvPr name="Picture 2" id="2"/>
-          <p:cNvPicPr>
-            <a:picLocks noChangeAspect="true"/>
-          </p:cNvPicPr>
-          <p:nvPr/>
-        </p:nvPicPr>
-        <p:blipFill>
-          <a:blip r:embed="rId2"/>
-          <a:srcRect l="0" t="0" r="0" b="0"/>
-          <a:stretch>
-            <a:fillRect/>
-          </a:stretch>
-        </p:blipFill>
+      <p:sp>
+        <p:nvSpPr>
+          <p:cNvPr name="Freeform 2" id="2"/>
+          <p:cNvSpPr/>
+          <p:nvPr/>
+        </p:nvSpPr>
         <p:spPr>
           <a:xfrm flipH="false" flipV="false" rot="0">
-            <a:off x="13655377" y="6809666"/>
-            <a:ext cx="6229999" cy="6954669"/>
-          </a:xfrm>
-          <a:prstGeom prst="rect">
-            <a:avLst/>
-          </a:prstGeom>
-        </p:spPr>
-      </p:pic>
-      <p:pic>
-        <p:nvPicPr>
-          <p:cNvPr name="Picture 3" id="3"/>
-          <p:cNvPicPr>
-            <a:picLocks noChangeAspect="true"/>
-          </p:cNvPicPr>
-          <p:nvPr/>
-        </p:nvPicPr>
-        <p:blipFill>
-          <a:blip r:embed="rId3"/>
-          <a:srcRect l="0" t="0" r="0" b="0"/>
-          <a:stretch>
-            <a:fillRect/>
-          </a:stretch>
-        </p:blipFill>
-        <p:spPr>
-          <a:xfrm flipH="false" flipV="false" rot="0">
-            <a:off x="0" y="0"/>
-            <a:ext cx="6925457" cy="4700654"/>
-          </a:xfrm>
-          <a:prstGeom prst="rect">
-            <a:avLst/>
-          </a:prstGeom>
-        </p:spPr>
-      </p:pic>
-      <p:sp>
-        <p:nvSpPr>
-          <p:cNvPr name="TextBox 4" id="4"/>
-          <p:cNvSpPr txBox="true"/>
-          <p:nvPr/>
-        </p:nvSpPr>
-        <p:spPr>
-          <a:xfrm rot="0">
-            <a:off x="2717556" y="3895725"/>
-            <a:ext cx="12852888" cy="2200275"/>
-          </a:xfrm>
-          <a:prstGeom prst="rect">
-            <a:avLst/>
-          </a:prstGeom>
-        </p:spPr>
-        <p:txBody>
-          <a:bodyPr anchor="t" rtlCol="false" tIns="0" lIns="0" bIns="0" rIns="0">
-            <a:spAutoFit/>
-          </a:bodyPr>
-          <a:lstStyle/>
-          <a:p>
-            <a:pPr algn="ctr">
-              <a:lnSpc>
-                <a:spcPts val="15000"/>
-              </a:lnSpc>
-            </a:pPr>
-            <a:r>
-              <a:rPr lang="en-US" sz="12500">
-                <a:solidFill>
-                  <a:srgbClr val="000000"/>
-                </a:solidFill>
-                <a:latin typeface="Jua"/>
-                <a:ea typeface="Jua"/>
-                <a:cs typeface="Jua"/>
-                <a:sym typeface="Jua"/>
-              </a:rPr>
-              <a:t>캐나다</a:t>
-            </a:r>
-          </a:p>
-        </p:txBody>
+            <a:off x="0" y="571500"/>
+            <a:ext cx="18288000" cy="9144000"/>
+          </a:xfrm>
+          <a:custGeom>
+            <a:avLst/>
+            <a:gdLst/>
+            <a:ahLst/>
+            <a:cxnLst/>
+            <a:rect r="r" b="b" t="t" l="l"/>
+            <a:pathLst>
+              <a:path h="9144000" w="18288000">
+                <a:moveTo>
+                  <a:pt x="0" y="0"/>
+                </a:moveTo>
+                <a:lnTo>
+                  <a:pt x="18288000" y="0"/>
+                </a:lnTo>
+                <a:lnTo>
+                  <a:pt x="18288000" y="9144000"/>
+                </a:lnTo>
+                <a:lnTo>
+                  <a:pt x="0" y="9144000"/>
+                </a:lnTo>
+                <a:lnTo>
+                  <a:pt x="0" y="0"/>
+                </a:lnTo>
+                <a:close/>
+              </a:path>
+            </a:pathLst>
+          </a:custGeom>
+          <a:blipFill>
+            <a:blip r:embed="rId2"/>
+            <a:stretch>
+              <a:fillRect l="0" t="0" r="0" b="0"/>
+            </a:stretch>
+          </a:blipFill>
+        </p:spPr>
       </p:sp>
     </p:spTree>
   </p:cSld>
@@ -4425,8 +4422,8 @@
         </p:nvSpPr>
         <p:spPr>
           <a:xfrm rot="0">
-            <a:off x="11392761" y="600705"/>
-            <a:ext cx="5362043" cy="1600200"/>
+            <a:off x="11392761" y="819780"/>
+            <a:ext cx="5362043" cy="1381125"/>
           </a:xfrm>
           <a:prstGeom prst="rect">
             <a:avLst/>
@@ -4448,10 +4445,10 @@
                 <a:solidFill>
                   <a:srgbClr val="FFFAEF"/>
                 </a:solidFill>
-                <a:latin typeface="Jua"/>
-                <a:ea typeface="Jua"/>
-                <a:cs typeface="Jua"/>
-                <a:sym typeface="Jua"/>
+                <a:latin typeface="무궁화 고딕"/>
+                <a:ea typeface="무궁화 고딕"/>
+                <a:cs typeface="무궁화 고딕"/>
+                <a:sym typeface="무궁화 고딕"/>
               </a:rPr>
               <a:t>규칙</a:t>
             </a:r>
@@ -4467,9 +4464,9 @@
         <p:grpSpPr>
           <a:xfrm rot="0">
             <a:off x="309172" y="535073"/>
-            <a:ext cx="12619696" cy="2100123"/>
+            <a:ext cx="12619696" cy="1969569"/>
             <a:chOff x="0" y="0"/>
-            <a:chExt cx="16826261" cy="2800164"/>
+            <a:chExt cx="16826261" cy="2626091"/>
           </a:xfrm>
         </p:grpSpPr>
         <p:sp>
@@ -4480,8 +4477,8 @@
           </p:nvSpPr>
           <p:spPr>
             <a:xfrm rot="0">
-              <a:off x="0" y="1615940"/>
-              <a:ext cx="16826261" cy="1184224"/>
+              <a:off x="0" y="1638666"/>
+              <a:ext cx="16826261" cy="987426"/>
             </a:xfrm>
             <a:prstGeom prst="rect">
               <a:avLst/>
@@ -4495,18 +4492,18 @@
             <a:p>
               <a:pPr algn="l">
                 <a:lnSpc>
-                  <a:spcPts val="7402"/>
+                  <a:spcPts val="6299"/>
                 </a:lnSpc>
               </a:pPr>
               <a:r>
-                <a:rPr lang="en-US" sz="5287">
+                <a:rPr lang="en-US" sz="4499">
                   <a:solidFill>
                     <a:srgbClr val="FFFAEF"/>
                   </a:solidFill>
-                  <a:latin typeface="TDTD가온"/>
-                  <a:ea typeface="TDTD가온"/>
-                  <a:cs typeface="TDTD가온"/>
-                  <a:sym typeface="TDTD가온"/>
+                  <a:latin typeface="무궁화 고딕"/>
+                  <a:ea typeface="무궁화 고딕"/>
+                  <a:cs typeface="무궁화 고딕"/>
+                  <a:sym typeface="무궁화 고딕"/>
                 </a:rPr>
                 <a:t>팀별로 나눠 앉습니다.</a:t>
               </a:r>
@@ -4521,8 +4518,8 @@
           </p:nvSpPr>
           <p:spPr>
             <a:xfrm rot="0">
-              <a:off x="0" y="-190500"/>
-              <a:ext cx="11298371" cy="1367863"/>
+              <a:off x="0" y="-66675"/>
+              <a:ext cx="11298371" cy="1238189"/>
             </a:xfrm>
             <a:prstGeom prst="rect">
               <a:avLst/>
@@ -4544,10 +4541,10 @@
                   <a:solidFill>
                     <a:srgbClr val="FFFAEF"/>
                   </a:solidFill>
-                  <a:latin typeface="Jua"/>
-                  <a:ea typeface="Jua"/>
-                  <a:cs typeface="Jua"/>
-                  <a:sym typeface="Jua"/>
+                  <a:latin typeface="무궁화 고딕 Bold"/>
+                  <a:ea typeface="무궁화 고딕 Bold"/>
+                  <a:cs typeface="무궁화 고딕 Bold"/>
+                  <a:sym typeface="무궁화 고딕 Bold"/>
                 </a:rPr>
                 <a:t>STEP 1.</a:t>
               </a:r>
@@ -4563,10 +4560,10 @@
         </p:nvGrpSpPr>
         <p:grpSpPr>
           <a:xfrm rot="0">
-            <a:off x="10181877" y="7809938"/>
-            <a:ext cx="8106123" cy="2034517"/>
+            <a:off x="10462613" y="8200435"/>
+            <a:ext cx="7825387" cy="1911962"/>
             <a:chOff x="0" y="0"/>
-            <a:chExt cx="10808164" cy="2712689"/>
+            <a:chExt cx="10433849" cy="2549283"/>
           </a:xfrm>
         </p:grpSpPr>
         <p:sp>
@@ -4577,8 +4574,8 @@
           </p:nvSpPr>
           <p:spPr>
             <a:xfrm rot="0">
-              <a:off x="0" y="1542808"/>
-              <a:ext cx="10705410" cy="1169882"/>
+              <a:off x="0" y="1561858"/>
+              <a:ext cx="10334653" cy="987426"/>
             </a:xfrm>
             <a:prstGeom prst="rect">
               <a:avLst/>
@@ -4592,18 +4589,18 @@
             <a:p>
               <a:pPr algn="l">
                 <a:lnSpc>
-                  <a:spcPts val="7420"/>
+                  <a:spcPts val="6299"/>
                 </a:lnSpc>
               </a:pPr>
               <a:r>
-                <a:rPr lang="en-US" sz="5300">
+                <a:rPr lang="en-US" sz="4499">
                   <a:solidFill>
                     <a:srgbClr val="FFFAEF"/>
                   </a:solidFill>
-                  <a:latin typeface="TDTD가온"/>
-                  <a:ea typeface="TDTD가온"/>
-                  <a:cs typeface="TDTD가온"/>
-                  <a:sym typeface="TDTD가온"/>
+                  <a:latin typeface="무궁화 고딕"/>
+                  <a:ea typeface="무궁화 고딕"/>
+                  <a:cs typeface="무궁화 고딕"/>
+                  <a:sym typeface="무궁화 고딕"/>
                 </a:rPr>
                 <a:t>가장 많은 점수를 얻은 팀이 우승!</a:t>
               </a:r>
@@ -4618,8 +4615,8 @@
           </p:nvSpPr>
           <p:spPr>
             <a:xfrm rot="0">
-              <a:off x="0" y="-190500"/>
-              <a:ext cx="10808164" cy="1374479"/>
+              <a:off x="0" y="-57150"/>
+              <a:ext cx="10433849" cy="1241129"/>
             </a:xfrm>
             <a:prstGeom prst="rect">
               <a:avLst/>
@@ -4641,10 +4638,10 @@
                   <a:solidFill>
                     <a:srgbClr val="FFFAEF"/>
                   </a:solidFill>
-                  <a:latin typeface="Jua"/>
-                  <a:ea typeface="Jua"/>
-                  <a:cs typeface="Jua"/>
-                  <a:sym typeface="Jua"/>
+                  <a:latin typeface="무궁화 고딕 Bold"/>
+                  <a:ea typeface="무궁화 고딕 Bold"/>
+                  <a:cs typeface="무궁화 고딕 Bold"/>
+                  <a:sym typeface="무궁화 고딕 Bold"/>
                 </a:rPr>
                 <a:t>STEP 3.</a:t>
               </a:r>
@@ -4660,10 +4657,10 @@
         </p:nvGrpSpPr>
         <p:grpSpPr>
           <a:xfrm rot="0">
-            <a:off x="5218668" y="3547689"/>
-            <a:ext cx="8554182" cy="3975348"/>
+            <a:off x="4966317" y="3822879"/>
+            <a:ext cx="8554182" cy="2755582"/>
             <a:chOff x="0" y="0"/>
-            <a:chExt cx="11405576" cy="5300464"/>
+            <a:chExt cx="11405576" cy="3674109"/>
           </a:xfrm>
         </p:grpSpPr>
         <p:sp>
@@ -4674,8 +4671,8 @@
           </p:nvSpPr>
           <p:spPr>
             <a:xfrm rot="0">
-              <a:off x="0" y="1621596"/>
-              <a:ext cx="11405576" cy="3678868"/>
+              <a:off x="0" y="1632584"/>
+              <a:ext cx="11405576" cy="2041526"/>
             </a:xfrm>
             <a:prstGeom prst="rect">
               <a:avLst/>
@@ -4689,28 +4686,40 @@
             <a:p>
               <a:pPr algn="l">
                 <a:lnSpc>
-                  <a:spcPts val="7415"/>
+                  <a:spcPts val="6299"/>
                 </a:lnSpc>
               </a:pPr>
               <a:r>
-                <a:rPr lang="en-US" sz="5296">
+                <a:rPr lang="en-US" sz="4499">
                   <a:solidFill>
                     <a:srgbClr val="FFFAEF"/>
                   </a:solidFill>
-                  <a:latin typeface="TDTD가온"/>
-                  <a:ea typeface="TDTD가온"/>
-                  <a:cs typeface="TDTD가온"/>
-                  <a:sym typeface="TDTD가온"/>
+                  <a:latin typeface="무궁화 고딕"/>
+                  <a:ea typeface="무궁화 고딕"/>
+                  <a:cs typeface="무궁화 고딕"/>
+                  <a:sym typeface="무궁화 고딕"/>
                 </a:rPr>
-                <a:t>화면에 국기가 나타나면, 가장 먼저 나라 이름을 외친 팀이 득점!</a:t>
+                <a:t>화면에 국기가 나타나면, 가장 먼저</a:t>
               </a:r>
             </a:p>
             <a:p>
               <a:pPr algn="l">
                 <a:lnSpc>
-                  <a:spcPts val="7415"/>
+                  <a:spcPts val="6299"/>
                 </a:lnSpc>
               </a:pPr>
+              <a:r>
+                <a:rPr lang="en-US" sz="4499">
+                  <a:solidFill>
+                    <a:srgbClr val="FFFAEF"/>
+                  </a:solidFill>
+                  <a:latin typeface="무궁화 고딕"/>
+                  <a:ea typeface="무궁화 고딕"/>
+                  <a:cs typeface="무궁화 고딕"/>
+                  <a:sym typeface="무궁화 고딕"/>
+                </a:rPr>
+                <a:t>나라 이름을 외친 팀이 득점!</a:t>
+              </a:r>
             </a:p>
           </p:txBody>
         </p:sp>
@@ -4722,8 +4731,8 @@
           </p:nvSpPr>
           <p:spPr>
             <a:xfrm rot="0">
-              <a:off x="0" y="-190500"/>
-              <a:ext cx="5799240" cy="1369906"/>
+              <a:off x="0" y="-66675"/>
+              <a:ext cx="5799240" cy="1238018"/>
             </a:xfrm>
             <a:prstGeom prst="rect">
               <a:avLst/>
@@ -4745,10 +4754,10 @@
                   <a:solidFill>
                     <a:srgbClr val="FFFAEF"/>
                   </a:solidFill>
-                  <a:latin typeface="Jua"/>
-                  <a:ea typeface="Jua"/>
-                  <a:cs typeface="Jua"/>
-                  <a:sym typeface="Jua"/>
+                  <a:latin typeface="무궁화 고딕 Bold"/>
+                  <a:ea typeface="무궁화 고딕 Bold"/>
+                  <a:cs typeface="무궁화 고딕 Bold"/>
+                  <a:sym typeface="무궁화 고딕 Bold"/>
                 </a:rPr>
                 <a:t>STEP 2.</a:t>
               </a:r>
@@ -4788,51 +4797,96 @@
           <a:chExt cx="0" cy="0"/>
         </a:xfrm>
       </p:grpSpPr>
-      <p:sp>
-        <p:nvSpPr>
-          <p:cNvPr name="Freeform 2" id="2"/>
-          <p:cNvSpPr/>
-          <p:nvPr/>
-        </p:nvSpPr>
+      <p:pic>
+        <p:nvPicPr>
+          <p:cNvPr name="Picture 2" id="2"/>
+          <p:cNvPicPr>
+            <a:picLocks noChangeAspect="true"/>
+          </p:cNvPicPr>
+          <p:nvPr/>
+        </p:nvPicPr>
+        <p:blipFill>
+          <a:blip r:embed="rId2"/>
+          <a:srcRect l="0" t="0" r="0" b="0"/>
+          <a:stretch>
+            <a:fillRect/>
+          </a:stretch>
+        </p:blipFill>
         <p:spPr>
           <a:xfrm flipH="false" flipV="false" rot="0">
-            <a:off x="1811777" y="0"/>
-            <a:ext cx="14664447" cy="10287000"/>
-          </a:xfrm>
-          <a:custGeom>
-            <a:avLst/>
-            <a:gdLst/>
-            <a:ahLst/>
-            <a:cxnLst/>
-            <a:rect r="r" b="b" t="t" l="l"/>
-            <a:pathLst>
-              <a:path h="10287000" w="14664447">
-                <a:moveTo>
-                  <a:pt x="0" y="0"/>
-                </a:moveTo>
-                <a:lnTo>
-                  <a:pt x="14664446" y="0"/>
-                </a:lnTo>
-                <a:lnTo>
-                  <a:pt x="14664446" y="10287000"/>
-                </a:lnTo>
-                <a:lnTo>
-                  <a:pt x="0" y="10287000"/>
-                </a:lnTo>
-                <a:lnTo>
-                  <a:pt x="0" y="0"/>
-                </a:lnTo>
-                <a:close/>
-              </a:path>
-            </a:pathLst>
-          </a:custGeom>
-          <a:blipFill>
-            <a:blip r:embed="rId2"/>
-            <a:stretch>
-              <a:fillRect l="0" t="0" r="0" b="0"/>
-            </a:stretch>
-          </a:blipFill>
-        </p:spPr>
+            <a:off x="13655377" y="6809666"/>
+            <a:ext cx="6229999" cy="6954669"/>
+          </a:xfrm>
+          <a:prstGeom prst="rect">
+            <a:avLst/>
+          </a:prstGeom>
+        </p:spPr>
+      </p:pic>
+      <p:pic>
+        <p:nvPicPr>
+          <p:cNvPr name="Picture 3" id="3"/>
+          <p:cNvPicPr>
+            <a:picLocks noChangeAspect="true"/>
+          </p:cNvPicPr>
+          <p:nvPr/>
+        </p:nvPicPr>
+        <p:blipFill>
+          <a:blip r:embed="rId3"/>
+          <a:srcRect l="0" t="0" r="0" b="0"/>
+          <a:stretch>
+            <a:fillRect/>
+          </a:stretch>
+        </p:blipFill>
+        <p:spPr>
+          <a:xfrm flipH="false" flipV="false" rot="0">
+            <a:off x="0" y="0"/>
+            <a:ext cx="6925457" cy="4700654"/>
+          </a:xfrm>
+          <a:prstGeom prst="rect">
+            <a:avLst/>
+          </a:prstGeom>
+        </p:spPr>
+      </p:pic>
+      <p:sp>
+        <p:nvSpPr>
+          <p:cNvPr name="TextBox 4" id="4"/>
+          <p:cNvSpPr txBox="true"/>
+          <p:nvPr/>
+        </p:nvSpPr>
+        <p:spPr>
+          <a:xfrm rot="0">
+            <a:off x="2717556" y="4181475"/>
+            <a:ext cx="12852888" cy="1914525"/>
+          </a:xfrm>
+          <a:prstGeom prst="rect">
+            <a:avLst/>
+          </a:prstGeom>
+        </p:spPr>
+        <p:txBody>
+          <a:bodyPr anchor="t" rtlCol="false" tIns="0" lIns="0" bIns="0" rIns="0">
+            <a:spAutoFit/>
+          </a:bodyPr>
+          <a:lstStyle/>
+          <a:p>
+            <a:pPr algn="ctr">
+              <a:lnSpc>
+                <a:spcPts val="15000"/>
+              </a:lnSpc>
+            </a:pPr>
+            <a:r>
+              <a:rPr lang="en-US" sz="12500">
+                <a:solidFill>
+                  <a:srgbClr val="000000"/>
+                </a:solidFill>
+                <a:latin typeface="무궁화 고딕"/>
+                <a:ea typeface="무궁화 고딕"/>
+                <a:cs typeface="무궁화 고딕"/>
+                <a:sym typeface="무궁화 고딕"/>
+              </a:rPr>
+              <a:t>캐나다</a:t>
+            </a:r>
+          </a:p>
+        </p:txBody>
       </p:sp>
     </p:spTree>
   </p:cSld>
@@ -4866,96 +4920,51 @@
           <a:chExt cx="0" cy="0"/>
         </a:xfrm>
       </p:grpSpPr>
-      <p:pic>
-        <p:nvPicPr>
-          <p:cNvPr name="Picture 2" id="2"/>
-          <p:cNvPicPr>
-            <a:picLocks noChangeAspect="true"/>
-          </p:cNvPicPr>
-          <p:nvPr/>
-        </p:nvPicPr>
-        <p:blipFill>
-          <a:blip r:embed="rId2"/>
-          <a:srcRect l="0" t="0" r="0" b="0"/>
-          <a:stretch>
-            <a:fillRect/>
-          </a:stretch>
-        </p:blipFill>
+      <p:sp>
+        <p:nvSpPr>
+          <p:cNvPr name="Freeform 2" id="2"/>
+          <p:cNvSpPr/>
+          <p:nvPr/>
+        </p:nvSpPr>
         <p:spPr>
           <a:xfrm flipH="false" flipV="false" rot="0">
-            <a:off x="13655377" y="6809666"/>
-            <a:ext cx="6229999" cy="6954669"/>
-          </a:xfrm>
-          <a:prstGeom prst="rect">
-            <a:avLst/>
-          </a:prstGeom>
-        </p:spPr>
-      </p:pic>
-      <p:pic>
-        <p:nvPicPr>
-          <p:cNvPr name="Picture 3" id="3"/>
-          <p:cNvPicPr>
-            <a:picLocks noChangeAspect="true"/>
-          </p:cNvPicPr>
-          <p:nvPr/>
-        </p:nvPicPr>
-        <p:blipFill>
-          <a:blip r:embed="rId3"/>
-          <a:srcRect l="0" t="0" r="0" b="0"/>
-          <a:stretch>
-            <a:fillRect/>
-          </a:stretch>
-        </p:blipFill>
-        <p:spPr>
-          <a:xfrm flipH="false" flipV="false" rot="0">
-            <a:off x="0" y="0"/>
-            <a:ext cx="6925457" cy="4700654"/>
-          </a:xfrm>
-          <a:prstGeom prst="rect">
-            <a:avLst/>
-          </a:prstGeom>
-        </p:spPr>
-      </p:pic>
-      <p:sp>
-        <p:nvSpPr>
-          <p:cNvPr name="TextBox 4" id="4"/>
-          <p:cNvSpPr txBox="true"/>
-          <p:nvPr/>
-        </p:nvSpPr>
-        <p:spPr>
-          <a:xfrm rot="0">
-            <a:off x="2717556" y="3895725"/>
-            <a:ext cx="12852888" cy="2200275"/>
-          </a:xfrm>
-          <a:prstGeom prst="rect">
-            <a:avLst/>
-          </a:prstGeom>
-        </p:spPr>
-        <p:txBody>
-          <a:bodyPr anchor="t" rtlCol="false" tIns="0" lIns="0" bIns="0" rIns="0">
-            <a:spAutoFit/>
-          </a:bodyPr>
-          <a:lstStyle/>
-          <a:p>
-            <a:pPr algn="ctr">
-              <a:lnSpc>
-                <a:spcPts val="15000"/>
-              </a:lnSpc>
-            </a:pPr>
-            <a:r>
-              <a:rPr lang="en-US" sz="12500">
-                <a:solidFill>
-                  <a:srgbClr val="000000"/>
-                </a:solidFill>
-                <a:latin typeface="Jua"/>
-                <a:ea typeface="Jua"/>
-                <a:cs typeface="Jua"/>
-                <a:sym typeface="Jua"/>
-              </a:rPr>
-              <a:t>브라질</a:t>
-            </a:r>
-          </a:p>
-        </p:txBody>
+            <a:off x="1811777" y="0"/>
+            <a:ext cx="14664447" cy="10287000"/>
+          </a:xfrm>
+          <a:custGeom>
+            <a:avLst/>
+            <a:gdLst/>
+            <a:ahLst/>
+            <a:cxnLst/>
+            <a:rect r="r" b="b" t="t" l="l"/>
+            <a:pathLst>
+              <a:path h="10287000" w="14664447">
+                <a:moveTo>
+                  <a:pt x="0" y="0"/>
+                </a:moveTo>
+                <a:lnTo>
+                  <a:pt x="14664446" y="0"/>
+                </a:lnTo>
+                <a:lnTo>
+                  <a:pt x="14664446" y="10287000"/>
+                </a:lnTo>
+                <a:lnTo>
+                  <a:pt x="0" y="10287000"/>
+                </a:lnTo>
+                <a:lnTo>
+                  <a:pt x="0" y="0"/>
+                </a:lnTo>
+                <a:close/>
+              </a:path>
+            </a:pathLst>
+          </a:custGeom>
+          <a:blipFill>
+            <a:blip r:embed="rId2"/>
+            <a:stretch>
+              <a:fillRect l="0" t="0" r="0" b="0"/>
+            </a:stretch>
+          </a:blipFill>
+        </p:spPr>
       </p:sp>
     </p:spTree>
   </p:cSld>
@@ -4989,51 +4998,96 @@
           <a:chExt cx="0" cy="0"/>
         </a:xfrm>
       </p:grpSpPr>
-      <p:sp>
-        <p:nvSpPr>
-          <p:cNvPr name="Freeform 2" id="2"/>
-          <p:cNvSpPr/>
-          <p:nvPr/>
-        </p:nvSpPr>
+      <p:pic>
+        <p:nvPicPr>
+          <p:cNvPr name="Picture 2" id="2"/>
+          <p:cNvPicPr>
+            <a:picLocks noChangeAspect="true"/>
+          </p:cNvPicPr>
+          <p:nvPr/>
+        </p:nvPicPr>
+        <p:blipFill>
+          <a:blip r:embed="rId2"/>
+          <a:srcRect l="0" t="0" r="0" b="0"/>
+          <a:stretch>
+            <a:fillRect/>
+          </a:stretch>
+        </p:blipFill>
         <p:spPr>
           <a:xfrm flipH="false" flipV="false" rot="0">
-            <a:off x="0" y="571500"/>
-            <a:ext cx="18288000" cy="9144000"/>
-          </a:xfrm>
-          <a:custGeom>
-            <a:avLst/>
-            <a:gdLst/>
-            <a:ahLst/>
-            <a:cxnLst/>
-            <a:rect r="r" b="b" t="t" l="l"/>
-            <a:pathLst>
-              <a:path h="9144000" w="18288000">
-                <a:moveTo>
-                  <a:pt x="0" y="0"/>
-                </a:moveTo>
-                <a:lnTo>
-                  <a:pt x="18288000" y="0"/>
-                </a:lnTo>
-                <a:lnTo>
-                  <a:pt x="18288000" y="9144000"/>
-                </a:lnTo>
-                <a:lnTo>
-                  <a:pt x="0" y="9144000"/>
-                </a:lnTo>
-                <a:lnTo>
-                  <a:pt x="0" y="0"/>
-                </a:lnTo>
-                <a:close/>
-              </a:path>
-            </a:pathLst>
-          </a:custGeom>
-          <a:blipFill>
-            <a:blip r:embed="rId2"/>
-            <a:stretch>
-              <a:fillRect l="0" t="0" r="0" b="0"/>
-            </a:stretch>
-          </a:blipFill>
-        </p:spPr>
+            <a:off x="13655377" y="6809666"/>
+            <a:ext cx="6229999" cy="6954669"/>
+          </a:xfrm>
+          <a:prstGeom prst="rect">
+            <a:avLst/>
+          </a:prstGeom>
+        </p:spPr>
+      </p:pic>
+      <p:pic>
+        <p:nvPicPr>
+          <p:cNvPr name="Picture 3" id="3"/>
+          <p:cNvPicPr>
+            <a:picLocks noChangeAspect="true"/>
+          </p:cNvPicPr>
+          <p:nvPr/>
+        </p:nvPicPr>
+        <p:blipFill>
+          <a:blip r:embed="rId3"/>
+          <a:srcRect l="0" t="0" r="0" b="0"/>
+          <a:stretch>
+            <a:fillRect/>
+          </a:stretch>
+        </p:blipFill>
+        <p:spPr>
+          <a:xfrm flipH="false" flipV="false" rot="0">
+            <a:off x="0" y="0"/>
+            <a:ext cx="6925457" cy="4700654"/>
+          </a:xfrm>
+          <a:prstGeom prst="rect">
+            <a:avLst/>
+          </a:prstGeom>
+        </p:spPr>
+      </p:pic>
+      <p:sp>
+        <p:nvSpPr>
+          <p:cNvPr name="TextBox 4" id="4"/>
+          <p:cNvSpPr txBox="true"/>
+          <p:nvPr/>
+        </p:nvSpPr>
+        <p:spPr>
+          <a:xfrm rot="0">
+            <a:off x="2717556" y="4181475"/>
+            <a:ext cx="12852888" cy="1914525"/>
+          </a:xfrm>
+          <a:prstGeom prst="rect">
+            <a:avLst/>
+          </a:prstGeom>
+        </p:spPr>
+        <p:txBody>
+          <a:bodyPr anchor="t" rtlCol="false" tIns="0" lIns="0" bIns="0" rIns="0">
+            <a:spAutoFit/>
+          </a:bodyPr>
+          <a:lstStyle/>
+          <a:p>
+            <a:pPr algn="ctr">
+              <a:lnSpc>
+                <a:spcPts val="15000"/>
+              </a:lnSpc>
+            </a:pPr>
+            <a:r>
+              <a:rPr lang="en-US" sz="12500">
+                <a:solidFill>
+                  <a:srgbClr val="000000"/>
+                </a:solidFill>
+                <a:latin typeface="무궁화 고딕"/>
+                <a:ea typeface="무궁화 고딕"/>
+                <a:cs typeface="무궁화 고딕"/>
+                <a:sym typeface="무궁화 고딕"/>
+              </a:rPr>
+              <a:t>브라질</a:t>
+            </a:r>
+          </a:p>
+        </p:txBody>
       </p:sp>
     </p:spTree>
   </p:cSld>
@@ -5067,96 +5121,51 @@
           <a:chExt cx="0" cy="0"/>
         </a:xfrm>
       </p:grpSpPr>
-      <p:pic>
-        <p:nvPicPr>
-          <p:cNvPr name="Picture 2" id="2"/>
-          <p:cNvPicPr>
-            <a:picLocks noChangeAspect="true"/>
-          </p:cNvPicPr>
-          <p:nvPr/>
-        </p:nvPicPr>
-        <p:blipFill>
-          <a:blip r:embed="rId2"/>
-          <a:srcRect l="0" t="0" r="0" b="0"/>
-          <a:stretch>
-            <a:fillRect/>
-          </a:stretch>
-        </p:blipFill>
+      <p:sp>
+        <p:nvSpPr>
+          <p:cNvPr name="Freeform 2" id="2"/>
+          <p:cNvSpPr/>
+          <p:nvPr/>
+        </p:nvSpPr>
         <p:spPr>
           <a:xfrm flipH="false" flipV="false" rot="0">
-            <a:off x="13655377" y="6809666"/>
-            <a:ext cx="6229999" cy="6954669"/>
-          </a:xfrm>
-          <a:prstGeom prst="rect">
-            <a:avLst/>
-          </a:prstGeom>
-        </p:spPr>
-      </p:pic>
-      <p:pic>
-        <p:nvPicPr>
-          <p:cNvPr name="Picture 3" id="3"/>
-          <p:cNvPicPr>
-            <a:picLocks noChangeAspect="true"/>
-          </p:cNvPicPr>
-          <p:nvPr/>
-        </p:nvPicPr>
-        <p:blipFill>
-          <a:blip r:embed="rId3"/>
-          <a:srcRect l="0" t="0" r="0" b="0"/>
-          <a:stretch>
-            <a:fillRect/>
-          </a:stretch>
-        </p:blipFill>
-        <p:spPr>
-          <a:xfrm flipH="false" flipV="false" rot="0">
-            <a:off x="0" y="0"/>
-            <a:ext cx="6925457" cy="4700654"/>
-          </a:xfrm>
-          <a:prstGeom prst="rect">
-            <a:avLst/>
-          </a:prstGeom>
-        </p:spPr>
-      </p:pic>
-      <p:sp>
-        <p:nvSpPr>
-          <p:cNvPr name="TextBox 4" id="4"/>
-          <p:cNvSpPr txBox="true"/>
-          <p:nvPr/>
-        </p:nvSpPr>
-        <p:spPr>
-          <a:xfrm rot="0">
-            <a:off x="2717556" y="3895725"/>
-            <a:ext cx="12852888" cy="2200275"/>
-          </a:xfrm>
-          <a:prstGeom prst="rect">
-            <a:avLst/>
-          </a:prstGeom>
-        </p:spPr>
-        <p:txBody>
-          <a:bodyPr anchor="t" rtlCol="false" tIns="0" lIns="0" bIns="0" rIns="0">
-            <a:spAutoFit/>
-          </a:bodyPr>
-          <a:lstStyle/>
-          <a:p>
-            <a:pPr algn="ctr">
-              <a:lnSpc>
-                <a:spcPts val="15000"/>
-              </a:lnSpc>
-            </a:pPr>
-            <a:r>
-              <a:rPr lang="en-US" sz="12500">
-                <a:solidFill>
-                  <a:srgbClr val="000000"/>
-                </a:solidFill>
-                <a:latin typeface="Jua"/>
-                <a:ea typeface="Jua"/>
-                <a:cs typeface="Jua"/>
-                <a:sym typeface="Jua"/>
-              </a:rPr>
-              <a:t>호주</a:t>
-            </a:r>
-          </a:p>
-        </p:txBody>
+            <a:off x="0" y="571500"/>
+            <a:ext cx="18288000" cy="9144000"/>
+          </a:xfrm>
+          <a:custGeom>
+            <a:avLst/>
+            <a:gdLst/>
+            <a:ahLst/>
+            <a:cxnLst/>
+            <a:rect r="r" b="b" t="t" l="l"/>
+            <a:pathLst>
+              <a:path h="9144000" w="18288000">
+                <a:moveTo>
+                  <a:pt x="0" y="0"/>
+                </a:moveTo>
+                <a:lnTo>
+                  <a:pt x="18288000" y="0"/>
+                </a:lnTo>
+                <a:lnTo>
+                  <a:pt x="18288000" y="9144000"/>
+                </a:lnTo>
+                <a:lnTo>
+                  <a:pt x="0" y="9144000"/>
+                </a:lnTo>
+                <a:lnTo>
+                  <a:pt x="0" y="0"/>
+                </a:lnTo>
+                <a:close/>
+              </a:path>
+            </a:pathLst>
+          </a:custGeom>
+          <a:blipFill>
+            <a:blip r:embed="rId2"/>
+            <a:stretch>
+              <a:fillRect l="0" t="0" r="0" b="0"/>
+            </a:stretch>
+          </a:blipFill>
+        </p:spPr>
       </p:sp>
     </p:spTree>
   </p:cSld>
@@ -5190,51 +5199,96 @@
           <a:chExt cx="0" cy="0"/>
         </a:xfrm>
       </p:grpSpPr>
-      <p:sp>
-        <p:nvSpPr>
-          <p:cNvPr name="Freeform 2" id="2"/>
-          <p:cNvSpPr/>
-          <p:nvPr/>
-        </p:nvSpPr>
+      <p:pic>
+        <p:nvPicPr>
+          <p:cNvPr name="Picture 2" id="2"/>
+          <p:cNvPicPr>
+            <a:picLocks noChangeAspect="true"/>
+          </p:cNvPicPr>
+          <p:nvPr/>
+        </p:nvPicPr>
+        <p:blipFill>
+          <a:blip r:embed="rId2"/>
+          <a:srcRect l="0" t="0" r="0" b="0"/>
+          <a:stretch>
+            <a:fillRect/>
+          </a:stretch>
+        </p:blipFill>
         <p:spPr>
           <a:xfrm flipH="false" flipV="false" rot="0">
-            <a:off x="1414697" y="0"/>
-            <a:ext cx="15458607" cy="10287000"/>
-          </a:xfrm>
-          <a:custGeom>
-            <a:avLst/>
-            <a:gdLst/>
-            <a:ahLst/>
-            <a:cxnLst/>
-            <a:rect r="r" b="b" t="t" l="l"/>
-            <a:pathLst>
-              <a:path h="10287000" w="15458607">
-                <a:moveTo>
-                  <a:pt x="0" y="0"/>
-                </a:moveTo>
-                <a:lnTo>
-                  <a:pt x="15458606" y="0"/>
-                </a:lnTo>
-                <a:lnTo>
-                  <a:pt x="15458606" y="10287000"/>
-                </a:lnTo>
-                <a:lnTo>
-                  <a:pt x="0" y="10287000"/>
-                </a:lnTo>
-                <a:lnTo>
-                  <a:pt x="0" y="0"/>
-                </a:lnTo>
-                <a:close/>
-              </a:path>
-            </a:pathLst>
-          </a:custGeom>
-          <a:blipFill>
-            <a:blip r:embed="rId2"/>
-            <a:stretch>
-              <a:fillRect l="0" t="0" r="0" b="0"/>
-            </a:stretch>
-          </a:blipFill>
-        </p:spPr>
+            <a:off x="13655377" y="6809666"/>
+            <a:ext cx="6229999" cy="6954669"/>
+          </a:xfrm>
+          <a:prstGeom prst="rect">
+            <a:avLst/>
+          </a:prstGeom>
+        </p:spPr>
+      </p:pic>
+      <p:pic>
+        <p:nvPicPr>
+          <p:cNvPr name="Picture 3" id="3"/>
+          <p:cNvPicPr>
+            <a:picLocks noChangeAspect="true"/>
+          </p:cNvPicPr>
+          <p:nvPr/>
+        </p:nvPicPr>
+        <p:blipFill>
+          <a:blip r:embed="rId3"/>
+          <a:srcRect l="0" t="0" r="0" b="0"/>
+          <a:stretch>
+            <a:fillRect/>
+          </a:stretch>
+        </p:blipFill>
+        <p:spPr>
+          <a:xfrm flipH="false" flipV="false" rot="0">
+            <a:off x="0" y="0"/>
+            <a:ext cx="6925457" cy="4700654"/>
+          </a:xfrm>
+          <a:prstGeom prst="rect">
+            <a:avLst/>
+          </a:prstGeom>
+        </p:spPr>
+      </p:pic>
+      <p:sp>
+        <p:nvSpPr>
+          <p:cNvPr name="TextBox 4" id="4"/>
+          <p:cNvSpPr txBox="true"/>
+          <p:nvPr/>
+        </p:nvSpPr>
+        <p:spPr>
+          <a:xfrm rot="0">
+            <a:off x="2717556" y="4181475"/>
+            <a:ext cx="12852888" cy="1914525"/>
+          </a:xfrm>
+          <a:prstGeom prst="rect">
+            <a:avLst/>
+          </a:prstGeom>
+        </p:spPr>
+        <p:txBody>
+          <a:bodyPr anchor="t" rtlCol="false" tIns="0" lIns="0" bIns="0" rIns="0">
+            <a:spAutoFit/>
+          </a:bodyPr>
+          <a:lstStyle/>
+          <a:p>
+            <a:pPr algn="ctr">
+              <a:lnSpc>
+                <a:spcPts val="15000"/>
+              </a:lnSpc>
+            </a:pPr>
+            <a:r>
+              <a:rPr lang="en-US" sz="12500">
+                <a:solidFill>
+                  <a:srgbClr val="000000"/>
+                </a:solidFill>
+                <a:latin typeface="무궁화 고딕"/>
+                <a:ea typeface="무궁화 고딕"/>
+                <a:cs typeface="무궁화 고딕"/>
+                <a:sym typeface="무궁화 고딕"/>
+              </a:rPr>
+              <a:t>호주</a:t>
+            </a:r>
+          </a:p>
+        </p:txBody>
       </p:sp>
     </p:spTree>
   </p:cSld>
@@ -5268,96 +5322,51 @@
           <a:chExt cx="0" cy="0"/>
         </a:xfrm>
       </p:grpSpPr>
-      <p:pic>
-        <p:nvPicPr>
-          <p:cNvPr name="Picture 2" id="2"/>
-          <p:cNvPicPr>
-            <a:picLocks noChangeAspect="true"/>
-          </p:cNvPicPr>
-          <p:nvPr/>
-        </p:nvPicPr>
-        <p:blipFill>
-          <a:blip r:embed="rId2"/>
-          <a:srcRect l="0" t="0" r="0" b="0"/>
-          <a:stretch>
-            <a:fillRect/>
-          </a:stretch>
-        </p:blipFill>
+      <p:sp>
+        <p:nvSpPr>
+          <p:cNvPr name="Freeform 2" id="2"/>
+          <p:cNvSpPr/>
+          <p:nvPr/>
+        </p:nvSpPr>
         <p:spPr>
           <a:xfrm flipH="false" flipV="false" rot="0">
-            <a:off x="13655377" y="6809666"/>
-            <a:ext cx="6229999" cy="6954669"/>
-          </a:xfrm>
-          <a:prstGeom prst="rect">
-            <a:avLst/>
-          </a:prstGeom>
-        </p:spPr>
-      </p:pic>
-      <p:pic>
-        <p:nvPicPr>
-          <p:cNvPr name="Picture 3" id="3"/>
-          <p:cNvPicPr>
-            <a:picLocks noChangeAspect="true"/>
-          </p:cNvPicPr>
-          <p:nvPr/>
-        </p:nvPicPr>
-        <p:blipFill>
-          <a:blip r:embed="rId3"/>
-          <a:srcRect l="0" t="0" r="0" b="0"/>
-          <a:stretch>
-            <a:fillRect/>
-          </a:stretch>
-        </p:blipFill>
-        <p:spPr>
-          <a:xfrm flipH="false" flipV="false" rot="0">
-            <a:off x="0" y="0"/>
-            <a:ext cx="6925457" cy="4700654"/>
-          </a:xfrm>
-          <a:prstGeom prst="rect">
-            <a:avLst/>
-          </a:prstGeom>
-        </p:spPr>
-      </p:pic>
-      <p:sp>
-        <p:nvSpPr>
-          <p:cNvPr name="TextBox 4" id="4"/>
-          <p:cNvSpPr txBox="true"/>
-          <p:nvPr/>
-        </p:nvSpPr>
-        <p:spPr>
-          <a:xfrm rot="0">
-            <a:off x="2717556" y="3895725"/>
-            <a:ext cx="12852888" cy="2200275"/>
-          </a:xfrm>
-          <a:prstGeom prst="rect">
-            <a:avLst/>
-          </a:prstGeom>
-        </p:spPr>
-        <p:txBody>
-          <a:bodyPr anchor="t" rtlCol="false" tIns="0" lIns="0" bIns="0" rIns="0">
-            <a:spAutoFit/>
-          </a:bodyPr>
-          <a:lstStyle/>
-          <a:p>
-            <a:pPr algn="ctr">
-              <a:lnSpc>
-                <a:spcPts val="15000"/>
-              </a:lnSpc>
-            </a:pPr>
-            <a:r>
-              <a:rPr lang="en-US" sz="12500">
-                <a:solidFill>
-                  <a:srgbClr val="000000"/>
-                </a:solidFill>
-                <a:latin typeface="Jua"/>
-                <a:ea typeface="Jua"/>
-                <a:cs typeface="Jua"/>
-                <a:sym typeface="Jua"/>
-              </a:rPr>
-              <a:t>이탈리아</a:t>
-            </a:r>
-          </a:p>
-        </p:txBody>
+            <a:off x="1414697" y="0"/>
+            <a:ext cx="15458607" cy="10287000"/>
+          </a:xfrm>
+          <a:custGeom>
+            <a:avLst/>
+            <a:gdLst/>
+            <a:ahLst/>
+            <a:cxnLst/>
+            <a:rect r="r" b="b" t="t" l="l"/>
+            <a:pathLst>
+              <a:path h="10287000" w="15458607">
+                <a:moveTo>
+                  <a:pt x="0" y="0"/>
+                </a:moveTo>
+                <a:lnTo>
+                  <a:pt x="15458606" y="0"/>
+                </a:lnTo>
+                <a:lnTo>
+                  <a:pt x="15458606" y="10287000"/>
+                </a:lnTo>
+                <a:lnTo>
+                  <a:pt x="0" y="10287000"/>
+                </a:lnTo>
+                <a:lnTo>
+                  <a:pt x="0" y="0"/>
+                </a:lnTo>
+                <a:close/>
+              </a:path>
+            </a:pathLst>
+          </a:custGeom>
+          <a:blipFill>
+            <a:blip r:embed="rId2"/>
+            <a:stretch>
+              <a:fillRect l="0" t="0" r="0" b="0"/>
+            </a:stretch>
+          </a:blipFill>
+        </p:spPr>
       </p:sp>
     </p:spTree>
   </p:cSld>
@@ -5391,51 +5400,96 @@
           <a:chExt cx="0" cy="0"/>
         </a:xfrm>
       </p:grpSpPr>
-      <p:sp>
-        <p:nvSpPr>
-          <p:cNvPr name="Freeform 2" id="2"/>
-          <p:cNvSpPr/>
-          <p:nvPr/>
-        </p:nvSpPr>
+      <p:pic>
+        <p:nvPicPr>
+          <p:cNvPr name="Picture 2" id="2"/>
+          <p:cNvPicPr>
+            <a:picLocks noChangeAspect="true"/>
+          </p:cNvPicPr>
+          <p:nvPr/>
+        </p:nvPicPr>
+        <p:blipFill>
+          <a:blip r:embed="rId2"/>
+          <a:srcRect l="0" t="0" r="0" b="0"/>
+          <a:stretch>
+            <a:fillRect/>
+          </a:stretch>
+        </p:blipFill>
         <p:spPr>
           <a:xfrm flipH="false" flipV="false" rot="0">
-            <a:off x="1414697" y="0"/>
-            <a:ext cx="15458607" cy="10287000"/>
-          </a:xfrm>
-          <a:custGeom>
-            <a:avLst/>
-            <a:gdLst/>
-            <a:ahLst/>
-            <a:cxnLst/>
-            <a:rect r="r" b="b" t="t" l="l"/>
-            <a:pathLst>
-              <a:path h="10287000" w="15458607">
-                <a:moveTo>
-                  <a:pt x="0" y="0"/>
-                </a:moveTo>
-                <a:lnTo>
-                  <a:pt x="15458606" y="0"/>
-                </a:lnTo>
-                <a:lnTo>
-                  <a:pt x="15458606" y="10287000"/>
-                </a:lnTo>
-                <a:lnTo>
-                  <a:pt x="0" y="10287000"/>
-                </a:lnTo>
-                <a:lnTo>
-                  <a:pt x="0" y="0"/>
-                </a:lnTo>
-                <a:close/>
-              </a:path>
-            </a:pathLst>
-          </a:custGeom>
-          <a:blipFill>
-            <a:blip r:embed="rId2"/>
-            <a:stretch>
-              <a:fillRect l="0" t="0" r="0" b="0"/>
-            </a:stretch>
-          </a:blipFill>
-        </p:spPr>
+            <a:off x="13655377" y="6809666"/>
+            <a:ext cx="6229999" cy="6954669"/>
+          </a:xfrm>
+          <a:prstGeom prst="rect">
+            <a:avLst/>
+          </a:prstGeom>
+        </p:spPr>
+      </p:pic>
+      <p:pic>
+        <p:nvPicPr>
+          <p:cNvPr name="Picture 3" id="3"/>
+          <p:cNvPicPr>
+            <a:picLocks noChangeAspect="true"/>
+          </p:cNvPicPr>
+          <p:nvPr/>
+        </p:nvPicPr>
+        <p:blipFill>
+          <a:blip r:embed="rId3"/>
+          <a:srcRect l="0" t="0" r="0" b="0"/>
+          <a:stretch>
+            <a:fillRect/>
+          </a:stretch>
+        </p:blipFill>
+        <p:spPr>
+          <a:xfrm flipH="false" flipV="false" rot="0">
+            <a:off x="0" y="0"/>
+            <a:ext cx="6925457" cy="4700654"/>
+          </a:xfrm>
+          <a:prstGeom prst="rect">
+            <a:avLst/>
+          </a:prstGeom>
+        </p:spPr>
+      </p:pic>
+      <p:sp>
+        <p:nvSpPr>
+          <p:cNvPr name="TextBox 4" id="4"/>
+          <p:cNvSpPr txBox="true"/>
+          <p:nvPr/>
+        </p:nvSpPr>
+        <p:spPr>
+          <a:xfrm rot="0">
+            <a:off x="2717556" y="4181475"/>
+            <a:ext cx="12852888" cy="1914525"/>
+          </a:xfrm>
+          <a:prstGeom prst="rect">
+            <a:avLst/>
+          </a:prstGeom>
+        </p:spPr>
+        <p:txBody>
+          <a:bodyPr anchor="t" rtlCol="false" tIns="0" lIns="0" bIns="0" rIns="0">
+            <a:spAutoFit/>
+          </a:bodyPr>
+          <a:lstStyle/>
+          <a:p>
+            <a:pPr algn="ctr">
+              <a:lnSpc>
+                <a:spcPts val="15000"/>
+              </a:lnSpc>
+            </a:pPr>
+            <a:r>
+              <a:rPr lang="en-US" sz="12500">
+                <a:solidFill>
+                  <a:srgbClr val="000000"/>
+                </a:solidFill>
+                <a:latin typeface="무궁화 고딕"/>
+                <a:ea typeface="무궁화 고딕"/>
+                <a:cs typeface="무궁화 고딕"/>
+                <a:sym typeface="무궁화 고딕"/>
+              </a:rPr>
+              <a:t>이탈리아</a:t>
+            </a:r>
+          </a:p>
+        </p:txBody>
       </p:sp>
     </p:spTree>
   </p:cSld>
@@ -5469,96 +5523,51 @@
           <a:chExt cx="0" cy="0"/>
         </a:xfrm>
       </p:grpSpPr>
-      <p:pic>
-        <p:nvPicPr>
-          <p:cNvPr name="Picture 2" id="2"/>
-          <p:cNvPicPr>
-            <a:picLocks noChangeAspect="true"/>
-          </p:cNvPicPr>
-          <p:nvPr/>
-        </p:nvPicPr>
-        <p:blipFill>
-          <a:blip r:embed="rId2"/>
-          <a:srcRect l="0" t="0" r="0" b="0"/>
-          <a:stretch>
-            <a:fillRect/>
-          </a:stretch>
-        </p:blipFill>
+      <p:sp>
+        <p:nvSpPr>
+          <p:cNvPr name="Freeform 2" id="2"/>
+          <p:cNvSpPr/>
+          <p:nvPr/>
+        </p:nvSpPr>
         <p:spPr>
           <a:xfrm flipH="false" flipV="false" rot="0">
-            <a:off x="13655377" y="6809666"/>
-            <a:ext cx="6229999" cy="6954669"/>
-          </a:xfrm>
-          <a:prstGeom prst="rect">
-            <a:avLst/>
-          </a:prstGeom>
-        </p:spPr>
-      </p:pic>
-      <p:pic>
-        <p:nvPicPr>
-          <p:cNvPr name="Picture 3" id="3"/>
-          <p:cNvPicPr>
-            <a:picLocks noChangeAspect="true"/>
-          </p:cNvPicPr>
-          <p:nvPr/>
-        </p:nvPicPr>
-        <p:blipFill>
-          <a:blip r:embed="rId3"/>
-          <a:srcRect l="0" t="0" r="0" b="0"/>
-          <a:stretch>
-            <a:fillRect/>
-          </a:stretch>
-        </p:blipFill>
-        <p:spPr>
-          <a:xfrm flipH="false" flipV="false" rot="0">
-            <a:off x="0" y="0"/>
-            <a:ext cx="6925457" cy="4700654"/>
-          </a:xfrm>
-          <a:prstGeom prst="rect">
-            <a:avLst/>
-          </a:prstGeom>
-        </p:spPr>
-      </p:pic>
-      <p:sp>
-        <p:nvSpPr>
-          <p:cNvPr name="TextBox 4" id="4"/>
-          <p:cNvSpPr txBox="true"/>
-          <p:nvPr/>
-        </p:nvSpPr>
-        <p:spPr>
-          <a:xfrm rot="0">
-            <a:off x="2717556" y="3895725"/>
-            <a:ext cx="12852888" cy="2200275"/>
-          </a:xfrm>
-          <a:prstGeom prst="rect">
-            <a:avLst/>
-          </a:prstGeom>
-        </p:spPr>
-        <p:txBody>
-          <a:bodyPr anchor="t" rtlCol="false" tIns="0" lIns="0" bIns="0" rIns="0">
-            <a:spAutoFit/>
-          </a:bodyPr>
-          <a:lstStyle/>
-          <a:p>
-            <a:pPr algn="ctr">
-              <a:lnSpc>
-                <a:spcPts val="15000"/>
-              </a:lnSpc>
-            </a:pPr>
-            <a:r>
-              <a:rPr lang="en-US" sz="12500">
-                <a:solidFill>
-                  <a:srgbClr val="000000"/>
-                </a:solidFill>
-                <a:latin typeface="Jua"/>
-                <a:ea typeface="Jua"/>
-                <a:cs typeface="Jua"/>
-                <a:sym typeface="Jua"/>
-              </a:rPr>
-              <a:t>스페인</a:t>
-            </a:r>
-          </a:p>
-        </p:txBody>
+            <a:off x="1414697" y="0"/>
+            <a:ext cx="15458607" cy="10287000"/>
+          </a:xfrm>
+          <a:custGeom>
+            <a:avLst/>
+            <a:gdLst/>
+            <a:ahLst/>
+            <a:cxnLst/>
+            <a:rect r="r" b="b" t="t" l="l"/>
+            <a:pathLst>
+              <a:path h="10287000" w="15458607">
+                <a:moveTo>
+                  <a:pt x="0" y="0"/>
+                </a:moveTo>
+                <a:lnTo>
+                  <a:pt x="15458606" y="0"/>
+                </a:lnTo>
+                <a:lnTo>
+                  <a:pt x="15458606" y="10287000"/>
+                </a:lnTo>
+                <a:lnTo>
+                  <a:pt x="0" y="10287000"/>
+                </a:lnTo>
+                <a:lnTo>
+                  <a:pt x="0" y="0"/>
+                </a:lnTo>
+                <a:close/>
+              </a:path>
+            </a:pathLst>
+          </a:custGeom>
+          <a:blipFill>
+            <a:blip r:embed="rId2"/>
+            <a:stretch>
+              <a:fillRect l="0" t="0" r="0" b="0"/>
+            </a:stretch>
+          </a:blipFill>
+        </p:spPr>
       </p:sp>
     </p:spTree>
   </p:cSld>
@@ -5592,51 +5601,96 @@
           <a:chExt cx="0" cy="0"/>
         </a:xfrm>
       </p:grpSpPr>
-      <p:sp>
-        <p:nvSpPr>
-          <p:cNvPr name="Freeform 2" id="2"/>
-          <p:cNvSpPr/>
-          <p:nvPr/>
-        </p:nvSpPr>
+      <p:pic>
+        <p:nvPicPr>
+          <p:cNvPr name="Picture 2" id="2"/>
+          <p:cNvPicPr>
+            <a:picLocks noChangeAspect="true"/>
+          </p:cNvPicPr>
+          <p:nvPr/>
+        </p:nvPicPr>
+        <p:blipFill>
+          <a:blip r:embed="rId2"/>
+          <a:srcRect l="0" t="0" r="0" b="0"/>
+          <a:stretch>
+            <a:fillRect/>
+          </a:stretch>
+        </p:blipFill>
         <p:spPr>
           <a:xfrm flipH="false" flipV="false" rot="0">
-            <a:off x="151867" y="0"/>
-            <a:ext cx="17984266" cy="10287000"/>
-          </a:xfrm>
-          <a:custGeom>
-            <a:avLst/>
-            <a:gdLst/>
-            <a:ahLst/>
-            <a:cxnLst/>
-            <a:rect r="r" b="b" t="t" l="l"/>
-            <a:pathLst>
-              <a:path h="10287000" w="17984266">
-                <a:moveTo>
-                  <a:pt x="0" y="0"/>
-                </a:moveTo>
-                <a:lnTo>
-                  <a:pt x="17984266" y="0"/>
-                </a:lnTo>
-                <a:lnTo>
-                  <a:pt x="17984266" y="10287000"/>
-                </a:lnTo>
-                <a:lnTo>
-                  <a:pt x="0" y="10287000"/>
-                </a:lnTo>
-                <a:lnTo>
-                  <a:pt x="0" y="0"/>
-                </a:lnTo>
-                <a:close/>
-              </a:path>
-            </a:pathLst>
-          </a:custGeom>
-          <a:blipFill>
-            <a:blip r:embed="rId2"/>
-            <a:stretch>
-              <a:fillRect l="0" t="0" r="0" b="0"/>
-            </a:stretch>
-          </a:blipFill>
-        </p:spPr>
+            <a:off x="13655377" y="6809666"/>
+            <a:ext cx="6229999" cy="6954669"/>
+          </a:xfrm>
+          <a:prstGeom prst="rect">
+            <a:avLst/>
+          </a:prstGeom>
+        </p:spPr>
+      </p:pic>
+      <p:pic>
+        <p:nvPicPr>
+          <p:cNvPr name="Picture 3" id="3"/>
+          <p:cNvPicPr>
+            <a:picLocks noChangeAspect="true"/>
+          </p:cNvPicPr>
+          <p:nvPr/>
+        </p:nvPicPr>
+        <p:blipFill>
+          <a:blip r:embed="rId3"/>
+          <a:srcRect l="0" t="0" r="0" b="0"/>
+          <a:stretch>
+            <a:fillRect/>
+          </a:stretch>
+        </p:blipFill>
+        <p:spPr>
+          <a:xfrm flipH="false" flipV="false" rot="0">
+            <a:off x="0" y="0"/>
+            <a:ext cx="6925457" cy="4700654"/>
+          </a:xfrm>
+          <a:prstGeom prst="rect">
+            <a:avLst/>
+          </a:prstGeom>
+        </p:spPr>
+      </p:pic>
+      <p:sp>
+        <p:nvSpPr>
+          <p:cNvPr name="TextBox 4" id="4"/>
+          <p:cNvSpPr txBox="true"/>
+          <p:nvPr/>
+        </p:nvSpPr>
+        <p:spPr>
+          <a:xfrm rot="0">
+            <a:off x="2717556" y="4181475"/>
+            <a:ext cx="12852888" cy="1914525"/>
+          </a:xfrm>
+          <a:prstGeom prst="rect">
+            <a:avLst/>
+          </a:prstGeom>
+        </p:spPr>
+        <p:txBody>
+          <a:bodyPr anchor="t" rtlCol="false" tIns="0" lIns="0" bIns="0" rIns="0">
+            <a:spAutoFit/>
+          </a:bodyPr>
+          <a:lstStyle/>
+          <a:p>
+            <a:pPr algn="ctr">
+              <a:lnSpc>
+                <a:spcPts val="15000"/>
+              </a:lnSpc>
+            </a:pPr>
+            <a:r>
+              <a:rPr lang="en-US" sz="12500">
+                <a:solidFill>
+                  <a:srgbClr val="000000"/>
+                </a:solidFill>
+                <a:latin typeface="무궁화 고딕"/>
+                <a:ea typeface="무궁화 고딕"/>
+                <a:cs typeface="무궁화 고딕"/>
+                <a:sym typeface="무궁화 고딕"/>
+              </a:rPr>
+              <a:t>스페인</a:t>
+            </a:r>
+          </a:p>
+        </p:txBody>
       </p:sp>
     </p:spTree>
   </p:cSld>
@@ -5670,96 +5724,51 @@
           <a:chExt cx="0" cy="0"/>
         </a:xfrm>
       </p:grpSpPr>
-      <p:pic>
-        <p:nvPicPr>
-          <p:cNvPr name="Picture 2" id="2"/>
-          <p:cNvPicPr>
-            <a:picLocks noChangeAspect="true"/>
-          </p:cNvPicPr>
-          <p:nvPr/>
-        </p:nvPicPr>
-        <p:blipFill>
-          <a:blip r:embed="rId2"/>
-          <a:srcRect l="0" t="0" r="0" b="0"/>
-          <a:stretch>
-            <a:fillRect/>
-          </a:stretch>
-        </p:blipFill>
+      <p:sp>
+        <p:nvSpPr>
+          <p:cNvPr name="Freeform 2" id="2"/>
+          <p:cNvSpPr/>
+          <p:nvPr/>
+        </p:nvSpPr>
         <p:spPr>
           <a:xfrm flipH="false" flipV="false" rot="0">
-            <a:off x="13655377" y="6809666"/>
-            <a:ext cx="6229999" cy="6954669"/>
-          </a:xfrm>
-          <a:prstGeom prst="rect">
-            <a:avLst/>
-          </a:prstGeom>
-        </p:spPr>
-      </p:pic>
-      <p:pic>
-        <p:nvPicPr>
-          <p:cNvPr name="Picture 3" id="3"/>
-          <p:cNvPicPr>
-            <a:picLocks noChangeAspect="true"/>
-          </p:cNvPicPr>
-          <p:nvPr/>
-        </p:nvPicPr>
-        <p:blipFill>
-          <a:blip r:embed="rId3"/>
-          <a:srcRect l="0" t="0" r="0" b="0"/>
-          <a:stretch>
-            <a:fillRect/>
-          </a:stretch>
-        </p:blipFill>
-        <p:spPr>
-          <a:xfrm flipH="false" flipV="false" rot="0">
-            <a:off x="0" y="0"/>
-            <a:ext cx="6925457" cy="4700654"/>
-          </a:xfrm>
-          <a:prstGeom prst="rect">
-            <a:avLst/>
-          </a:prstGeom>
-        </p:spPr>
-      </p:pic>
-      <p:sp>
-        <p:nvSpPr>
-          <p:cNvPr name="TextBox 4" id="4"/>
-          <p:cNvSpPr txBox="true"/>
-          <p:nvPr/>
-        </p:nvSpPr>
-        <p:spPr>
-          <a:xfrm rot="0">
-            <a:off x="2717556" y="3895725"/>
-            <a:ext cx="12852888" cy="2200275"/>
-          </a:xfrm>
-          <a:prstGeom prst="rect">
-            <a:avLst/>
-          </a:prstGeom>
-        </p:spPr>
-        <p:txBody>
-          <a:bodyPr anchor="t" rtlCol="false" tIns="0" lIns="0" bIns="0" rIns="0">
-            <a:spAutoFit/>
-          </a:bodyPr>
-          <a:lstStyle/>
-          <a:p>
-            <a:pPr algn="ctr">
-              <a:lnSpc>
-                <a:spcPts val="15000"/>
-              </a:lnSpc>
-            </a:pPr>
-            <a:r>
-              <a:rPr lang="en-US" sz="12500">
-                <a:solidFill>
-                  <a:srgbClr val="000000"/>
-                </a:solidFill>
-                <a:latin typeface="Jua"/>
-                <a:ea typeface="Jua"/>
-                <a:cs typeface="Jua"/>
-                <a:sym typeface="Jua"/>
-              </a:rPr>
-              <a:t>멕시코</a:t>
-            </a:r>
-          </a:p>
-        </p:txBody>
+            <a:off x="151867" y="0"/>
+            <a:ext cx="17984266" cy="10287000"/>
+          </a:xfrm>
+          <a:custGeom>
+            <a:avLst/>
+            <a:gdLst/>
+            <a:ahLst/>
+            <a:cxnLst/>
+            <a:rect r="r" b="b" t="t" l="l"/>
+            <a:pathLst>
+              <a:path h="10287000" w="17984266">
+                <a:moveTo>
+                  <a:pt x="0" y="0"/>
+                </a:moveTo>
+                <a:lnTo>
+                  <a:pt x="17984266" y="0"/>
+                </a:lnTo>
+                <a:lnTo>
+                  <a:pt x="17984266" y="10287000"/>
+                </a:lnTo>
+                <a:lnTo>
+                  <a:pt x="0" y="10287000"/>
+                </a:lnTo>
+                <a:lnTo>
+                  <a:pt x="0" y="0"/>
+                </a:lnTo>
+                <a:close/>
+              </a:path>
+            </a:pathLst>
+          </a:custGeom>
+          <a:blipFill>
+            <a:blip r:embed="rId2"/>
+            <a:stretch>
+              <a:fillRect l="0" t="0" r="0" b="0"/>
+            </a:stretch>
+          </a:blipFill>
+        </p:spPr>
       </p:sp>
     </p:spTree>
   </p:cSld>
@@ -5775,7 +5784,7 @@
     <p:bg>
       <p:bgPr>
         <a:solidFill>
-          <a:srgbClr val="7D8AAB"/>
+          <a:srgbClr val="FFFAEF"/>
         </a:solidFill>
       </p:bgPr>
     </p:bg>
@@ -5793,9 +5802,50 @@
           <a:chExt cx="0" cy="0"/>
         </a:xfrm>
       </p:grpSpPr>
+      <p:sp>
+        <p:nvSpPr>
+          <p:cNvPr name="TextBox 2" id="2"/>
+          <p:cNvSpPr txBox="true"/>
+          <p:nvPr/>
+        </p:nvSpPr>
+        <p:spPr>
+          <a:xfrm rot="0">
+            <a:off x="3238925" y="4378545"/>
+            <a:ext cx="11810151" cy="1914525"/>
+          </a:xfrm>
+          <a:prstGeom prst="rect">
+            <a:avLst/>
+          </a:prstGeom>
+        </p:spPr>
+        <p:txBody>
+          <a:bodyPr anchor="t" rtlCol="false" tIns="0" lIns="0" bIns="0" rIns="0">
+            <a:spAutoFit/>
+          </a:bodyPr>
+          <a:lstStyle/>
+          <a:p>
+            <a:pPr algn="ctr">
+              <a:lnSpc>
+                <a:spcPts val="15000"/>
+              </a:lnSpc>
+            </a:pPr>
+            <a:r>
+              <a:rPr lang="en-US" sz="12500">
+                <a:solidFill>
+                  <a:srgbClr val="000000"/>
+                </a:solidFill>
+                <a:latin typeface="무궁화 고딕"/>
+                <a:ea typeface="무궁화 고딕"/>
+                <a:cs typeface="무궁화 고딕"/>
+                <a:sym typeface="무궁화 고딕"/>
+              </a:rPr>
+              <a:t>팀을 나눠주세요!</a:t>
+            </a:r>
+          </a:p>
+        </p:txBody>
+      </p:sp>
       <p:pic>
         <p:nvPicPr>
-          <p:cNvPr name="Picture 2" id="2"/>
+          <p:cNvPr name="Picture 3" id="3"/>
           <p:cNvPicPr>
             <a:picLocks noChangeAspect="true"/>
           </p:cNvPicPr>
@@ -5803,15 +5853,15 @@
         </p:nvPicPr>
         <p:blipFill>
           <a:blip r:embed="rId2"/>
-          <a:srcRect l="64771" t="21970" r="0" b="0"/>
+          <a:srcRect l="0" t="0" r="0" b="0"/>
           <a:stretch>
             <a:fillRect/>
           </a:stretch>
         </p:blipFill>
         <p:spPr>
-          <a:xfrm flipH="false" flipV="false" rot="5400000">
-            <a:off x="2310738" y="4172522"/>
-            <a:ext cx="3803740" cy="8425216"/>
+          <a:xfrm flipH="false" flipV="false" rot="0">
+            <a:off x="13655377" y="6809666"/>
+            <a:ext cx="6229999" cy="6954669"/>
           </a:xfrm>
           <a:prstGeom prst="rect">
             <a:avLst/>
@@ -5820,7 +5870,7 @@
       </p:pic>
       <p:pic>
         <p:nvPicPr>
-          <p:cNvPr name="Picture 3" id="3"/>
+          <p:cNvPr name="Picture 4" id="4"/>
           <p:cNvPicPr>
             <a:picLocks noChangeAspect="true"/>
           </p:cNvPicPr>
@@ -5834,100 +5884,15 @@
           </a:stretch>
         </p:blipFill>
         <p:spPr>
-          <a:xfrm flipH="false" flipV="false" rot="-7094170">
-            <a:off x="14148180" y="-2590072"/>
-            <a:ext cx="7036829" cy="7237544"/>
+          <a:xfrm flipH="false" flipV="false" rot="0">
+            <a:off x="0" y="0"/>
+            <a:ext cx="6925457" cy="4700654"/>
           </a:xfrm>
           <a:prstGeom prst="rect">
             <a:avLst/>
           </a:prstGeom>
         </p:spPr>
       </p:pic>
-      <p:sp>
-        <p:nvSpPr>
-          <p:cNvPr name="TextBox 4" id="4"/>
-          <p:cNvSpPr txBox="true"/>
-          <p:nvPr/>
-        </p:nvSpPr>
-        <p:spPr>
-          <a:xfrm rot="0">
-            <a:off x="1028700" y="3892867"/>
-            <a:ext cx="15555091" cy="2200275"/>
-          </a:xfrm>
-          <a:prstGeom prst="rect">
-            <a:avLst/>
-          </a:prstGeom>
-        </p:spPr>
-        <p:txBody>
-          <a:bodyPr anchor="t" rtlCol="false" tIns="0" lIns="0" bIns="0" rIns="0">
-            <a:spAutoFit/>
-          </a:bodyPr>
-          <a:lstStyle/>
-          <a:p>
-            <a:pPr algn="ctr">
-              <a:lnSpc>
-                <a:spcPts val="15000"/>
-              </a:lnSpc>
-            </a:pPr>
-            <a:r>
-              <a:rPr lang="en-US" sz="12500">
-                <a:solidFill>
-                  <a:srgbClr val="FFFAEF"/>
-                </a:solidFill>
-                <a:latin typeface="Jua"/>
-                <a:ea typeface="Jua"/>
-                <a:cs typeface="Jua"/>
-                <a:sym typeface="Jua"/>
-              </a:rPr>
-              <a:t>나라 맞추기</a:t>
-            </a:r>
-          </a:p>
-        </p:txBody>
-      </p:sp>
-      <p:sp>
-        <p:nvSpPr>
-          <p:cNvPr name="TextBox 5" id="5"/>
-          <p:cNvSpPr txBox="true"/>
-          <p:nvPr/>
-        </p:nvSpPr>
-        <p:spPr>
-          <a:xfrm rot="0">
-            <a:off x="15264803" y="9812655"/>
-            <a:ext cx="2637975" cy="474345"/>
-          </a:xfrm>
-          <a:prstGeom prst="rect">
-            <a:avLst/>
-          </a:prstGeom>
-        </p:spPr>
-        <p:txBody>
-          <a:bodyPr anchor="t" rtlCol="false" tIns="0" lIns="0" bIns="0" rIns="0">
-            <a:spAutoFit/>
-          </a:bodyPr>
-          <a:lstStyle/>
-          <a:p>
-            <a:pPr algn="r">
-              <a:lnSpc>
-                <a:spcPts val="3779"/>
-              </a:lnSpc>
-              <a:spcBef>
-                <a:spcPct val="0"/>
-              </a:spcBef>
-            </a:pPr>
-            <a:r>
-              <a:rPr lang="en-US" sz="2700" spc="-135">
-                <a:solidFill>
-                  <a:srgbClr val="FFFFFF"/>
-                </a:solidFill>
-                <a:latin typeface="TDTD갬성명조"/>
-                <a:ea typeface="TDTD갬성명조"/>
-                <a:cs typeface="TDTD갬성명조"/>
-                <a:sym typeface="TDTD갬성명조"/>
-              </a:rPr>
-              <a:t>ⓒ 2026. Sunday Play</a:t>
-            </a:r>
-          </a:p>
-        </p:txBody>
-      </p:sp>
     </p:spTree>
   </p:cSld>
   <p:clrMapOvr>
@@ -5960,51 +5925,96 @@
           <a:chExt cx="0" cy="0"/>
         </a:xfrm>
       </p:grpSpPr>
-      <p:sp>
-        <p:nvSpPr>
-          <p:cNvPr name="Freeform 2" id="2"/>
-          <p:cNvSpPr/>
-          <p:nvPr/>
-        </p:nvSpPr>
+      <p:pic>
+        <p:nvPicPr>
+          <p:cNvPr name="Picture 2" id="2"/>
+          <p:cNvPicPr>
+            <a:picLocks noChangeAspect="true"/>
+          </p:cNvPicPr>
+          <p:nvPr/>
+        </p:nvPicPr>
+        <p:blipFill>
+          <a:blip r:embed="rId2"/>
+          <a:srcRect l="0" t="0" r="0" b="0"/>
+          <a:stretch>
+            <a:fillRect/>
+          </a:stretch>
+        </p:blipFill>
         <p:spPr>
           <a:xfrm flipH="false" flipV="false" rot="0">
-            <a:off x="1414697" y="0"/>
-            <a:ext cx="15458607" cy="10287000"/>
-          </a:xfrm>
-          <a:custGeom>
-            <a:avLst/>
-            <a:gdLst/>
-            <a:ahLst/>
-            <a:cxnLst/>
-            <a:rect r="r" b="b" t="t" l="l"/>
-            <a:pathLst>
-              <a:path h="10287000" w="15458607">
-                <a:moveTo>
-                  <a:pt x="0" y="0"/>
-                </a:moveTo>
-                <a:lnTo>
-                  <a:pt x="15458606" y="0"/>
-                </a:lnTo>
-                <a:lnTo>
-                  <a:pt x="15458606" y="10287000"/>
-                </a:lnTo>
-                <a:lnTo>
-                  <a:pt x="0" y="10287000"/>
-                </a:lnTo>
-                <a:lnTo>
-                  <a:pt x="0" y="0"/>
-                </a:lnTo>
-                <a:close/>
-              </a:path>
-            </a:pathLst>
-          </a:custGeom>
-          <a:blipFill>
-            <a:blip r:embed="rId2"/>
-            <a:stretch>
-              <a:fillRect l="0" t="0" r="0" b="0"/>
-            </a:stretch>
-          </a:blipFill>
-        </p:spPr>
+            <a:off x="13655377" y="6809666"/>
+            <a:ext cx="6229999" cy="6954669"/>
+          </a:xfrm>
+          <a:prstGeom prst="rect">
+            <a:avLst/>
+          </a:prstGeom>
+        </p:spPr>
+      </p:pic>
+      <p:pic>
+        <p:nvPicPr>
+          <p:cNvPr name="Picture 3" id="3"/>
+          <p:cNvPicPr>
+            <a:picLocks noChangeAspect="true"/>
+          </p:cNvPicPr>
+          <p:nvPr/>
+        </p:nvPicPr>
+        <p:blipFill>
+          <a:blip r:embed="rId3"/>
+          <a:srcRect l="0" t="0" r="0" b="0"/>
+          <a:stretch>
+            <a:fillRect/>
+          </a:stretch>
+        </p:blipFill>
+        <p:spPr>
+          <a:xfrm flipH="false" flipV="false" rot="0">
+            <a:off x="0" y="0"/>
+            <a:ext cx="6925457" cy="4700654"/>
+          </a:xfrm>
+          <a:prstGeom prst="rect">
+            <a:avLst/>
+          </a:prstGeom>
+        </p:spPr>
+      </p:pic>
+      <p:sp>
+        <p:nvSpPr>
+          <p:cNvPr name="TextBox 4" id="4"/>
+          <p:cNvSpPr txBox="true"/>
+          <p:nvPr/>
+        </p:nvSpPr>
+        <p:spPr>
+          <a:xfrm rot="0">
+            <a:off x="2717556" y="4181475"/>
+            <a:ext cx="12852888" cy="1914525"/>
+          </a:xfrm>
+          <a:prstGeom prst="rect">
+            <a:avLst/>
+          </a:prstGeom>
+        </p:spPr>
+        <p:txBody>
+          <a:bodyPr anchor="t" rtlCol="false" tIns="0" lIns="0" bIns="0" rIns="0">
+            <a:spAutoFit/>
+          </a:bodyPr>
+          <a:lstStyle/>
+          <a:p>
+            <a:pPr algn="ctr">
+              <a:lnSpc>
+                <a:spcPts val="15000"/>
+              </a:lnSpc>
+            </a:pPr>
+            <a:r>
+              <a:rPr lang="en-US" sz="12500">
+                <a:solidFill>
+                  <a:srgbClr val="000000"/>
+                </a:solidFill>
+                <a:latin typeface="무궁화 고딕"/>
+                <a:ea typeface="무궁화 고딕"/>
+                <a:cs typeface="무궁화 고딕"/>
+                <a:sym typeface="무궁화 고딕"/>
+              </a:rPr>
+              <a:t>멕시코</a:t>
+            </a:r>
+          </a:p>
+        </p:txBody>
       </p:sp>
     </p:spTree>
   </p:cSld>
@@ -6038,96 +6048,51 @@
           <a:chExt cx="0" cy="0"/>
         </a:xfrm>
       </p:grpSpPr>
-      <p:pic>
-        <p:nvPicPr>
-          <p:cNvPr name="Picture 2" id="2"/>
-          <p:cNvPicPr>
-            <a:picLocks noChangeAspect="true"/>
-          </p:cNvPicPr>
-          <p:nvPr/>
-        </p:nvPicPr>
-        <p:blipFill>
-          <a:blip r:embed="rId2"/>
-          <a:srcRect l="0" t="0" r="0" b="0"/>
-          <a:stretch>
-            <a:fillRect/>
-          </a:stretch>
-        </p:blipFill>
+      <p:sp>
+        <p:nvSpPr>
+          <p:cNvPr name="Freeform 2" id="2"/>
+          <p:cNvSpPr/>
+          <p:nvPr/>
+        </p:nvSpPr>
         <p:spPr>
           <a:xfrm flipH="false" flipV="false" rot="0">
-            <a:off x="13655377" y="6809666"/>
-            <a:ext cx="6229999" cy="6954669"/>
-          </a:xfrm>
-          <a:prstGeom prst="rect">
-            <a:avLst/>
-          </a:prstGeom>
-        </p:spPr>
-      </p:pic>
-      <p:pic>
-        <p:nvPicPr>
-          <p:cNvPr name="Picture 3" id="3"/>
-          <p:cNvPicPr>
-            <a:picLocks noChangeAspect="true"/>
-          </p:cNvPicPr>
-          <p:nvPr/>
-        </p:nvPicPr>
-        <p:blipFill>
-          <a:blip r:embed="rId3"/>
-          <a:srcRect l="0" t="0" r="0" b="0"/>
-          <a:stretch>
-            <a:fillRect/>
-          </a:stretch>
-        </p:blipFill>
-        <p:spPr>
-          <a:xfrm flipH="false" flipV="false" rot="0">
-            <a:off x="0" y="0"/>
-            <a:ext cx="6925457" cy="4700654"/>
-          </a:xfrm>
-          <a:prstGeom prst="rect">
-            <a:avLst/>
-          </a:prstGeom>
-        </p:spPr>
-      </p:pic>
-      <p:sp>
-        <p:nvSpPr>
-          <p:cNvPr name="TextBox 4" id="4"/>
-          <p:cNvSpPr txBox="true"/>
-          <p:nvPr/>
-        </p:nvSpPr>
-        <p:spPr>
-          <a:xfrm rot="0">
-            <a:off x="2717556" y="3895725"/>
-            <a:ext cx="12852888" cy="2200275"/>
-          </a:xfrm>
-          <a:prstGeom prst="rect">
-            <a:avLst/>
-          </a:prstGeom>
-        </p:spPr>
-        <p:txBody>
-          <a:bodyPr anchor="t" rtlCol="false" tIns="0" lIns="0" bIns="0" rIns="0">
-            <a:spAutoFit/>
-          </a:bodyPr>
-          <a:lstStyle/>
-          <a:p>
-            <a:pPr algn="ctr">
-              <a:lnSpc>
-                <a:spcPts val="15000"/>
-              </a:lnSpc>
-            </a:pPr>
-            <a:r>
-              <a:rPr lang="en-US" sz="12500">
-                <a:solidFill>
-                  <a:srgbClr val="000000"/>
-                </a:solidFill>
-                <a:latin typeface="Jua"/>
-                <a:ea typeface="Jua"/>
-                <a:cs typeface="Jua"/>
-                <a:sym typeface="Jua"/>
-              </a:rPr>
-              <a:t>인도</a:t>
-            </a:r>
-          </a:p>
-        </p:txBody>
+            <a:off x="1414697" y="0"/>
+            <a:ext cx="15458607" cy="10287000"/>
+          </a:xfrm>
+          <a:custGeom>
+            <a:avLst/>
+            <a:gdLst/>
+            <a:ahLst/>
+            <a:cxnLst/>
+            <a:rect r="r" b="b" t="t" l="l"/>
+            <a:pathLst>
+              <a:path h="10287000" w="15458607">
+                <a:moveTo>
+                  <a:pt x="0" y="0"/>
+                </a:moveTo>
+                <a:lnTo>
+                  <a:pt x="15458606" y="0"/>
+                </a:lnTo>
+                <a:lnTo>
+                  <a:pt x="15458606" y="10287000"/>
+                </a:lnTo>
+                <a:lnTo>
+                  <a:pt x="0" y="10287000"/>
+                </a:lnTo>
+                <a:lnTo>
+                  <a:pt x="0" y="0"/>
+                </a:lnTo>
+                <a:close/>
+              </a:path>
+            </a:pathLst>
+          </a:custGeom>
+          <a:blipFill>
+            <a:blip r:embed="rId2"/>
+            <a:stretch>
+              <a:fillRect l="0" t="0" r="0" b="0"/>
+            </a:stretch>
+          </a:blipFill>
+        </p:spPr>
       </p:sp>
     </p:spTree>
   </p:cSld>
@@ -6161,51 +6126,96 @@
           <a:chExt cx="0" cy="0"/>
         </a:xfrm>
       </p:grpSpPr>
-      <p:sp>
-        <p:nvSpPr>
-          <p:cNvPr name="Freeform 2" id="2"/>
-          <p:cNvSpPr/>
-          <p:nvPr/>
-        </p:nvSpPr>
+      <p:pic>
+        <p:nvPicPr>
+          <p:cNvPr name="Picture 2" id="2"/>
+          <p:cNvPicPr>
+            <a:picLocks noChangeAspect="true"/>
+          </p:cNvPicPr>
+          <p:nvPr/>
+        </p:nvPicPr>
+        <p:blipFill>
+          <a:blip r:embed="rId2"/>
+          <a:srcRect l="0" t="0" r="0" b="0"/>
+          <a:stretch>
+            <a:fillRect/>
+          </a:stretch>
+        </p:blipFill>
         <p:spPr>
           <a:xfrm flipH="false" flipV="false" rot="0">
-            <a:off x="1414697" y="0"/>
-            <a:ext cx="15458607" cy="10287000"/>
-          </a:xfrm>
-          <a:custGeom>
-            <a:avLst/>
-            <a:gdLst/>
-            <a:ahLst/>
-            <a:cxnLst/>
-            <a:rect r="r" b="b" t="t" l="l"/>
-            <a:pathLst>
-              <a:path h="10287000" w="15458607">
-                <a:moveTo>
-                  <a:pt x="0" y="0"/>
-                </a:moveTo>
-                <a:lnTo>
-                  <a:pt x="15458606" y="0"/>
-                </a:lnTo>
-                <a:lnTo>
-                  <a:pt x="15458606" y="10287000"/>
-                </a:lnTo>
-                <a:lnTo>
-                  <a:pt x="0" y="10287000"/>
-                </a:lnTo>
-                <a:lnTo>
-                  <a:pt x="0" y="0"/>
-                </a:lnTo>
-                <a:close/>
-              </a:path>
-            </a:pathLst>
-          </a:custGeom>
-          <a:blipFill>
-            <a:blip r:embed="rId2"/>
-            <a:stretch>
-              <a:fillRect l="0" t="0" r="0" b="0"/>
-            </a:stretch>
-          </a:blipFill>
-        </p:spPr>
+            <a:off x="13655377" y="6809666"/>
+            <a:ext cx="6229999" cy="6954669"/>
+          </a:xfrm>
+          <a:prstGeom prst="rect">
+            <a:avLst/>
+          </a:prstGeom>
+        </p:spPr>
+      </p:pic>
+      <p:pic>
+        <p:nvPicPr>
+          <p:cNvPr name="Picture 3" id="3"/>
+          <p:cNvPicPr>
+            <a:picLocks noChangeAspect="true"/>
+          </p:cNvPicPr>
+          <p:nvPr/>
+        </p:nvPicPr>
+        <p:blipFill>
+          <a:blip r:embed="rId3"/>
+          <a:srcRect l="0" t="0" r="0" b="0"/>
+          <a:stretch>
+            <a:fillRect/>
+          </a:stretch>
+        </p:blipFill>
+        <p:spPr>
+          <a:xfrm flipH="false" flipV="false" rot="0">
+            <a:off x="0" y="0"/>
+            <a:ext cx="6925457" cy="4700654"/>
+          </a:xfrm>
+          <a:prstGeom prst="rect">
+            <a:avLst/>
+          </a:prstGeom>
+        </p:spPr>
+      </p:pic>
+      <p:sp>
+        <p:nvSpPr>
+          <p:cNvPr name="TextBox 4" id="4"/>
+          <p:cNvSpPr txBox="true"/>
+          <p:nvPr/>
+        </p:nvSpPr>
+        <p:spPr>
+          <a:xfrm rot="0">
+            <a:off x="2717556" y="4181475"/>
+            <a:ext cx="12852888" cy="1914525"/>
+          </a:xfrm>
+          <a:prstGeom prst="rect">
+            <a:avLst/>
+          </a:prstGeom>
+        </p:spPr>
+        <p:txBody>
+          <a:bodyPr anchor="t" rtlCol="false" tIns="0" lIns="0" bIns="0" rIns="0">
+            <a:spAutoFit/>
+          </a:bodyPr>
+          <a:lstStyle/>
+          <a:p>
+            <a:pPr algn="ctr">
+              <a:lnSpc>
+                <a:spcPts val="15000"/>
+              </a:lnSpc>
+            </a:pPr>
+            <a:r>
+              <a:rPr lang="en-US" sz="12500">
+                <a:solidFill>
+                  <a:srgbClr val="000000"/>
+                </a:solidFill>
+                <a:latin typeface="무궁화 고딕"/>
+                <a:ea typeface="무궁화 고딕"/>
+                <a:cs typeface="무궁화 고딕"/>
+                <a:sym typeface="무궁화 고딕"/>
+              </a:rPr>
+              <a:t>인도</a:t>
+            </a:r>
+          </a:p>
+        </p:txBody>
       </p:sp>
     </p:spTree>
   </p:cSld>
@@ -6239,96 +6249,51 @@
           <a:chExt cx="0" cy="0"/>
         </a:xfrm>
       </p:grpSpPr>
-      <p:pic>
-        <p:nvPicPr>
-          <p:cNvPr name="Picture 2" id="2"/>
-          <p:cNvPicPr>
-            <a:picLocks noChangeAspect="true"/>
-          </p:cNvPicPr>
-          <p:nvPr/>
-        </p:nvPicPr>
-        <p:blipFill>
-          <a:blip r:embed="rId2"/>
-          <a:srcRect l="0" t="0" r="0" b="0"/>
-          <a:stretch>
-            <a:fillRect/>
-          </a:stretch>
-        </p:blipFill>
+      <p:sp>
+        <p:nvSpPr>
+          <p:cNvPr name="Freeform 2" id="2"/>
+          <p:cNvSpPr/>
+          <p:nvPr/>
+        </p:nvSpPr>
         <p:spPr>
           <a:xfrm flipH="false" flipV="false" rot="0">
-            <a:off x="13655377" y="6809666"/>
-            <a:ext cx="6229999" cy="6954669"/>
-          </a:xfrm>
-          <a:prstGeom prst="rect">
-            <a:avLst/>
-          </a:prstGeom>
-        </p:spPr>
-      </p:pic>
-      <p:pic>
-        <p:nvPicPr>
-          <p:cNvPr name="Picture 3" id="3"/>
-          <p:cNvPicPr>
-            <a:picLocks noChangeAspect="true"/>
-          </p:cNvPicPr>
-          <p:nvPr/>
-        </p:nvPicPr>
-        <p:blipFill>
-          <a:blip r:embed="rId3"/>
-          <a:srcRect l="0" t="0" r="0" b="0"/>
-          <a:stretch>
-            <a:fillRect/>
-          </a:stretch>
-        </p:blipFill>
-        <p:spPr>
-          <a:xfrm flipH="false" flipV="false" rot="0">
-            <a:off x="0" y="0"/>
-            <a:ext cx="6925457" cy="4700654"/>
-          </a:xfrm>
-          <a:prstGeom prst="rect">
-            <a:avLst/>
-          </a:prstGeom>
-        </p:spPr>
-      </p:pic>
-      <p:sp>
-        <p:nvSpPr>
-          <p:cNvPr name="TextBox 4" id="4"/>
-          <p:cNvSpPr txBox="true"/>
-          <p:nvPr/>
-        </p:nvSpPr>
-        <p:spPr>
-          <a:xfrm rot="0">
-            <a:off x="2717556" y="3895725"/>
-            <a:ext cx="12852888" cy="2200275"/>
-          </a:xfrm>
-          <a:prstGeom prst="rect">
-            <a:avLst/>
-          </a:prstGeom>
-        </p:spPr>
-        <p:txBody>
-          <a:bodyPr anchor="t" rtlCol="false" tIns="0" lIns="0" bIns="0" rIns="0">
-            <a:spAutoFit/>
-          </a:bodyPr>
-          <a:lstStyle/>
-          <a:p>
-            <a:pPr algn="ctr">
-              <a:lnSpc>
-                <a:spcPts val="15000"/>
-              </a:lnSpc>
-            </a:pPr>
-            <a:r>
-              <a:rPr lang="en-US" sz="12500">
-                <a:solidFill>
-                  <a:srgbClr val="000000"/>
-                </a:solidFill>
-                <a:latin typeface="Jua"/>
-                <a:ea typeface="Jua"/>
-                <a:cs typeface="Jua"/>
-                <a:sym typeface="Jua"/>
-              </a:rPr>
-              <a:t>러시아</a:t>
-            </a:r>
-          </a:p>
-        </p:txBody>
+            <a:off x="1414697" y="0"/>
+            <a:ext cx="15458607" cy="10287000"/>
+          </a:xfrm>
+          <a:custGeom>
+            <a:avLst/>
+            <a:gdLst/>
+            <a:ahLst/>
+            <a:cxnLst/>
+            <a:rect r="r" b="b" t="t" l="l"/>
+            <a:pathLst>
+              <a:path h="10287000" w="15458607">
+                <a:moveTo>
+                  <a:pt x="0" y="0"/>
+                </a:moveTo>
+                <a:lnTo>
+                  <a:pt x="15458606" y="0"/>
+                </a:lnTo>
+                <a:lnTo>
+                  <a:pt x="15458606" y="10287000"/>
+                </a:lnTo>
+                <a:lnTo>
+                  <a:pt x="0" y="10287000"/>
+                </a:lnTo>
+                <a:lnTo>
+                  <a:pt x="0" y="0"/>
+                </a:lnTo>
+                <a:close/>
+              </a:path>
+            </a:pathLst>
+          </a:custGeom>
+          <a:blipFill>
+            <a:blip r:embed="rId2"/>
+            <a:stretch>
+              <a:fillRect l="0" t="0" r="0" b="0"/>
+            </a:stretch>
+          </a:blipFill>
+        </p:spPr>
       </p:sp>
     </p:spTree>
   </p:cSld>
@@ -6362,51 +6327,96 @@
           <a:chExt cx="0" cy="0"/>
         </a:xfrm>
       </p:grpSpPr>
-      <p:sp>
-        <p:nvSpPr>
-          <p:cNvPr name="Freeform 2" id="2"/>
-          <p:cNvSpPr/>
-          <p:nvPr/>
-        </p:nvSpPr>
+      <p:pic>
+        <p:nvPicPr>
+          <p:cNvPr name="Picture 2" id="2"/>
+          <p:cNvPicPr>
+            <a:picLocks noChangeAspect="true"/>
+          </p:cNvPicPr>
+          <p:nvPr/>
+        </p:nvPicPr>
+        <p:blipFill>
+          <a:blip r:embed="rId2"/>
+          <a:srcRect l="0" t="0" r="0" b="0"/>
+          <a:stretch>
+            <a:fillRect/>
+          </a:stretch>
+        </p:blipFill>
         <p:spPr>
           <a:xfrm flipH="false" flipV="false" rot="0">
-            <a:off x="1414697" y="0"/>
-            <a:ext cx="15458607" cy="10287000"/>
-          </a:xfrm>
-          <a:custGeom>
-            <a:avLst/>
-            <a:gdLst/>
-            <a:ahLst/>
-            <a:cxnLst/>
-            <a:rect r="r" b="b" t="t" l="l"/>
-            <a:pathLst>
-              <a:path h="10287000" w="15458607">
-                <a:moveTo>
-                  <a:pt x="0" y="0"/>
-                </a:moveTo>
-                <a:lnTo>
-                  <a:pt x="15458606" y="0"/>
-                </a:lnTo>
-                <a:lnTo>
-                  <a:pt x="15458606" y="10287000"/>
-                </a:lnTo>
-                <a:lnTo>
-                  <a:pt x="0" y="10287000"/>
-                </a:lnTo>
-                <a:lnTo>
-                  <a:pt x="0" y="0"/>
-                </a:lnTo>
-                <a:close/>
-              </a:path>
-            </a:pathLst>
-          </a:custGeom>
-          <a:blipFill>
-            <a:blip r:embed="rId2"/>
-            <a:stretch>
-              <a:fillRect l="0" t="0" r="0" b="0"/>
-            </a:stretch>
-          </a:blipFill>
-        </p:spPr>
+            <a:off x="13655377" y="6809666"/>
+            <a:ext cx="6229999" cy="6954669"/>
+          </a:xfrm>
+          <a:prstGeom prst="rect">
+            <a:avLst/>
+          </a:prstGeom>
+        </p:spPr>
+      </p:pic>
+      <p:pic>
+        <p:nvPicPr>
+          <p:cNvPr name="Picture 3" id="3"/>
+          <p:cNvPicPr>
+            <a:picLocks noChangeAspect="true"/>
+          </p:cNvPicPr>
+          <p:nvPr/>
+        </p:nvPicPr>
+        <p:blipFill>
+          <a:blip r:embed="rId3"/>
+          <a:srcRect l="0" t="0" r="0" b="0"/>
+          <a:stretch>
+            <a:fillRect/>
+          </a:stretch>
+        </p:blipFill>
+        <p:spPr>
+          <a:xfrm flipH="false" flipV="false" rot="0">
+            <a:off x="0" y="0"/>
+            <a:ext cx="6925457" cy="4700654"/>
+          </a:xfrm>
+          <a:prstGeom prst="rect">
+            <a:avLst/>
+          </a:prstGeom>
+        </p:spPr>
+      </p:pic>
+      <p:sp>
+        <p:nvSpPr>
+          <p:cNvPr name="TextBox 4" id="4"/>
+          <p:cNvSpPr txBox="true"/>
+          <p:nvPr/>
+        </p:nvSpPr>
+        <p:spPr>
+          <a:xfrm rot="0">
+            <a:off x="2717556" y="4181475"/>
+            <a:ext cx="12852888" cy="1914525"/>
+          </a:xfrm>
+          <a:prstGeom prst="rect">
+            <a:avLst/>
+          </a:prstGeom>
+        </p:spPr>
+        <p:txBody>
+          <a:bodyPr anchor="t" rtlCol="false" tIns="0" lIns="0" bIns="0" rIns="0">
+            <a:spAutoFit/>
+          </a:bodyPr>
+          <a:lstStyle/>
+          <a:p>
+            <a:pPr algn="ctr">
+              <a:lnSpc>
+                <a:spcPts val="15000"/>
+              </a:lnSpc>
+            </a:pPr>
+            <a:r>
+              <a:rPr lang="en-US" sz="12500">
+                <a:solidFill>
+                  <a:srgbClr val="000000"/>
+                </a:solidFill>
+                <a:latin typeface="무궁화 고딕"/>
+                <a:ea typeface="무궁화 고딕"/>
+                <a:cs typeface="무궁화 고딕"/>
+                <a:sym typeface="무궁화 고딕"/>
+              </a:rPr>
+              <a:t>러시아</a:t>
+            </a:r>
+          </a:p>
+        </p:txBody>
       </p:sp>
     </p:spTree>
   </p:cSld>
@@ -6440,96 +6450,51 @@
           <a:chExt cx="0" cy="0"/>
         </a:xfrm>
       </p:grpSpPr>
-      <p:pic>
-        <p:nvPicPr>
-          <p:cNvPr name="Picture 2" id="2"/>
-          <p:cNvPicPr>
-            <a:picLocks noChangeAspect="true"/>
-          </p:cNvPicPr>
-          <p:nvPr/>
-        </p:nvPicPr>
-        <p:blipFill>
-          <a:blip r:embed="rId2"/>
-          <a:srcRect l="0" t="0" r="0" b="0"/>
-          <a:stretch>
-            <a:fillRect/>
-          </a:stretch>
-        </p:blipFill>
+      <p:sp>
+        <p:nvSpPr>
+          <p:cNvPr name="Freeform 2" id="2"/>
+          <p:cNvSpPr/>
+          <p:nvPr/>
+        </p:nvSpPr>
         <p:spPr>
           <a:xfrm flipH="false" flipV="false" rot="0">
-            <a:off x="13655377" y="6809666"/>
-            <a:ext cx="6229999" cy="6954669"/>
-          </a:xfrm>
-          <a:prstGeom prst="rect">
-            <a:avLst/>
-          </a:prstGeom>
-        </p:spPr>
-      </p:pic>
-      <p:pic>
-        <p:nvPicPr>
-          <p:cNvPr name="Picture 3" id="3"/>
-          <p:cNvPicPr>
-            <a:picLocks noChangeAspect="true"/>
-          </p:cNvPicPr>
-          <p:nvPr/>
-        </p:nvPicPr>
-        <p:blipFill>
-          <a:blip r:embed="rId3"/>
-          <a:srcRect l="0" t="0" r="0" b="0"/>
-          <a:stretch>
-            <a:fillRect/>
-          </a:stretch>
-        </p:blipFill>
-        <p:spPr>
-          <a:xfrm flipH="false" flipV="false" rot="0">
-            <a:off x="0" y="0"/>
-            <a:ext cx="6925457" cy="4700654"/>
-          </a:xfrm>
-          <a:prstGeom prst="rect">
-            <a:avLst/>
-          </a:prstGeom>
-        </p:spPr>
-      </p:pic>
-      <p:sp>
-        <p:nvSpPr>
-          <p:cNvPr name="TextBox 4" id="4"/>
-          <p:cNvSpPr txBox="true"/>
-          <p:nvPr/>
-        </p:nvSpPr>
-        <p:spPr>
-          <a:xfrm rot="0">
-            <a:off x="2717556" y="3895725"/>
-            <a:ext cx="12852888" cy="2200275"/>
-          </a:xfrm>
-          <a:prstGeom prst="rect">
-            <a:avLst/>
-          </a:prstGeom>
-        </p:spPr>
-        <p:txBody>
-          <a:bodyPr anchor="t" rtlCol="false" tIns="0" lIns="0" bIns="0" rIns="0">
-            <a:spAutoFit/>
-          </a:bodyPr>
-          <a:lstStyle/>
-          <a:p>
-            <a:pPr algn="ctr">
-              <a:lnSpc>
-                <a:spcPts val="15000"/>
-              </a:lnSpc>
-            </a:pPr>
-            <a:r>
-              <a:rPr lang="en-US" sz="12500">
-                <a:solidFill>
-                  <a:srgbClr val="000000"/>
-                </a:solidFill>
-                <a:latin typeface="Jua"/>
-                <a:ea typeface="Jua"/>
-                <a:cs typeface="Jua"/>
-                <a:sym typeface="Jua"/>
-              </a:rPr>
-              <a:t>튀르키예</a:t>
-            </a:r>
-          </a:p>
-        </p:txBody>
+            <a:off x="1414697" y="0"/>
+            <a:ext cx="15458607" cy="10287000"/>
+          </a:xfrm>
+          <a:custGeom>
+            <a:avLst/>
+            <a:gdLst/>
+            <a:ahLst/>
+            <a:cxnLst/>
+            <a:rect r="r" b="b" t="t" l="l"/>
+            <a:pathLst>
+              <a:path h="10287000" w="15458607">
+                <a:moveTo>
+                  <a:pt x="0" y="0"/>
+                </a:moveTo>
+                <a:lnTo>
+                  <a:pt x="15458606" y="0"/>
+                </a:lnTo>
+                <a:lnTo>
+                  <a:pt x="15458606" y="10287000"/>
+                </a:lnTo>
+                <a:lnTo>
+                  <a:pt x="0" y="10287000"/>
+                </a:lnTo>
+                <a:lnTo>
+                  <a:pt x="0" y="0"/>
+                </a:lnTo>
+                <a:close/>
+              </a:path>
+            </a:pathLst>
+          </a:custGeom>
+          <a:blipFill>
+            <a:blip r:embed="rId2"/>
+            <a:stretch>
+              <a:fillRect l="0" t="0" r="0" b="0"/>
+            </a:stretch>
+          </a:blipFill>
+        </p:spPr>
       </p:sp>
     </p:spTree>
   </p:cSld>
@@ -6563,51 +6528,96 @@
           <a:chExt cx="0" cy="0"/>
         </a:xfrm>
       </p:grpSpPr>
-      <p:sp>
-        <p:nvSpPr>
-          <p:cNvPr name="Freeform 2" id="2"/>
-          <p:cNvSpPr/>
-          <p:nvPr/>
-        </p:nvSpPr>
+      <p:pic>
+        <p:nvPicPr>
+          <p:cNvPr name="Picture 2" id="2"/>
+          <p:cNvPicPr>
+            <a:picLocks noChangeAspect="true"/>
+          </p:cNvPicPr>
+          <p:nvPr/>
+        </p:nvPicPr>
+        <p:blipFill>
+          <a:blip r:embed="rId2"/>
+          <a:srcRect l="0" t="0" r="0" b="0"/>
+          <a:stretch>
+            <a:fillRect/>
+          </a:stretch>
+        </p:blipFill>
         <p:spPr>
           <a:xfrm flipH="false" flipV="false" rot="0">
-            <a:off x="4000500" y="0"/>
-            <a:ext cx="10287000" cy="10287000"/>
-          </a:xfrm>
-          <a:custGeom>
-            <a:avLst/>
-            <a:gdLst/>
-            <a:ahLst/>
-            <a:cxnLst/>
-            <a:rect r="r" b="b" t="t" l="l"/>
-            <a:pathLst>
-              <a:path h="10287000" w="10287000">
-                <a:moveTo>
-                  <a:pt x="0" y="0"/>
-                </a:moveTo>
-                <a:lnTo>
-                  <a:pt x="10287000" y="0"/>
-                </a:lnTo>
-                <a:lnTo>
-                  <a:pt x="10287000" y="10287000"/>
-                </a:lnTo>
-                <a:lnTo>
-                  <a:pt x="0" y="10287000"/>
-                </a:lnTo>
-                <a:lnTo>
-                  <a:pt x="0" y="0"/>
-                </a:lnTo>
-                <a:close/>
-              </a:path>
-            </a:pathLst>
-          </a:custGeom>
-          <a:blipFill>
-            <a:blip r:embed="rId2"/>
-            <a:stretch>
-              <a:fillRect l="0" t="0" r="0" b="0"/>
-            </a:stretch>
-          </a:blipFill>
-        </p:spPr>
+            <a:off x="13655377" y="6809666"/>
+            <a:ext cx="6229999" cy="6954669"/>
+          </a:xfrm>
+          <a:prstGeom prst="rect">
+            <a:avLst/>
+          </a:prstGeom>
+        </p:spPr>
+      </p:pic>
+      <p:pic>
+        <p:nvPicPr>
+          <p:cNvPr name="Picture 3" id="3"/>
+          <p:cNvPicPr>
+            <a:picLocks noChangeAspect="true"/>
+          </p:cNvPicPr>
+          <p:nvPr/>
+        </p:nvPicPr>
+        <p:blipFill>
+          <a:blip r:embed="rId3"/>
+          <a:srcRect l="0" t="0" r="0" b="0"/>
+          <a:stretch>
+            <a:fillRect/>
+          </a:stretch>
+        </p:blipFill>
+        <p:spPr>
+          <a:xfrm flipH="false" flipV="false" rot="0">
+            <a:off x="0" y="0"/>
+            <a:ext cx="6925457" cy="4700654"/>
+          </a:xfrm>
+          <a:prstGeom prst="rect">
+            <a:avLst/>
+          </a:prstGeom>
+        </p:spPr>
+      </p:pic>
+      <p:sp>
+        <p:nvSpPr>
+          <p:cNvPr name="TextBox 4" id="4"/>
+          <p:cNvSpPr txBox="true"/>
+          <p:nvPr/>
+        </p:nvSpPr>
+        <p:spPr>
+          <a:xfrm rot="0">
+            <a:off x="2717556" y="4181475"/>
+            <a:ext cx="12852888" cy="1914525"/>
+          </a:xfrm>
+          <a:prstGeom prst="rect">
+            <a:avLst/>
+          </a:prstGeom>
+        </p:spPr>
+        <p:txBody>
+          <a:bodyPr anchor="t" rtlCol="false" tIns="0" lIns="0" bIns="0" rIns="0">
+            <a:spAutoFit/>
+          </a:bodyPr>
+          <a:lstStyle/>
+          <a:p>
+            <a:pPr algn="ctr">
+              <a:lnSpc>
+                <a:spcPts val="15000"/>
+              </a:lnSpc>
+            </a:pPr>
+            <a:r>
+              <a:rPr lang="en-US" sz="12500">
+                <a:solidFill>
+                  <a:srgbClr val="000000"/>
+                </a:solidFill>
+                <a:latin typeface="무궁화 고딕"/>
+                <a:ea typeface="무궁화 고딕"/>
+                <a:cs typeface="무궁화 고딕"/>
+                <a:sym typeface="무궁화 고딕"/>
+              </a:rPr>
+              <a:t>튀르키예</a:t>
+            </a:r>
+          </a:p>
+        </p:txBody>
       </p:sp>
     </p:spTree>
   </p:cSld>
@@ -6641,96 +6651,51 @@
           <a:chExt cx="0" cy="0"/>
         </a:xfrm>
       </p:grpSpPr>
-      <p:pic>
-        <p:nvPicPr>
-          <p:cNvPr name="Picture 2" id="2"/>
-          <p:cNvPicPr>
-            <a:picLocks noChangeAspect="true"/>
-          </p:cNvPicPr>
-          <p:nvPr/>
-        </p:nvPicPr>
-        <p:blipFill>
-          <a:blip r:embed="rId2"/>
-          <a:srcRect l="0" t="0" r="0" b="0"/>
-          <a:stretch>
-            <a:fillRect/>
-          </a:stretch>
-        </p:blipFill>
+      <p:sp>
+        <p:nvSpPr>
+          <p:cNvPr name="Freeform 2" id="2"/>
+          <p:cNvSpPr/>
+          <p:nvPr/>
+        </p:nvSpPr>
         <p:spPr>
           <a:xfrm flipH="false" flipV="false" rot="0">
-            <a:off x="13655377" y="6809666"/>
-            <a:ext cx="6229999" cy="6954669"/>
-          </a:xfrm>
-          <a:prstGeom prst="rect">
-            <a:avLst/>
-          </a:prstGeom>
-        </p:spPr>
-      </p:pic>
-      <p:pic>
-        <p:nvPicPr>
-          <p:cNvPr name="Picture 3" id="3"/>
-          <p:cNvPicPr>
-            <a:picLocks noChangeAspect="true"/>
-          </p:cNvPicPr>
-          <p:nvPr/>
-        </p:nvPicPr>
-        <p:blipFill>
-          <a:blip r:embed="rId3"/>
-          <a:srcRect l="0" t="0" r="0" b="0"/>
-          <a:stretch>
-            <a:fillRect/>
-          </a:stretch>
-        </p:blipFill>
-        <p:spPr>
-          <a:xfrm flipH="false" flipV="false" rot="0">
-            <a:off x="0" y="0"/>
-            <a:ext cx="6925457" cy="4700654"/>
-          </a:xfrm>
-          <a:prstGeom prst="rect">
-            <a:avLst/>
-          </a:prstGeom>
-        </p:spPr>
-      </p:pic>
-      <p:sp>
-        <p:nvSpPr>
-          <p:cNvPr name="TextBox 4" id="4"/>
-          <p:cNvSpPr txBox="true"/>
-          <p:nvPr/>
-        </p:nvSpPr>
-        <p:spPr>
-          <a:xfrm rot="0">
-            <a:off x="2717556" y="3895725"/>
-            <a:ext cx="12852888" cy="2200275"/>
-          </a:xfrm>
-          <a:prstGeom prst="rect">
-            <a:avLst/>
-          </a:prstGeom>
-        </p:spPr>
-        <p:txBody>
-          <a:bodyPr anchor="t" rtlCol="false" tIns="0" lIns="0" bIns="0" rIns="0">
-            <a:spAutoFit/>
-          </a:bodyPr>
-          <a:lstStyle/>
-          <a:p>
-            <a:pPr algn="ctr">
-              <a:lnSpc>
-                <a:spcPts val="15000"/>
-              </a:lnSpc>
-            </a:pPr>
-            <a:r>
-              <a:rPr lang="en-US" sz="12500">
-                <a:solidFill>
-                  <a:srgbClr val="000000"/>
-                </a:solidFill>
-                <a:latin typeface="Jua"/>
-                <a:ea typeface="Jua"/>
-                <a:cs typeface="Jua"/>
-                <a:sym typeface="Jua"/>
-              </a:rPr>
-              <a:t>스위스</a:t>
-            </a:r>
-          </a:p>
-        </p:txBody>
+            <a:off x="4000500" y="0"/>
+            <a:ext cx="10287000" cy="10287000"/>
+          </a:xfrm>
+          <a:custGeom>
+            <a:avLst/>
+            <a:gdLst/>
+            <a:ahLst/>
+            <a:cxnLst/>
+            <a:rect r="r" b="b" t="t" l="l"/>
+            <a:pathLst>
+              <a:path h="10287000" w="10287000">
+                <a:moveTo>
+                  <a:pt x="0" y="0"/>
+                </a:moveTo>
+                <a:lnTo>
+                  <a:pt x="10287000" y="0"/>
+                </a:lnTo>
+                <a:lnTo>
+                  <a:pt x="10287000" y="10287000"/>
+                </a:lnTo>
+                <a:lnTo>
+                  <a:pt x="0" y="10287000"/>
+                </a:lnTo>
+                <a:lnTo>
+                  <a:pt x="0" y="0"/>
+                </a:lnTo>
+                <a:close/>
+              </a:path>
+            </a:pathLst>
+          </a:custGeom>
+          <a:blipFill>
+            <a:blip r:embed="rId2"/>
+            <a:stretch>
+              <a:fillRect l="0" t="0" r="0" b="0"/>
+            </a:stretch>
+          </a:blipFill>
+        </p:spPr>
       </p:sp>
     </p:spTree>
   </p:cSld>
@@ -6764,51 +6729,96 @@
           <a:chExt cx="0" cy="0"/>
         </a:xfrm>
       </p:grpSpPr>
-      <p:sp>
-        <p:nvSpPr>
-          <p:cNvPr name="Freeform 2" id="2"/>
-          <p:cNvSpPr/>
-          <p:nvPr/>
-        </p:nvSpPr>
+      <p:pic>
+        <p:nvPicPr>
+          <p:cNvPr name="Picture 2" id="2"/>
+          <p:cNvPicPr>
+            <a:picLocks noChangeAspect="true"/>
+          </p:cNvPicPr>
+          <p:nvPr/>
+        </p:nvPicPr>
+        <p:blipFill>
+          <a:blip r:embed="rId2"/>
+          <a:srcRect l="0" t="0" r="0" b="0"/>
+          <a:stretch>
+            <a:fillRect/>
+          </a:stretch>
+        </p:blipFill>
         <p:spPr>
           <a:xfrm flipH="false" flipV="false" rot="0">
-            <a:off x="1414697" y="0"/>
-            <a:ext cx="15458607" cy="10287000"/>
-          </a:xfrm>
-          <a:custGeom>
-            <a:avLst/>
-            <a:gdLst/>
-            <a:ahLst/>
-            <a:cxnLst/>
-            <a:rect r="r" b="b" t="t" l="l"/>
-            <a:pathLst>
-              <a:path h="10287000" w="15458607">
-                <a:moveTo>
-                  <a:pt x="0" y="0"/>
-                </a:moveTo>
-                <a:lnTo>
-                  <a:pt x="15458606" y="0"/>
-                </a:lnTo>
-                <a:lnTo>
-                  <a:pt x="15458606" y="10287000"/>
-                </a:lnTo>
-                <a:lnTo>
-                  <a:pt x="0" y="10287000"/>
-                </a:lnTo>
-                <a:lnTo>
-                  <a:pt x="0" y="0"/>
-                </a:lnTo>
-                <a:close/>
-              </a:path>
-            </a:pathLst>
-          </a:custGeom>
-          <a:blipFill>
-            <a:blip r:embed="rId2"/>
-            <a:stretch>
-              <a:fillRect l="0" t="0" r="0" b="0"/>
-            </a:stretch>
-          </a:blipFill>
-        </p:spPr>
+            <a:off x="13655377" y="6809666"/>
+            <a:ext cx="6229999" cy="6954669"/>
+          </a:xfrm>
+          <a:prstGeom prst="rect">
+            <a:avLst/>
+          </a:prstGeom>
+        </p:spPr>
+      </p:pic>
+      <p:pic>
+        <p:nvPicPr>
+          <p:cNvPr name="Picture 3" id="3"/>
+          <p:cNvPicPr>
+            <a:picLocks noChangeAspect="true"/>
+          </p:cNvPicPr>
+          <p:nvPr/>
+        </p:nvPicPr>
+        <p:blipFill>
+          <a:blip r:embed="rId3"/>
+          <a:srcRect l="0" t="0" r="0" b="0"/>
+          <a:stretch>
+            <a:fillRect/>
+          </a:stretch>
+        </p:blipFill>
+        <p:spPr>
+          <a:xfrm flipH="false" flipV="false" rot="0">
+            <a:off x="0" y="0"/>
+            <a:ext cx="6925457" cy="4700654"/>
+          </a:xfrm>
+          <a:prstGeom prst="rect">
+            <a:avLst/>
+          </a:prstGeom>
+        </p:spPr>
+      </p:pic>
+      <p:sp>
+        <p:nvSpPr>
+          <p:cNvPr name="TextBox 4" id="4"/>
+          <p:cNvSpPr txBox="true"/>
+          <p:nvPr/>
+        </p:nvSpPr>
+        <p:spPr>
+          <a:xfrm rot="0">
+            <a:off x="2717556" y="4181475"/>
+            <a:ext cx="12852888" cy="1914525"/>
+          </a:xfrm>
+          <a:prstGeom prst="rect">
+            <a:avLst/>
+          </a:prstGeom>
+        </p:spPr>
+        <p:txBody>
+          <a:bodyPr anchor="t" rtlCol="false" tIns="0" lIns="0" bIns="0" rIns="0">
+            <a:spAutoFit/>
+          </a:bodyPr>
+          <a:lstStyle/>
+          <a:p>
+            <a:pPr algn="ctr">
+              <a:lnSpc>
+                <a:spcPts val="15000"/>
+              </a:lnSpc>
+            </a:pPr>
+            <a:r>
+              <a:rPr lang="en-US" sz="12500">
+                <a:solidFill>
+                  <a:srgbClr val="000000"/>
+                </a:solidFill>
+                <a:latin typeface="무궁화 고딕"/>
+                <a:ea typeface="무궁화 고딕"/>
+                <a:cs typeface="무궁화 고딕"/>
+                <a:sym typeface="무궁화 고딕"/>
+              </a:rPr>
+              <a:t>스위스</a:t>
+            </a:r>
+          </a:p>
+        </p:txBody>
       </p:sp>
     </p:spTree>
   </p:cSld>
@@ -6842,96 +6852,51 @@
           <a:chExt cx="0" cy="0"/>
         </a:xfrm>
       </p:grpSpPr>
-      <p:pic>
-        <p:nvPicPr>
-          <p:cNvPr name="Picture 2" id="2"/>
-          <p:cNvPicPr>
-            <a:picLocks noChangeAspect="true"/>
-          </p:cNvPicPr>
-          <p:nvPr/>
-        </p:nvPicPr>
-        <p:blipFill>
-          <a:blip r:embed="rId2"/>
-          <a:srcRect l="0" t="0" r="0" b="0"/>
-          <a:stretch>
-            <a:fillRect/>
-          </a:stretch>
-        </p:blipFill>
+      <p:sp>
+        <p:nvSpPr>
+          <p:cNvPr name="Freeform 2" id="2"/>
+          <p:cNvSpPr/>
+          <p:nvPr/>
+        </p:nvSpPr>
         <p:spPr>
           <a:xfrm flipH="false" flipV="false" rot="0">
-            <a:off x="13655377" y="6809666"/>
-            <a:ext cx="6229999" cy="6954669"/>
-          </a:xfrm>
-          <a:prstGeom prst="rect">
-            <a:avLst/>
-          </a:prstGeom>
-        </p:spPr>
-      </p:pic>
-      <p:pic>
-        <p:nvPicPr>
-          <p:cNvPr name="Picture 3" id="3"/>
-          <p:cNvPicPr>
-            <a:picLocks noChangeAspect="true"/>
-          </p:cNvPicPr>
-          <p:nvPr/>
-        </p:nvPicPr>
-        <p:blipFill>
-          <a:blip r:embed="rId3"/>
-          <a:srcRect l="0" t="0" r="0" b="0"/>
-          <a:stretch>
-            <a:fillRect/>
-          </a:stretch>
-        </p:blipFill>
-        <p:spPr>
-          <a:xfrm flipH="false" flipV="false" rot="0">
-            <a:off x="0" y="0"/>
-            <a:ext cx="6925457" cy="4700654"/>
-          </a:xfrm>
-          <a:prstGeom prst="rect">
-            <a:avLst/>
-          </a:prstGeom>
-        </p:spPr>
-      </p:pic>
-      <p:sp>
-        <p:nvSpPr>
-          <p:cNvPr name="TextBox 4" id="4"/>
-          <p:cNvSpPr txBox="true"/>
-          <p:nvPr/>
-        </p:nvSpPr>
-        <p:spPr>
-          <a:xfrm rot="0">
-            <a:off x="2717556" y="3895725"/>
-            <a:ext cx="12852888" cy="2200275"/>
-          </a:xfrm>
-          <a:prstGeom prst="rect">
-            <a:avLst/>
-          </a:prstGeom>
-        </p:spPr>
-        <p:txBody>
-          <a:bodyPr anchor="t" rtlCol="false" tIns="0" lIns="0" bIns="0" rIns="0">
-            <a:spAutoFit/>
-          </a:bodyPr>
-          <a:lstStyle/>
-          <a:p>
-            <a:pPr algn="ctr">
-              <a:lnSpc>
-                <a:spcPts val="15000"/>
-              </a:lnSpc>
-            </a:pPr>
-            <a:r>
-              <a:rPr lang="en-US" sz="12500">
-                <a:solidFill>
-                  <a:srgbClr val="000000"/>
-                </a:solidFill>
-                <a:latin typeface="Jua"/>
-                <a:ea typeface="Jua"/>
-                <a:cs typeface="Jua"/>
-                <a:sym typeface="Jua"/>
-              </a:rPr>
-              <a:t>태국</a:t>
-            </a:r>
-          </a:p>
-        </p:txBody>
+            <a:off x="1414697" y="0"/>
+            <a:ext cx="15458607" cy="10287000"/>
+          </a:xfrm>
+          <a:custGeom>
+            <a:avLst/>
+            <a:gdLst/>
+            <a:ahLst/>
+            <a:cxnLst/>
+            <a:rect r="r" b="b" t="t" l="l"/>
+            <a:pathLst>
+              <a:path h="10287000" w="15458607">
+                <a:moveTo>
+                  <a:pt x="0" y="0"/>
+                </a:moveTo>
+                <a:lnTo>
+                  <a:pt x="15458606" y="0"/>
+                </a:lnTo>
+                <a:lnTo>
+                  <a:pt x="15458606" y="10287000"/>
+                </a:lnTo>
+                <a:lnTo>
+                  <a:pt x="0" y="10287000"/>
+                </a:lnTo>
+                <a:lnTo>
+                  <a:pt x="0" y="0"/>
+                </a:lnTo>
+                <a:close/>
+              </a:path>
+            </a:pathLst>
+          </a:custGeom>
+          <a:blipFill>
+            <a:blip r:embed="rId2"/>
+            <a:stretch>
+              <a:fillRect l="0" t="0" r="0" b="0"/>
+            </a:stretch>
+          </a:blipFill>
+        </p:spPr>
       </p:sp>
     </p:spTree>
   </p:cSld>
@@ -6947,7 +6912,7 @@
     <p:bg>
       <p:bgPr>
         <a:solidFill>
-          <a:srgbClr val="FFFAEF"/>
+          <a:srgbClr val="7D8AAB"/>
         </a:solidFill>
       </p:bgPr>
     </p:bg>
@@ -6965,51 +6930,140 @@
           <a:chExt cx="0" cy="0"/>
         </a:xfrm>
       </p:grpSpPr>
-      <p:sp>
-        <p:nvSpPr>
-          <p:cNvPr name="Freeform 2" id="2"/>
-          <p:cNvSpPr/>
-          <p:nvPr/>
-        </p:nvSpPr>
-        <p:spPr>
-          <a:xfrm flipH="false" flipV="false" rot="0">
-            <a:off x="1423925" y="0"/>
-            <a:ext cx="15440150" cy="10287000"/>
-          </a:xfrm>
-          <a:custGeom>
-            <a:avLst/>
-            <a:gdLst/>
-            <a:ahLst/>
-            <a:cxnLst/>
-            <a:rect r="r" b="b" t="t" l="l"/>
-            <a:pathLst>
-              <a:path h="10287000" w="15440150">
-                <a:moveTo>
-                  <a:pt x="0" y="0"/>
-                </a:moveTo>
-                <a:lnTo>
-                  <a:pt x="15440150" y="0"/>
-                </a:lnTo>
-                <a:lnTo>
-                  <a:pt x="15440150" y="10287000"/>
-                </a:lnTo>
-                <a:lnTo>
-                  <a:pt x="0" y="10287000"/>
-                </a:lnTo>
-                <a:lnTo>
-                  <a:pt x="0" y="0"/>
-                </a:lnTo>
-                <a:close/>
-              </a:path>
-            </a:pathLst>
-          </a:custGeom>
-          <a:blipFill>
-            <a:blip r:embed="rId2"/>
-            <a:stretch>
-              <a:fillRect l="0" t="0" r="0" b="0"/>
-            </a:stretch>
-          </a:blipFill>
-        </p:spPr>
+      <p:pic>
+        <p:nvPicPr>
+          <p:cNvPr name="Picture 2" id="2"/>
+          <p:cNvPicPr>
+            <a:picLocks noChangeAspect="true"/>
+          </p:cNvPicPr>
+          <p:nvPr/>
+        </p:nvPicPr>
+        <p:blipFill>
+          <a:blip r:embed="rId2"/>
+          <a:srcRect l="64771" t="21970" r="0" b="0"/>
+          <a:stretch>
+            <a:fillRect/>
+          </a:stretch>
+        </p:blipFill>
+        <p:spPr>
+          <a:xfrm flipH="false" flipV="false" rot="5400000">
+            <a:off x="2310738" y="4172522"/>
+            <a:ext cx="3803740" cy="8425216"/>
+          </a:xfrm>
+          <a:prstGeom prst="rect">
+            <a:avLst/>
+          </a:prstGeom>
+        </p:spPr>
+      </p:pic>
+      <p:pic>
+        <p:nvPicPr>
+          <p:cNvPr name="Picture 3" id="3"/>
+          <p:cNvPicPr>
+            <a:picLocks noChangeAspect="true"/>
+          </p:cNvPicPr>
+          <p:nvPr/>
+        </p:nvPicPr>
+        <p:blipFill>
+          <a:blip r:embed="rId3"/>
+          <a:srcRect l="0" t="0" r="0" b="0"/>
+          <a:stretch>
+            <a:fillRect/>
+          </a:stretch>
+        </p:blipFill>
+        <p:spPr>
+          <a:xfrm flipH="false" flipV="false" rot="-7094170">
+            <a:off x="14148180" y="-2590072"/>
+            <a:ext cx="7036829" cy="7237544"/>
+          </a:xfrm>
+          <a:prstGeom prst="rect">
+            <a:avLst/>
+          </a:prstGeom>
+        </p:spPr>
+      </p:pic>
+      <p:sp>
+        <p:nvSpPr>
+          <p:cNvPr name="TextBox 4" id="4"/>
+          <p:cNvSpPr txBox="true"/>
+          <p:nvPr/>
+        </p:nvSpPr>
+        <p:spPr>
+          <a:xfrm rot="0">
+            <a:off x="1028700" y="4178617"/>
+            <a:ext cx="15555091" cy="1914525"/>
+          </a:xfrm>
+          <a:prstGeom prst="rect">
+            <a:avLst/>
+          </a:prstGeom>
+        </p:spPr>
+        <p:txBody>
+          <a:bodyPr anchor="t" rtlCol="false" tIns="0" lIns="0" bIns="0" rIns="0">
+            <a:spAutoFit/>
+          </a:bodyPr>
+          <a:lstStyle/>
+          <a:p>
+            <a:pPr algn="ctr">
+              <a:lnSpc>
+                <a:spcPts val="15000"/>
+              </a:lnSpc>
+            </a:pPr>
+            <a:r>
+              <a:rPr lang="en-US" sz="12500">
+                <a:solidFill>
+                  <a:srgbClr val="FFFAEF"/>
+                </a:solidFill>
+                <a:latin typeface="무궁화 고딕"/>
+                <a:ea typeface="무궁화 고딕"/>
+                <a:cs typeface="무궁화 고딕"/>
+                <a:sym typeface="무궁화 고딕"/>
+              </a:rPr>
+              <a:t>나라 맞추기</a:t>
+            </a:r>
+          </a:p>
+        </p:txBody>
+      </p:sp>
+      <p:sp>
+        <p:nvSpPr>
+          <p:cNvPr name="TextBox 5" id="5"/>
+          <p:cNvSpPr txBox="true"/>
+          <p:nvPr/>
+        </p:nvSpPr>
+        <p:spPr>
+          <a:xfrm rot="0">
+            <a:off x="14783540" y="9822180"/>
+            <a:ext cx="3119239" cy="464820"/>
+          </a:xfrm>
+          <a:prstGeom prst="rect">
+            <a:avLst/>
+          </a:prstGeom>
+        </p:spPr>
+        <p:txBody>
+          <a:bodyPr anchor="t" rtlCol="false" tIns="0" lIns="0" bIns="0" rIns="0">
+            <a:spAutoFit/>
+          </a:bodyPr>
+          <a:lstStyle/>
+          <a:p>
+            <a:pPr algn="r">
+              <a:lnSpc>
+                <a:spcPts val="3779"/>
+              </a:lnSpc>
+              <a:spcBef>
+                <a:spcPct val="0"/>
+              </a:spcBef>
+            </a:pPr>
+            <a:r>
+              <a:rPr lang="en-US" sz="2700" spc="-135">
+                <a:solidFill>
+                  <a:srgbClr val="FFFFFF"/>
+                </a:solidFill>
+                <a:latin typeface="무궁화 고딕"/>
+                <a:ea typeface="무궁화 고딕"/>
+                <a:cs typeface="무궁화 고딕"/>
+                <a:sym typeface="무궁화 고딕"/>
+              </a:rPr>
+              <a:t>ⓒ 2026. Sunday Play</a:t>
+            </a:r>
+          </a:p>
+        </p:txBody>
       </p:sp>
     </p:spTree>
   </p:cSld>
@@ -7043,51 +7097,96 @@
           <a:chExt cx="0" cy="0"/>
         </a:xfrm>
       </p:grpSpPr>
-      <p:sp>
-        <p:nvSpPr>
-          <p:cNvPr name="Freeform 2" id="2"/>
-          <p:cNvSpPr/>
-          <p:nvPr/>
-        </p:nvSpPr>
+      <p:pic>
+        <p:nvPicPr>
+          <p:cNvPr name="Picture 2" id="2"/>
+          <p:cNvPicPr>
+            <a:picLocks noChangeAspect="true"/>
+          </p:cNvPicPr>
+          <p:nvPr/>
+        </p:nvPicPr>
+        <p:blipFill>
+          <a:blip r:embed="rId2"/>
+          <a:srcRect l="0" t="0" r="0" b="0"/>
+          <a:stretch>
+            <a:fillRect/>
+          </a:stretch>
+        </p:blipFill>
         <p:spPr>
           <a:xfrm flipH="false" flipV="false" rot="0">
-            <a:off x="2061589" y="0"/>
-            <a:ext cx="14164822" cy="10287000"/>
-          </a:xfrm>
-          <a:custGeom>
-            <a:avLst/>
-            <a:gdLst/>
-            <a:ahLst/>
-            <a:cxnLst/>
-            <a:rect r="r" b="b" t="t" l="l"/>
-            <a:pathLst>
-              <a:path h="10287000" w="14164822">
-                <a:moveTo>
-                  <a:pt x="0" y="0"/>
-                </a:moveTo>
-                <a:lnTo>
-                  <a:pt x="14164822" y="0"/>
-                </a:lnTo>
-                <a:lnTo>
-                  <a:pt x="14164822" y="10287000"/>
-                </a:lnTo>
-                <a:lnTo>
-                  <a:pt x="0" y="10287000"/>
-                </a:lnTo>
-                <a:lnTo>
-                  <a:pt x="0" y="0"/>
-                </a:lnTo>
-                <a:close/>
-              </a:path>
-            </a:pathLst>
-          </a:custGeom>
-          <a:blipFill>
-            <a:blip r:embed="rId2"/>
-            <a:stretch>
-              <a:fillRect l="0" t="0" r="0" b="0"/>
-            </a:stretch>
-          </a:blipFill>
-        </p:spPr>
+            <a:off x="13655377" y="6809666"/>
+            <a:ext cx="6229999" cy="6954669"/>
+          </a:xfrm>
+          <a:prstGeom prst="rect">
+            <a:avLst/>
+          </a:prstGeom>
+        </p:spPr>
+      </p:pic>
+      <p:pic>
+        <p:nvPicPr>
+          <p:cNvPr name="Picture 3" id="3"/>
+          <p:cNvPicPr>
+            <a:picLocks noChangeAspect="true"/>
+          </p:cNvPicPr>
+          <p:nvPr/>
+        </p:nvPicPr>
+        <p:blipFill>
+          <a:blip r:embed="rId3"/>
+          <a:srcRect l="0" t="0" r="0" b="0"/>
+          <a:stretch>
+            <a:fillRect/>
+          </a:stretch>
+        </p:blipFill>
+        <p:spPr>
+          <a:xfrm flipH="false" flipV="false" rot="0">
+            <a:off x="0" y="0"/>
+            <a:ext cx="6925457" cy="4700654"/>
+          </a:xfrm>
+          <a:prstGeom prst="rect">
+            <a:avLst/>
+          </a:prstGeom>
+        </p:spPr>
+      </p:pic>
+      <p:sp>
+        <p:nvSpPr>
+          <p:cNvPr name="TextBox 4" id="4"/>
+          <p:cNvSpPr txBox="true"/>
+          <p:nvPr/>
+        </p:nvSpPr>
+        <p:spPr>
+          <a:xfrm rot="0">
+            <a:off x="2717556" y="4181475"/>
+            <a:ext cx="12852888" cy="1914525"/>
+          </a:xfrm>
+          <a:prstGeom prst="rect">
+            <a:avLst/>
+          </a:prstGeom>
+        </p:spPr>
+        <p:txBody>
+          <a:bodyPr anchor="t" rtlCol="false" tIns="0" lIns="0" bIns="0" rIns="0">
+            <a:spAutoFit/>
+          </a:bodyPr>
+          <a:lstStyle/>
+          <a:p>
+            <a:pPr algn="ctr">
+              <a:lnSpc>
+                <a:spcPts val="15000"/>
+              </a:lnSpc>
+            </a:pPr>
+            <a:r>
+              <a:rPr lang="en-US" sz="12500">
+                <a:solidFill>
+                  <a:srgbClr val="000000"/>
+                </a:solidFill>
+                <a:latin typeface="무궁화 고딕"/>
+                <a:ea typeface="무궁화 고딕"/>
+                <a:cs typeface="무궁화 고딕"/>
+                <a:sym typeface="무궁화 고딕"/>
+              </a:rPr>
+              <a:t>태국</a:t>
+            </a:r>
+          </a:p>
+        </p:txBody>
       </p:sp>
     </p:spTree>
   </p:cSld>
@@ -7121,96 +7220,51 @@
           <a:chExt cx="0" cy="0"/>
         </a:xfrm>
       </p:grpSpPr>
-      <p:pic>
-        <p:nvPicPr>
-          <p:cNvPr name="Picture 2" id="2"/>
-          <p:cNvPicPr>
-            <a:picLocks noChangeAspect="true"/>
-          </p:cNvPicPr>
-          <p:nvPr/>
-        </p:nvPicPr>
-        <p:blipFill>
-          <a:blip r:embed="rId2"/>
-          <a:srcRect l="0" t="0" r="0" b="0"/>
-          <a:stretch>
-            <a:fillRect/>
-          </a:stretch>
-        </p:blipFill>
+      <p:sp>
+        <p:nvSpPr>
+          <p:cNvPr name="Freeform 2" id="2"/>
+          <p:cNvSpPr/>
+          <p:nvPr/>
+        </p:nvSpPr>
         <p:spPr>
           <a:xfrm flipH="false" flipV="false" rot="0">
-            <a:off x="13655377" y="6809666"/>
-            <a:ext cx="6229999" cy="6954669"/>
-          </a:xfrm>
-          <a:prstGeom prst="rect">
-            <a:avLst/>
-          </a:prstGeom>
-        </p:spPr>
-      </p:pic>
-      <p:pic>
-        <p:nvPicPr>
-          <p:cNvPr name="Picture 3" id="3"/>
-          <p:cNvPicPr>
-            <a:picLocks noChangeAspect="true"/>
-          </p:cNvPicPr>
-          <p:nvPr/>
-        </p:nvPicPr>
-        <p:blipFill>
-          <a:blip r:embed="rId3"/>
-          <a:srcRect l="0" t="0" r="0" b="0"/>
-          <a:stretch>
-            <a:fillRect/>
-          </a:stretch>
-        </p:blipFill>
-        <p:spPr>
-          <a:xfrm flipH="false" flipV="false" rot="0">
-            <a:off x="0" y="0"/>
-            <a:ext cx="6925457" cy="4700654"/>
-          </a:xfrm>
-          <a:prstGeom prst="rect">
-            <a:avLst/>
-          </a:prstGeom>
-        </p:spPr>
-      </p:pic>
-      <p:sp>
-        <p:nvSpPr>
-          <p:cNvPr name="TextBox 4" id="4"/>
-          <p:cNvSpPr txBox="true"/>
-          <p:nvPr/>
-        </p:nvSpPr>
-        <p:spPr>
-          <a:xfrm rot="0">
-            <a:off x="2717556" y="3895725"/>
-            <a:ext cx="12852888" cy="2200275"/>
-          </a:xfrm>
-          <a:prstGeom prst="rect">
-            <a:avLst/>
-          </a:prstGeom>
-        </p:spPr>
-        <p:txBody>
-          <a:bodyPr anchor="t" rtlCol="false" tIns="0" lIns="0" bIns="0" rIns="0">
-            <a:spAutoFit/>
-          </a:bodyPr>
-          <a:lstStyle/>
-          <a:p>
-            <a:pPr algn="ctr">
-              <a:lnSpc>
-                <a:spcPts val="15000"/>
-              </a:lnSpc>
-            </a:pPr>
-            <a:r>
-              <a:rPr lang="en-US" sz="12500">
-                <a:solidFill>
-                  <a:srgbClr val="000000"/>
-                </a:solidFill>
-                <a:latin typeface="Jua"/>
-                <a:ea typeface="Jua"/>
-                <a:cs typeface="Jua"/>
-                <a:sym typeface="Jua"/>
-              </a:rPr>
-              <a:t>이스라엘</a:t>
-            </a:r>
-          </a:p>
-        </p:txBody>
+            <a:off x="2061589" y="0"/>
+            <a:ext cx="14164822" cy="10287000"/>
+          </a:xfrm>
+          <a:custGeom>
+            <a:avLst/>
+            <a:gdLst/>
+            <a:ahLst/>
+            <a:cxnLst/>
+            <a:rect r="r" b="b" t="t" l="l"/>
+            <a:pathLst>
+              <a:path h="10287000" w="14164822">
+                <a:moveTo>
+                  <a:pt x="0" y="0"/>
+                </a:moveTo>
+                <a:lnTo>
+                  <a:pt x="14164822" y="0"/>
+                </a:lnTo>
+                <a:lnTo>
+                  <a:pt x="14164822" y="10287000"/>
+                </a:lnTo>
+                <a:lnTo>
+                  <a:pt x="0" y="10287000"/>
+                </a:lnTo>
+                <a:lnTo>
+                  <a:pt x="0" y="0"/>
+                </a:lnTo>
+                <a:close/>
+              </a:path>
+            </a:pathLst>
+          </a:custGeom>
+          <a:blipFill>
+            <a:blip r:embed="rId2"/>
+            <a:stretch>
+              <a:fillRect l="0" t="0" r="0" b="0"/>
+            </a:stretch>
+          </a:blipFill>
+        </p:spPr>
       </p:sp>
     </p:spTree>
   </p:cSld>
@@ -7244,51 +7298,96 @@
           <a:chExt cx="0" cy="0"/>
         </a:xfrm>
       </p:grpSpPr>
-      <p:sp>
-        <p:nvSpPr>
-          <p:cNvPr name="Freeform 2" id="2"/>
-          <p:cNvSpPr/>
-          <p:nvPr/>
-        </p:nvSpPr>
+      <p:pic>
+        <p:nvPicPr>
+          <p:cNvPr name="Picture 2" id="2"/>
+          <p:cNvPicPr>
+            <a:picLocks noChangeAspect="true"/>
+          </p:cNvPicPr>
+          <p:nvPr/>
+        </p:nvPicPr>
+        <p:blipFill>
+          <a:blip r:embed="rId2"/>
+          <a:srcRect l="0" t="0" r="0" b="0"/>
+          <a:stretch>
+            <a:fillRect/>
+          </a:stretch>
+        </p:blipFill>
         <p:spPr>
           <a:xfrm flipH="false" flipV="false" rot="0">
-            <a:off x="1414697" y="0"/>
-            <a:ext cx="15458607" cy="10287000"/>
-          </a:xfrm>
-          <a:custGeom>
-            <a:avLst/>
-            <a:gdLst/>
-            <a:ahLst/>
-            <a:cxnLst/>
-            <a:rect r="r" b="b" t="t" l="l"/>
-            <a:pathLst>
-              <a:path h="10287000" w="15458607">
-                <a:moveTo>
-                  <a:pt x="0" y="0"/>
-                </a:moveTo>
-                <a:lnTo>
-                  <a:pt x="15458606" y="0"/>
-                </a:lnTo>
-                <a:lnTo>
-                  <a:pt x="15458606" y="10287000"/>
-                </a:lnTo>
-                <a:lnTo>
-                  <a:pt x="0" y="10287000"/>
-                </a:lnTo>
-                <a:lnTo>
-                  <a:pt x="0" y="0"/>
-                </a:lnTo>
-                <a:close/>
-              </a:path>
-            </a:pathLst>
-          </a:custGeom>
-          <a:blipFill>
-            <a:blip r:embed="rId2"/>
-            <a:stretch>
-              <a:fillRect l="0" t="0" r="0" b="0"/>
-            </a:stretch>
-          </a:blipFill>
-        </p:spPr>
+            <a:off x="13655377" y="6809666"/>
+            <a:ext cx="6229999" cy="6954669"/>
+          </a:xfrm>
+          <a:prstGeom prst="rect">
+            <a:avLst/>
+          </a:prstGeom>
+        </p:spPr>
+      </p:pic>
+      <p:pic>
+        <p:nvPicPr>
+          <p:cNvPr name="Picture 3" id="3"/>
+          <p:cNvPicPr>
+            <a:picLocks noChangeAspect="true"/>
+          </p:cNvPicPr>
+          <p:nvPr/>
+        </p:nvPicPr>
+        <p:blipFill>
+          <a:blip r:embed="rId3"/>
+          <a:srcRect l="0" t="0" r="0" b="0"/>
+          <a:stretch>
+            <a:fillRect/>
+          </a:stretch>
+        </p:blipFill>
+        <p:spPr>
+          <a:xfrm flipH="false" flipV="false" rot="0">
+            <a:off x="0" y="0"/>
+            <a:ext cx="6925457" cy="4700654"/>
+          </a:xfrm>
+          <a:prstGeom prst="rect">
+            <a:avLst/>
+          </a:prstGeom>
+        </p:spPr>
+      </p:pic>
+      <p:sp>
+        <p:nvSpPr>
+          <p:cNvPr name="TextBox 4" id="4"/>
+          <p:cNvSpPr txBox="true"/>
+          <p:nvPr/>
+        </p:nvSpPr>
+        <p:spPr>
+          <a:xfrm rot="0">
+            <a:off x="2717556" y="4181475"/>
+            <a:ext cx="12852888" cy="1914525"/>
+          </a:xfrm>
+          <a:prstGeom prst="rect">
+            <a:avLst/>
+          </a:prstGeom>
+        </p:spPr>
+        <p:txBody>
+          <a:bodyPr anchor="t" rtlCol="false" tIns="0" lIns="0" bIns="0" rIns="0">
+            <a:spAutoFit/>
+          </a:bodyPr>
+          <a:lstStyle/>
+          <a:p>
+            <a:pPr algn="ctr">
+              <a:lnSpc>
+                <a:spcPts val="15000"/>
+              </a:lnSpc>
+            </a:pPr>
+            <a:r>
+              <a:rPr lang="en-US" sz="12500">
+                <a:solidFill>
+                  <a:srgbClr val="000000"/>
+                </a:solidFill>
+                <a:latin typeface="무궁화 고딕"/>
+                <a:ea typeface="무궁화 고딕"/>
+                <a:cs typeface="무궁화 고딕"/>
+                <a:sym typeface="무궁화 고딕"/>
+              </a:rPr>
+              <a:t>이스라엘</a:t>
+            </a:r>
+          </a:p>
+        </p:txBody>
       </p:sp>
     </p:spTree>
   </p:cSld>
@@ -7322,96 +7421,51 @@
           <a:chExt cx="0" cy="0"/>
         </a:xfrm>
       </p:grpSpPr>
-      <p:pic>
-        <p:nvPicPr>
-          <p:cNvPr name="Picture 2" id="2"/>
-          <p:cNvPicPr>
-            <a:picLocks noChangeAspect="true"/>
-          </p:cNvPicPr>
-          <p:nvPr/>
-        </p:nvPicPr>
-        <p:blipFill>
-          <a:blip r:embed="rId2"/>
-          <a:srcRect l="0" t="0" r="0" b="0"/>
-          <a:stretch>
-            <a:fillRect/>
-          </a:stretch>
-        </p:blipFill>
+      <p:sp>
+        <p:nvSpPr>
+          <p:cNvPr name="Freeform 2" id="2"/>
+          <p:cNvSpPr/>
+          <p:nvPr/>
+        </p:nvSpPr>
         <p:spPr>
           <a:xfrm flipH="false" flipV="false" rot="0">
-            <a:off x="13655377" y="6809666"/>
-            <a:ext cx="6229999" cy="6954669"/>
-          </a:xfrm>
-          <a:prstGeom prst="rect">
-            <a:avLst/>
-          </a:prstGeom>
-        </p:spPr>
-      </p:pic>
-      <p:pic>
-        <p:nvPicPr>
-          <p:cNvPr name="Picture 3" id="3"/>
-          <p:cNvPicPr>
-            <a:picLocks noChangeAspect="true"/>
-          </p:cNvPicPr>
-          <p:nvPr/>
-        </p:nvPicPr>
-        <p:blipFill>
-          <a:blip r:embed="rId3"/>
-          <a:srcRect l="0" t="0" r="0" b="0"/>
-          <a:stretch>
-            <a:fillRect/>
-          </a:stretch>
-        </p:blipFill>
-        <p:spPr>
-          <a:xfrm flipH="false" flipV="false" rot="0">
-            <a:off x="0" y="0"/>
-            <a:ext cx="6925457" cy="4700654"/>
-          </a:xfrm>
-          <a:prstGeom prst="rect">
-            <a:avLst/>
-          </a:prstGeom>
-        </p:spPr>
-      </p:pic>
-      <p:sp>
-        <p:nvSpPr>
-          <p:cNvPr name="TextBox 4" id="4"/>
-          <p:cNvSpPr txBox="true"/>
-          <p:nvPr/>
-        </p:nvSpPr>
-        <p:spPr>
-          <a:xfrm rot="0">
-            <a:off x="2717556" y="3895725"/>
-            <a:ext cx="12852888" cy="2200275"/>
-          </a:xfrm>
-          <a:prstGeom prst="rect">
-            <a:avLst/>
-          </a:prstGeom>
-        </p:spPr>
-        <p:txBody>
-          <a:bodyPr anchor="t" rtlCol="false" tIns="0" lIns="0" bIns="0" rIns="0">
-            <a:spAutoFit/>
-          </a:bodyPr>
-          <a:lstStyle/>
-          <a:p>
-            <a:pPr algn="ctr">
-              <a:lnSpc>
-                <a:spcPts val="15000"/>
-              </a:lnSpc>
-            </a:pPr>
-            <a:r>
-              <a:rPr lang="en-US" sz="12500">
-                <a:solidFill>
-                  <a:srgbClr val="000000"/>
-                </a:solidFill>
-                <a:latin typeface="Jua"/>
-                <a:ea typeface="Jua"/>
-                <a:cs typeface="Jua"/>
-                <a:sym typeface="Jua"/>
-              </a:rPr>
-              <a:t>남아프리카 공화국</a:t>
-            </a:r>
-          </a:p>
-        </p:txBody>
+            <a:off x="1414697" y="0"/>
+            <a:ext cx="15458607" cy="10287000"/>
+          </a:xfrm>
+          <a:custGeom>
+            <a:avLst/>
+            <a:gdLst/>
+            <a:ahLst/>
+            <a:cxnLst/>
+            <a:rect r="r" b="b" t="t" l="l"/>
+            <a:pathLst>
+              <a:path h="10287000" w="15458607">
+                <a:moveTo>
+                  <a:pt x="0" y="0"/>
+                </a:moveTo>
+                <a:lnTo>
+                  <a:pt x="15458606" y="0"/>
+                </a:lnTo>
+                <a:lnTo>
+                  <a:pt x="15458606" y="10287000"/>
+                </a:lnTo>
+                <a:lnTo>
+                  <a:pt x="0" y="10287000"/>
+                </a:lnTo>
+                <a:lnTo>
+                  <a:pt x="0" y="0"/>
+                </a:lnTo>
+                <a:close/>
+              </a:path>
+            </a:pathLst>
+          </a:custGeom>
+          <a:blipFill>
+            <a:blip r:embed="rId2"/>
+            <a:stretch>
+              <a:fillRect l="0" t="0" r="0" b="0"/>
+            </a:stretch>
+          </a:blipFill>
+        </p:spPr>
       </p:sp>
     </p:spTree>
   </p:cSld>
@@ -7445,51 +7499,96 @@
           <a:chExt cx="0" cy="0"/>
         </a:xfrm>
       </p:grpSpPr>
-      <p:sp>
-        <p:nvSpPr>
-          <p:cNvPr name="Freeform 2" id="2"/>
-          <p:cNvSpPr/>
-          <p:nvPr/>
-        </p:nvSpPr>
+      <p:pic>
+        <p:nvPicPr>
+          <p:cNvPr name="Picture 2" id="2"/>
+          <p:cNvPicPr>
+            <a:picLocks noChangeAspect="true"/>
+          </p:cNvPicPr>
+          <p:nvPr/>
+        </p:nvPicPr>
+        <p:blipFill>
+          <a:blip r:embed="rId2"/>
+          <a:srcRect l="0" t="0" r="0" b="0"/>
+          <a:stretch>
+            <a:fillRect/>
+          </a:stretch>
+        </p:blipFill>
         <p:spPr>
           <a:xfrm flipH="false" flipV="false" rot="0">
-            <a:off x="2078753" y="0"/>
-            <a:ext cx="14130495" cy="10287000"/>
-          </a:xfrm>
-          <a:custGeom>
-            <a:avLst/>
-            <a:gdLst/>
-            <a:ahLst/>
-            <a:cxnLst/>
-            <a:rect r="r" b="b" t="t" l="l"/>
-            <a:pathLst>
-              <a:path h="10287000" w="14130495">
-                <a:moveTo>
-                  <a:pt x="0" y="0"/>
-                </a:moveTo>
-                <a:lnTo>
-                  <a:pt x="14130494" y="0"/>
-                </a:lnTo>
-                <a:lnTo>
-                  <a:pt x="14130494" y="10287000"/>
-                </a:lnTo>
-                <a:lnTo>
-                  <a:pt x="0" y="10287000"/>
-                </a:lnTo>
-                <a:lnTo>
-                  <a:pt x="0" y="0"/>
-                </a:lnTo>
-                <a:close/>
-              </a:path>
-            </a:pathLst>
-          </a:custGeom>
-          <a:blipFill>
-            <a:blip r:embed="rId2"/>
-            <a:stretch>
-              <a:fillRect l="0" t="0" r="0" b="0"/>
-            </a:stretch>
-          </a:blipFill>
-        </p:spPr>
+            <a:off x="13655377" y="6809666"/>
+            <a:ext cx="6229999" cy="6954669"/>
+          </a:xfrm>
+          <a:prstGeom prst="rect">
+            <a:avLst/>
+          </a:prstGeom>
+        </p:spPr>
+      </p:pic>
+      <p:pic>
+        <p:nvPicPr>
+          <p:cNvPr name="Picture 3" id="3"/>
+          <p:cNvPicPr>
+            <a:picLocks noChangeAspect="true"/>
+          </p:cNvPicPr>
+          <p:nvPr/>
+        </p:nvPicPr>
+        <p:blipFill>
+          <a:blip r:embed="rId3"/>
+          <a:srcRect l="0" t="0" r="0" b="0"/>
+          <a:stretch>
+            <a:fillRect/>
+          </a:stretch>
+        </p:blipFill>
+        <p:spPr>
+          <a:xfrm flipH="false" flipV="false" rot="0">
+            <a:off x="0" y="0"/>
+            <a:ext cx="6925457" cy="4700654"/>
+          </a:xfrm>
+          <a:prstGeom prst="rect">
+            <a:avLst/>
+          </a:prstGeom>
+        </p:spPr>
+      </p:pic>
+      <p:sp>
+        <p:nvSpPr>
+          <p:cNvPr name="TextBox 4" id="4"/>
+          <p:cNvSpPr txBox="true"/>
+          <p:nvPr/>
+        </p:nvSpPr>
+        <p:spPr>
+          <a:xfrm rot="0">
+            <a:off x="2717556" y="4181475"/>
+            <a:ext cx="12852888" cy="1914525"/>
+          </a:xfrm>
+          <a:prstGeom prst="rect">
+            <a:avLst/>
+          </a:prstGeom>
+        </p:spPr>
+        <p:txBody>
+          <a:bodyPr anchor="t" rtlCol="false" tIns="0" lIns="0" bIns="0" rIns="0">
+            <a:spAutoFit/>
+          </a:bodyPr>
+          <a:lstStyle/>
+          <a:p>
+            <a:pPr algn="ctr">
+              <a:lnSpc>
+                <a:spcPts val="15000"/>
+              </a:lnSpc>
+            </a:pPr>
+            <a:r>
+              <a:rPr lang="en-US" sz="12500">
+                <a:solidFill>
+                  <a:srgbClr val="000000"/>
+                </a:solidFill>
+                <a:latin typeface="무궁화 고딕"/>
+                <a:ea typeface="무궁화 고딕"/>
+                <a:cs typeface="무궁화 고딕"/>
+                <a:sym typeface="무궁화 고딕"/>
+              </a:rPr>
+              <a:t>남아프리카 공화국</a:t>
+            </a:r>
+          </a:p>
+        </p:txBody>
       </p:sp>
     </p:spTree>
   </p:cSld>
@@ -7523,96 +7622,51 @@
           <a:chExt cx="0" cy="0"/>
         </a:xfrm>
       </p:grpSpPr>
-      <p:pic>
-        <p:nvPicPr>
-          <p:cNvPr name="Picture 2" id="2"/>
-          <p:cNvPicPr>
-            <a:picLocks noChangeAspect="true"/>
-          </p:cNvPicPr>
-          <p:nvPr/>
-        </p:nvPicPr>
-        <p:blipFill>
-          <a:blip r:embed="rId2"/>
-          <a:srcRect l="0" t="0" r="0" b="0"/>
-          <a:stretch>
-            <a:fillRect/>
-          </a:stretch>
-        </p:blipFill>
+      <p:sp>
+        <p:nvSpPr>
+          <p:cNvPr name="Freeform 2" id="2"/>
+          <p:cNvSpPr/>
+          <p:nvPr/>
+        </p:nvSpPr>
         <p:spPr>
           <a:xfrm flipH="false" flipV="false" rot="0">
-            <a:off x="13655377" y="6809666"/>
-            <a:ext cx="6229999" cy="6954669"/>
-          </a:xfrm>
-          <a:prstGeom prst="rect">
-            <a:avLst/>
-          </a:prstGeom>
-        </p:spPr>
-      </p:pic>
-      <p:pic>
-        <p:nvPicPr>
-          <p:cNvPr name="Picture 3" id="3"/>
-          <p:cNvPicPr>
-            <a:picLocks noChangeAspect="true"/>
-          </p:cNvPicPr>
-          <p:nvPr/>
-        </p:nvPicPr>
-        <p:blipFill>
-          <a:blip r:embed="rId3"/>
-          <a:srcRect l="0" t="0" r="0" b="0"/>
-          <a:stretch>
-            <a:fillRect/>
-          </a:stretch>
-        </p:blipFill>
-        <p:spPr>
-          <a:xfrm flipH="false" flipV="false" rot="0">
-            <a:off x="0" y="0"/>
-            <a:ext cx="6925457" cy="4700654"/>
-          </a:xfrm>
-          <a:prstGeom prst="rect">
-            <a:avLst/>
-          </a:prstGeom>
-        </p:spPr>
-      </p:pic>
-      <p:sp>
-        <p:nvSpPr>
-          <p:cNvPr name="TextBox 4" id="4"/>
-          <p:cNvSpPr txBox="true"/>
-          <p:nvPr/>
-        </p:nvSpPr>
-        <p:spPr>
-          <a:xfrm rot="0">
-            <a:off x="2717556" y="3895725"/>
-            <a:ext cx="12852888" cy="2200275"/>
-          </a:xfrm>
-          <a:prstGeom prst="rect">
-            <a:avLst/>
-          </a:prstGeom>
-        </p:spPr>
-        <p:txBody>
-          <a:bodyPr anchor="t" rtlCol="false" tIns="0" lIns="0" bIns="0" rIns="0">
-            <a:spAutoFit/>
-          </a:bodyPr>
-          <a:lstStyle/>
-          <a:p>
-            <a:pPr algn="ctr">
-              <a:lnSpc>
-                <a:spcPts val="15000"/>
-              </a:lnSpc>
-            </a:pPr>
-            <a:r>
-              <a:rPr lang="en-US" sz="12500">
-                <a:solidFill>
-                  <a:srgbClr val="000000"/>
-                </a:solidFill>
-                <a:latin typeface="Jua"/>
-                <a:ea typeface="Jua"/>
-                <a:cs typeface="Jua"/>
-                <a:sym typeface="Jua"/>
-              </a:rPr>
-              <a:t>노르웨이</a:t>
-            </a:r>
-          </a:p>
-        </p:txBody>
+            <a:off x="2078753" y="0"/>
+            <a:ext cx="14130495" cy="10287000"/>
+          </a:xfrm>
+          <a:custGeom>
+            <a:avLst/>
+            <a:gdLst/>
+            <a:ahLst/>
+            <a:cxnLst/>
+            <a:rect r="r" b="b" t="t" l="l"/>
+            <a:pathLst>
+              <a:path h="10287000" w="14130495">
+                <a:moveTo>
+                  <a:pt x="0" y="0"/>
+                </a:moveTo>
+                <a:lnTo>
+                  <a:pt x="14130494" y="0"/>
+                </a:lnTo>
+                <a:lnTo>
+                  <a:pt x="14130494" y="10287000"/>
+                </a:lnTo>
+                <a:lnTo>
+                  <a:pt x="0" y="10287000"/>
+                </a:lnTo>
+                <a:lnTo>
+                  <a:pt x="0" y="0"/>
+                </a:lnTo>
+                <a:close/>
+              </a:path>
+            </a:pathLst>
+          </a:custGeom>
+          <a:blipFill>
+            <a:blip r:embed="rId2"/>
+            <a:stretch>
+              <a:fillRect l="0" t="0" r="0" b="0"/>
+            </a:stretch>
+          </a:blipFill>
+        </p:spPr>
       </p:sp>
     </p:spTree>
   </p:cSld>
@@ -7646,51 +7700,96 @@
           <a:chExt cx="0" cy="0"/>
         </a:xfrm>
       </p:grpSpPr>
-      <p:sp>
-        <p:nvSpPr>
-          <p:cNvPr name="Freeform 2" id="2"/>
-          <p:cNvSpPr/>
-          <p:nvPr/>
-        </p:nvSpPr>
+      <p:pic>
+        <p:nvPicPr>
+          <p:cNvPr name="Picture 2" id="2"/>
+          <p:cNvPicPr>
+            <a:picLocks noChangeAspect="true"/>
+          </p:cNvPicPr>
+          <p:nvPr/>
+        </p:nvPicPr>
+        <p:blipFill>
+          <a:blip r:embed="rId2"/>
+          <a:srcRect l="0" t="0" r="0" b="0"/>
+          <a:stretch>
+            <a:fillRect/>
+          </a:stretch>
+        </p:blipFill>
         <p:spPr>
           <a:xfrm flipH="false" flipV="false" rot="0">
-            <a:off x="891153" y="0"/>
-            <a:ext cx="16505695" cy="10287000"/>
-          </a:xfrm>
-          <a:custGeom>
-            <a:avLst/>
-            <a:gdLst/>
-            <a:ahLst/>
-            <a:cxnLst/>
-            <a:rect r="r" b="b" t="t" l="l"/>
-            <a:pathLst>
-              <a:path h="10287000" w="16505695">
-                <a:moveTo>
-                  <a:pt x="0" y="0"/>
-                </a:moveTo>
-                <a:lnTo>
-                  <a:pt x="16505694" y="0"/>
-                </a:lnTo>
-                <a:lnTo>
-                  <a:pt x="16505694" y="10287000"/>
-                </a:lnTo>
-                <a:lnTo>
-                  <a:pt x="0" y="10287000"/>
-                </a:lnTo>
-                <a:lnTo>
-                  <a:pt x="0" y="0"/>
-                </a:lnTo>
-                <a:close/>
-              </a:path>
-            </a:pathLst>
-          </a:custGeom>
-          <a:blipFill>
-            <a:blip r:embed="rId2"/>
-            <a:stretch>
-              <a:fillRect l="0" t="0" r="0" b="0"/>
-            </a:stretch>
-          </a:blipFill>
-        </p:spPr>
+            <a:off x="13655377" y="6809666"/>
+            <a:ext cx="6229999" cy="6954669"/>
+          </a:xfrm>
+          <a:prstGeom prst="rect">
+            <a:avLst/>
+          </a:prstGeom>
+        </p:spPr>
+      </p:pic>
+      <p:pic>
+        <p:nvPicPr>
+          <p:cNvPr name="Picture 3" id="3"/>
+          <p:cNvPicPr>
+            <a:picLocks noChangeAspect="true"/>
+          </p:cNvPicPr>
+          <p:nvPr/>
+        </p:nvPicPr>
+        <p:blipFill>
+          <a:blip r:embed="rId3"/>
+          <a:srcRect l="0" t="0" r="0" b="0"/>
+          <a:stretch>
+            <a:fillRect/>
+          </a:stretch>
+        </p:blipFill>
+        <p:spPr>
+          <a:xfrm flipH="false" flipV="false" rot="0">
+            <a:off x="0" y="0"/>
+            <a:ext cx="6925457" cy="4700654"/>
+          </a:xfrm>
+          <a:prstGeom prst="rect">
+            <a:avLst/>
+          </a:prstGeom>
+        </p:spPr>
+      </p:pic>
+      <p:sp>
+        <p:nvSpPr>
+          <p:cNvPr name="TextBox 4" id="4"/>
+          <p:cNvSpPr txBox="true"/>
+          <p:nvPr/>
+        </p:nvSpPr>
+        <p:spPr>
+          <a:xfrm rot="0">
+            <a:off x="2717556" y="4181475"/>
+            <a:ext cx="12852888" cy="1914525"/>
+          </a:xfrm>
+          <a:prstGeom prst="rect">
+            <a:avLst/>
+          </a:prstGeom>
+        </p:spPr>
+        <p:txBody>
+          <a:bodyPr anchor="t" rtlCol="false" tIns="0" lIns="0" bIns="0" rIns="0">
+            <a:spAutoFit/>
+          </a:bodyPr>
+          <a:lstStyle/>
+          <a:p>
+            <a:pPr algn="ctr">
+              <a:lnSpc>
+                <a:spcPts val="15000"/>
+              </a:lnSpc>
+            </a:pPr>
+            <a:r>
+              <a:rPr lang="en-US" sz="12500">
+                <a:solidFill>
+                  <a:srgbClr val="000000"/>
+                </a:solidFill>
+                <a:latin typeface="무궁화 고딕"/>
+                <a:ea typeface="무궁화 고딕"/>
+                <a:cs typeface="무궁화 고딕"/>
+                <a:sym typeface="무궁화 고딕"/>
+              </a:rPr>
+              <a:t>노르웨이</a:t>
+            </a:r>
+          </a:p>
+        </p:txBody>
       </p:sp>
     </p:spTree>
   </p:cSld>
@@ -7724,96 +7823,51 @@
           <a:chExt cx="0" cy="0"/>
         </a:xfrm>
       </p:grpSpPr>
-      <p:pic>
-        <p:nvPicPr>
-          <p:cNvPr name="Picture 2" id="2"/>
-          <p:cNvPicPr>
-            <a:picLocks noChangeAspect="true"/>
-          </p:cNvPicPr>
-          <p:nvPr/>
-        </p:nvPicPr>
-        <p:blipFill>
-          <a:blip r:embed="rId2"/>
-          <a:srcRect l="0" t="0" r="0" b="0"/>
-          <a:stretch>
-            <a:fillRect/>
-          </a:stretch>
-        </p:blipFill>
+      <p:sp>
+        <p:nvSpPr>
+          <p:cNvPr name="Freeform 2" id="2"/>
+          <p:cNvSpPr/>
+          <p:nvPr/>
+        </p:nvSpPr>
         <p:spPr>
           <a:xfrm flipH="false" flipV="false" rot="0">
-            <a:off x="13655377" y="6809666"/>
-            <a:ext cx="6229999" cy="6954669"/>
-          </a:xfrm>
-          <a:prstGeom prst="rect">
-            <a:avLst/>
-          </a:prstGeom>
-        </p:spPr>
-      </p:pic>
-      <p:pic>
-        <p:nvPicPr>
-          <p:cNvPr name="Picture 3" id="3"/>
-          <p:cNvPicPr>
-            <a:picLocks noChangeAspect="true"/>
-          </p:cNvPicPr>
-          <p:nvPr/>
-        </p:nvPicPr>
-        <p:blipFill>
-          <a:blip r:embed="rId3"/>
-          <a:srcRect l="0" t="0" r="0" b="0"/>
-          <a:stretch>
-            <a:fillRect/>
-          </a:stretch>
-        </p:blipFill>
-        <p:spPr>
-          <a:xfrm flipH="false" flipV="false" rot="0">
-            <a:off x="0" y="0"/>
-            <a:ext cx="6925457" cy="4700654"/>
-          </a:xfrm>
-          <a:prstGeom prst="rect">
-            <a:avLst/>
-          </a:prstGeom>
-        </p:spPr>
-      </p:pic>
-      <p:sp>
-        <p:nvSpPr>
-          <p:cNvPr name="TextBox 4" id="4"/>
-          <p:cNvSpPr txBox="true"/>
-          <p:nvPr/>
-        </p:nvSpPr>
-        <p:spPr>
-          <a:xfrm rot="0">
-            <a:off x="2717556" y="3895725"/>
-            <a:ext cx="12852888" cy="2200275"/>
-          </a:xfrm>
-          <a:prstGeom prst="rect">
-            <a:avLst/>
-          </a:prstGeom>
-        </p:spPr>
-        <p:txBody>
-          <a:bodyPr anchor="t" rtlCol="false" tIns="0" lIns="0" bIns="0" rIns="0">
-            <a:spAutoFit/>
-          </a:bodyPr>
-          <a:lstStyle/>
-          <a:p>
-            <a:pPr algn="ctr">
-              <a:lnSpc>
-                <a:spcPts val="15000"/>
-              </a:lnSpc>
-            </a:pPr>
-            <a:r>
-              <a:rPr lang="en-US" sz="12500">
-                <a:solidFill>
-                  <a:srgbClr val="000000"/>
-                </a:solidFill>
-                <a:latin typeface="Jua"/>
-                <a:ea typeface="Jua"/>
-                <a:cs typeface="Jua"/>
-                <a:sym typeface="Jua"/>
-              </a:rPr>
-              <a:t>아르헨티나</a:t>
-            </a:r>
-          </a:p>
-        </p:txBody>
+            <a:off x="891153" y="0"/>
+            <a:ext cx="16505695" cy="10287000"/>
+          </a:xfrm>
+          <a:custGeom>
+            <a:avLst/>
+            <a:gdLst/>
+            <a:ahLst/>
+            <a:cxnLst/>
+            <a:rect r="r" b="b" t="t" l="l"/>
+            <a:pathLst>
+              <a:path h="10287000" w="16505695">
+                <a:moveTo>
+                  <a:pt x="0" y="0"/>
+                </a:moveTo>
+                <a:lnTo>
+                  <a:pt x="16505694" y="0"/>
+                </a:lnTo>
+                <a:lnTo>
+                  <a:pt x="16505694" y="10287000"/>
+                </a:lnTo>
+                <a:lnTo>
+                  <a:pt x="0" y="10287000"/>
+                </a:lnTo>
+                <a:lnTo>
+                  <a:pt x="0" y="0"/>
+                </a:lnTo>
+                <a:close/>
+              </a:path>
+            </a:pathLst>
+          </a:custGeom>
+          <a:blipFill>
+            <a:blip r:embed="rId2"/>
+            <a:stretch>
+              <a:fillRect l="0" t="0" r="0" b="0"/>
+            </a:stretch>
+          </a:blipFill>
+        </p:spPr>
       </p:sp>
     </p:spTree>
   </p:cSld>
@@ -7847,51 +7901,96 @@
           <a:chExt cx="0" cy="0"/>
         </a:xfrm>
       </p:grpSpPr>
-      <p:sp>
-        <p:nvSpPr>
-          <p:cNvPr name="Freeform 2" id="2"/>
-          <p:cNvSpPr/>
-          <p:nvPr/>
-        </p:nvSpPr>
+      <p:pic>
+        <p:nvPicPr>
+          <p:cNvPr name="Picture 2" id="2"/>
+          <p:cNvPicPr>
+            <a:picLocks noChangeAspect="true"/>
+          </p:cNvPicPr>
+          <p:nvPr/>
+        </p:nvPicPr>
+        <p:blipFill>
+          <a:blip r:embed="rId2"/>
+          <a:srcRect l="0" t="0" r="0" b="0"/>
+          <a:stretch>
+            <a:fillRect/>
+          </a:stretch>
+        </p:blipFill>
         <p:spPr>
           <a:xfrm flipH="false" flipV="false" rot="0">
-            <a:off x="1414697" y="0"/>
-            <a:ext cx="15458607" cy="10287000"/>
-          </a:xfrm>
-          <a:custGeom>
-            <a:avLst/>
-            <a:gdLst/>
-            <a:ahLst/>
-            <a:cxnLst/>
-            <a:rect r="r" b="b" t="t" l="l"/>
-            <a:pathLst>
-              <a:path h="10287000" w="15458607">
-                <a:moveTo>
-                  <a:pt x="0" y="0"/>
-                </a:moveTo>
-                <a:lnTo>
-                  <a:pt x="15458606" y="0"/>
-                </a:lnTo>
-                <a:lnTo>
-                  <a:pt x="15458606" y="10287000"/>
-                </a:lnTo>
-                <a:lnTo>
-                  <a:pt x="0" y="10287000"/>
-                </a:lnTo>
-                <a:lnTo>
-                  <a:pt x="0" y="0"/>
-                </a:lnTo>
-                <a:close/>
-              </a:path>
-            </a:pathLst>
-          </a:custGeom>
-          <a:blipFill>
-            <a:blip r:embed="rId2"/>
-            <a:stretch>
-              <a:fillRect l="0" t="0" r="0" b="0"/>
-            </a:stretch>
-          </a:blipFill>
-        </p:spPr>
+            <a:off x="13655377" y="6809666"/>
+            <a:ext cx="6229999" cy="6954669"/>
+          </a:xfrm>
+          <a:prstGeom prst="rect">
+            <a:avLst/>
+          </a:prstGeom>
+        </p:spPr>
+      </p:pic>
+      <p:pic>
+        <p:nvPicPr>
+          <p:cNvPr name="Picture 3" id="3"/>
+          <p:cNvPicPr>
+            <a:picLocks noChangeAspect="true"/>
+          </p:cNvPicPr>
+          <p:nvPr/>
+        </p:nvPicPr>
+        <p:blipFill>
+          <a:blip r:embed="rId3"/>
+          <a:srcRect l="0" t="0" r="0" b="0"/>
+          <a:stretch>
+            <a:fillRect/>
+          </a:stretch>
+        </p:blipFill>
+        <p:spPr>
+          <a:xfrm flipH="false" flipV="false" rot="0">
+            <a:off x="0" y="0"/>
+            <a:ext cx="6925457" cy="4700654"/>
+          </a:xfrm>
+          <a:prstGeom prst="rect">
+            <a:avLst/>
+          </a:prstGeom>
+        </p:spPr>
+      </p:pic>
+      <p:sp>
+        <p:nvSpPr>
+          <p:cNvPr name="TextBox 4" id="4"/>
+          <p:cNvSpPr txBox="true"/>
+          <p:nvPr/>
+        </p:nvSpPr>
+        <p:spPr>
+          <a:xfrm rot="0">
+            <a:off x="2717556" y="4181475"/>
+            <a:ext cx="12852888" cy="1914525"/>
+          </a:xfrm>
+          <a:prstGeom prst="rect">
+            <a:avLst/>
+          </a:prstGeom>
+        </p:spPr>
+        <p:txBody>
+          <a:bodyPr anchor="t" rtlCol="false" tIns="0" lIns="0" bIns="0" rIns="0">
+            <a:spAutoFit/>
+          </a:bodyPr>
+          <a:lstStyle/>
+          <a:p>
+            <a:pPr algn="ctr">
+              <a:lnSpc>
+                <a:spcPts val="15000"/>
+              </a:lnSpc>
+            </a:pPr>
+            <a:r>
+              <a:rPr lang="en-US" sz="12500">
+                <a:solidFill>
+                  <a:srgbClr val="000000"/>
+                </a:solidFill>
+                <a:latin typeface="무궁화 고딕"/>
+                <a:ea typeface="무궁화 고딕"/>
+                <a:cs typeface="무궁화 고딕"/>
+                <a:sym typeface="무궁화 고딕"/>
+              </a:rPr>
+              <a:t>아르헨티나</a:t>
+            </a:r>
+          </a:p>
+        </p:txBody>
       </p:sp>
     </p:spTree>
   </p:cSld>
@@ -7925,96 +8024,51 @@
           <a:chExt cx="0" cy="0"/>
         </a:xfrm>
       </p:grpSpPr>
-      <p:pic>
-        <p:nvPicPr>
-          <p:cNvPr name="Picture 2" id="2"/>
-          <p:cNvPicPr>
-            <a:picLocks noChangeAspect="true"/>
-          </p:cNvPicPr>
-          <p:nvPr/>
-        </p:nvPicPr>
-        <p:blipFill>
-          <a:blip r:embed="rId2"/>
-          <a:srcRect l="0" t="0" r="0" b="0"/>
-          <a:stretch>
-            <a:fillRect/>
-          </a:stretch>
-        </p:blipFill>
+      <p:sp>
+        <p:nvSpPr>
+          <p:cNvPr name="Freeform 2" id="2"/>
+          <p:cNvSpPr/>
+          <p:nvPr/>
+        </p:nvSpPr>
         <p:spPr>
           <a:xfrm flipH="false" flipV="false" rot="0">
-            <a:off x="13655377" y="6809666"/>
-            <a:ext cx="6229999" cy="6954669"/>
-          </a:xfrm>
-          <a:prstGeom prst="rect">
-            <a:avLst/>
-          </a:prstGeom>
-        </p:spPr>
-      </p:pic>
-      <p:pic>
-        <p:nvPicPr>
-          <p:cNvPr name="Picture 3" id="3"/>
-          <p:cNvPicPr>
-            <a:picLocks noChangeAspect="true"/>
-          </p:cNvPicPr>
-          <p:nvPr/>
-        </p:nvPicPr>
-        <p:blipFill>
-          <a:blip r:embed="rId3"/>
-          <a:srcRect l="0" t="0" r="0" b="0"/>
-          <a:stretch>
-            <a:fillRect/>
-          </a:stretch>
-        </p:blipFill>
-        <p:spPr>
-          <a:xfrm flipH="false" flipV="false" rot="0">
-            <a:off x="0" y="0"/>
-            <a:ext cx="6925457" cy="4700654"/>
-          </a:xfrm>
-          <a:prstGeom prst="rect">
-            <a:avLst/>
-          </a:prstGeom>
-        </p:spPr>
-      </p:pic>
-      <p:sp>
-        <p:nvSpPr>
-          <p:cNvPr name="TextBox 4" id="4"/>
-          <p:cNvSpPr txBox="true"/>
-          <p:nvPr/>
-        </p:nvSpPr>
-        <p:spPr>
-          <a:xfrm rot="0">
-            <a:off x="2717556" y="3895725"/>
-            <a:ext cx="12852888" cy="2200275"/>
-          </a:xfrm>
-          <a:prstGeom prst="rect">
-            <a:avLst/>
-          </a:prstGeom>
-        </p:spPr>
-        <p:txBody>
-          <a:bodyPr anchor="t" rtlCol="false" tIns="0" lIns="0" bIns="0" rIns="0">
-            <a:spAutoFit/>
-          </a:bodyPr>
-          <a:lstStyle/>
-          <a:p>
-            <a:pPr algn="ctr">
-              <a:lnSpc>
-                <a:spcPts val="15000"/>
-              </a:lnSpc>
-            </a:pPr>
-            <a:r>
-              <a:rPr lang="en-US" sz="12500">
-                <a:solidFill>
-                  <a:srgbClr val="000000"/>
-                </a:solidFill>
-                <a:latin typeface="Jua"/>
-                <a:ea typeface="Jua"/>
-                <a:cs typeface="Jua"/>
-                <a:sym typeface="Jua"/>
-              </a:rPr>
-              <a:t>이집트</a:t>
-            </a:r>
-          </a:p>
-        </p:txBody>
+            <a:off x="1414697" y="0"/>
+            <a:ext cx="15458607" cy="10287000"/>
+          </a:xfrm>
+          <a:custGeom>
+            <a:avLst/>
+            <a:gdLst/>
+            <a:ahLst/>
+            <a:cxnLst/>
+            <a:rect r="r" b="b" t="t" l="l"/>
+            <a:pathLst>
+              <a:path h="10287000" w="15458607">
+                <a:moveTo>
+                  <a:pt x="0" y="0"/>
+                </a:moveTo>
+                <a:lnTo>
+                  <a:pt x="15458606" y="0"/>
+                </a:lnTo>
+                <a:lnTo>
+                  <a:pt x="15458606" y="10287000"/>
+                </a:lnTo>
+                <a:lnTo>
+                  <a:pt x="0" y="10287000"/>
+                </a:lnTo>
+                <a:lnTo>
+                  <a:pt x="0" y="0"/>
+                </a:lnTo>
+                <a:close/>
+              </a:path>
+            </a:pathLst>
+          </a:custGeom>
+          <a:blipFill>
+            <a:blip r:embed="rId2"/>
+            <a:stretch>
+              <a:fillRect l="0" t="0" r="0" b="0"/>
+            </a:stretch>
+          </a:blipFill>
+        </p:spPr>
       </p:sp>
     </p:spTree>
   </p:cSld>
@@ -8048,96 +8102,51 @@
           <a:chExt cx="0" cy="0"/>
         </a:xfrm>
       </p:grpSpPr>
-      <p:pic>
-        <p:nvPicPr>
-          <p:cNvPr name="Picture 2" id="2"/>
-          <p:cNvPicPr>
-            <a:picLocks noChangeAspect="true"/>
-          </p:cNvPicPr>
-          <p:nvPr/>
-        </p:nvPicPr>
-        <p:blipFill>
-          <a:blip r:embed="rId2"/>
-          <a:srcRect l="0" t="0" r="0" b="0"/>
-          <a:stretch>
-            <a:fillRect/>
-          </a:stretch>
-        </p:blipFill>
+      <p:sp>
+        <p:nvSpPr>
+          <p:cNvPr name="Freeform 2" id="2"/>
+          <p:cNvSpPr/>
+          <p:nvPr/>
+        </p:nvSpPr>
         <p:spPr>
           <a:xfrm flipH="false" flipV="false" rot="0">
-            <a:off x="13655377" y="6809666"/>
-            <a:ext cx="6229999" cy="6954669"/>
-          </a:xfrm>
-          <a:prstGeom prst="rect">
-            <a:avLst/>
-          </a:prstGeom>
-        </p:spPr>
-      </p:pic>
-      <p:pic>
-        <p:nvPicPr>
-          <p:cNvPr name="Picture 3" id="3"/>
-          <p:cNvPicPr>
-            <a:picLocks noChangeAspect="true"/>
-          </p:cNvPicPr>
-          <p:nvPr/>
-        </p:nvPicPr>
-        <p:blipFill>
-          <a:blip r:embed="rId3"/>
-          <a:srcRect l="0" t="0" r="0" b="0"/>
-          <a:stretch>
-            <a:fillRect/>
-          </a:stretch>
-        </p:blipFill>
-        <p:spPr>
-          <a:xfrm flipH="false" flipV="false" rot="0">
-            <a:off x="0" y="0"/>
-            <a:ext cx="6925457" cy="4700654"/>
-          </a:xfrm>
-          <a:prstGeom prst="rect">
-            <a:avLst/>
-          </a:prstGeom>
-        </p:spPr>
-      </p:pic>
-      <p:sp>
-        <p:nvSpPr>
-          <p:cNvPr name="TextBox 4" id="4"/>
-          <p:cNvSpPr txBox="true"/>
-          <p:nvPr/>
-        </p:nvSpPr>
-        <p:spPr>
-          <a:xfrm rot="0">
-            <a:off x="2717556" y="3895725"/>
-            <a:ext cx="12852888" cy="2200275"/>
-          </a:xfrm>
-          <a:prstGeom prst="rect">
-            <a:avLst/>
-          </a:prstGeom>
-        </p:spPr>
-        <p:txBody>
-          <a:bodyPr anchor="t" rtlCol="false" tIns="0" lIns="0" bIns="0" rIns="0">
-            <a:spAutoFit/>
-          </a:bodyPr>
-          <a:lstStyle/>
-          <a:p>
-            <a:pPr algn="ctr">
-              <a:lnSpc>
-                <a:spcPts val="15000"/>
-              </a:lnSpc>
-            </a:pPr>
-            <a:r>
-              <a:rPr lang="en-US" sz="12500">
-                <a:solidFill>
-                  <a:srgbClr val="000000"/>
-                </a:solidFill>
-                <a:latin typeface="Jua"/>
-                <a:ea typeface="Jua"/>
-                <a:cs typeface="Jua"/>
-                <a:sym typeface="Jua"/>
-              </a:rPr>
-              <a:t>대한민국</a:t>
-            </a:r>
-          </a:p>
-        </p:txBody>
+            <a:off x="1423925" y="0"/>
+            <a:ext cx="15440150" cy="10287000"/>
+          </a:xfrm>
+          <a:custGeom>
+            <a:avLst/>
+            <a:gdLst/>
+            <a:ahLst/>
+            <a:cxnLst/>
+            <a:rect r="r" b="b" t="t" l="l"/>
+            <a:pathLst>
+              <a:path h="10287000" w="15440150">
+                <a:moveTo>
+                  <a:pt x="0" y="0"/>
+                </a:moveTo>
+                <a:lnTo>
+                  <a:pt x="15440150" y="0"/>
+                </a:lnTo>
+                <a:lnTo>
+                  <a:pt x="15440150" y="10287000"/>
+                </a:lnTo>
+                <a:lnTo>
+                  <a:pt x="0" y="10287000"/>
+                </a:lnTo>
+                <a:lnTo>
+                  <a:pt x="0" y="0"/>
+                </a:lnTo>
+                <a:close/>
+              </a:path>
+            </a:pathLst>
+          </a:custGeom>
+          <a:blipFill>
+            <a:blip r:embed="rId2"/>
+            <a:stretch>
+              <a:fillRect l="0" t="0" r="0" b="0"/>
+            </a:stretch>
+          </a:blipFill>
+        </p:spPr>
       </p:sp>
     </p:spTree>
   </p:cSld>
@@ -8171,51 +8180,96 @@
           <a:chExt cx="0" cy="0"/>
         </a:xfrm>
       </p:grpSpPr>
-      <p:sp>
-        <p:nvSpPr>
-          <p:cNvPr name="Freeform 2" id="2"/>
-          <p:cNvSpPr/>
-          <p:nvPr/>
-        </p:nvSpPr>
+      <p:pic>
+        <p:nvPicPr>
+          <p:cNvPr name="Picture 2" id="2"/>
+          <p:cNvPicPr>
+            <a:picLocks noChangeAspect="true"/>
+          </p:cNvPicPr>
+          <p:nvPr/>
+        </p:nvPicPr>
+        <p:blipFill>
+          <a:blip r:embed="rId2"/>
+          <a:srcRect l="0" t="0" r="0" b="0"/>
+          <a:stretch>
+            <a:fillRect/>
+          </a:stretch>
+        </p:blipFill>
         <p:spPr>
           <a:xfrm flipH="false" flipV="false" rot="0">
-            <a:off x="1414697" y="0"/>
-            <a:ext cx="15458607" cy="10287000"/>
-          </a:xfrm>
-          <a:custGeom>
-            <a:avLst/>
-            <a:gdLst/>
-            <a:ahLst/>
-            <a:cxnLst/>
-            <a:rect r="r" b="b" t="t" l="l"/>
-            <a:pathLst>
-              <a:path h="10287000" w="15458607">
-                <a:moveTo>
-                  <a:pt x="0" y="0"/>
-                </a:moveTo>
-                <a:lnTo>
-                  <a:pt x="15458606" y="0"/>
-                </a:lnTo>
-                <a:lnTo>
-                  <a:pt x="15458606" y="10287000"/>
-                </a:lnTo>
-                <a:lnTo>
-                  <a:pt x="0" y="10287000"/>
-                </a:lnTo>
-                <a:lnTo>
-                  <a:pt x="0" y="0"/>
-                </a:lnTo>
-                <a:close/>
-              </a:path>
-            </a:pathLst>
-          </a:custGeom>
-          <a:blipFill>
-            <a:blip r:embed="rId2"/>
-            <a:stretch>
-              <a:fillRect l="0" t="0" r="0" b="0"/>
-            </a:stretch>
-          </a:blipFill>
-        </p:spPr>
+            <a:off x="13655377" y="6809666"/>
+            <a:ext cx="6229999" cy="6954669"/>
+          </a:xfrm>
+          <a:prstGeom prst="rect">
+            <a:avLst/>
+          </a:prstGeom>
+        </p:spPr>
+      </p:pic>
+      <p:pic>
+        <p:nvPicPr>
+          <p:cNvPr name="Picture 3" id="3"/>
+          <p:cNvPicPr>
+            <a:picLocks noChangeAspect="true"/>
+          </p:cNvPicPr>
+          <p:nvPr/>
+        </p:nvPicPr>
+        <p:blipFill>
+          <a:blip r:embed="rId3"/>
+          <a:srcRect l="0" t="0" r="0" b="0"/>
+          <a:stretch>
+            <a:fillRect/>
+          </a:stretch>
+        </p:blipFill>
+        <p:spPr>
+          <a:xfrm flipH="false" flipV="false" rot="0">
+            <a:off x="0" y="0"/>
+            <a:ext cx="6925457" cy="4700654"/>
+          </a:xfrm>
+          <a:prstGeom prst="rect">
+            <a:avLst/>
+          </a:prstGeom>
+        </p:spPr>
+      </p:pic>
+      <p:sp>
+        <p:nvSpPr>
+          <p:cNvPr name="TextBox 4" id="4"/>
+          <p:cNvSpPr txBox="true"/>
+          <p:nvPr/>
+        </p:nvSpPr>
+        <p:spPr>
+          <a:xfrm rot="0">
+            <a:off x="2717556" y="4181475"/>
+            <a:ext cx="12852888" cy="1914525"/>
+          </a:xfrm>
+          <a:prstGeom prst="rect">
+            <a:avLst/>
+          </a:prstGeom>
+        </p:spPr>
+        <p:txBody>
+          <a:bodyPr anchor="t" rtlCol="false" tIns="0" lIns="0" bIns="0" rIns="0">
+            <a:spAutoFit/>
+          </a:bodyPr>
+          <a:lstStyle/>
+          <a:p>
+            <a:pPr algn="ctr">
+              <a:lnSpc>
+                <a:spcPts val="15000"/>
+              </a:lnSpc>
+            </a:pPr>
+            <a:r>
+              <a:rPr lang="en-US" sz="12500">
+                <a:solidFill>
+                  <a:srgbClr val="000000"/>
+                </a:solidFill>
+                <a:latin typeface="무궁화 고딕"/>
+                <a:ea typeface="무궁화 고딕"/>
+                <a:cs typeface="무궁화 고딕"/>
+                <a:sym typeface="무궁화 고딕"/>
+              </a:rPr>
+              <a:t>이집트</a:t>
+            </a:r>
+          </a:p>
+        </p:txBody>
       </p:sp>
     </p:spTree>
   </p:cSld>
@@ -8249,96 +8303,51 @@
           <a:chExt cx="0" cy="0"/>
         </a:xfrm>
       </p:grpSpPr>
-      <p:pic>
-        <p:nvPicPr>
-          <p:cNvPr name="Picture 2" id="2"/>
-          <p:cNvPicPr>
-            <a:picLocks noChangeAspect="true"/>
-          </p:cNvPicPr>
-          <p:nvPr/>
-        </p:nvPicPr>
-        <p:blipFill>
-          <a:blip r:embed="rId2"/>
-          <a:srcRect l="0" t="0" r="0" b="0"/>
-          <a:stretch>
-            <a:fillRect/>
-          </a:stretch>
-        </p:blipFill>
+      <p:sp>
+        <p:nvSpPr>
+          <p:cNvPr name="Freeform 2" id="2"/>
+          <p:cNvSpPr/>
+          <p:nvPr/>
+        </p:nvSpPr>
         <p:spPr>
           <a:xfrm flipH="false" flipV="false" rot="0">
-            <a:off x="13655377" y="6809666"/>
-            <a:ext cx="6229999" cy="6954669"/>
-          </a:xfrm>
-          <a:prstGeom prst="rect">
-            <a:avLst/>
-          </a:prstGeom>
-        </p:spPr>
-      </p:pic>
-      <p:pic>
-        <p:nvPicPr>
-          <p:cNvPr name="Picture 3" id="3"/>
-          <p:cNvPicPr>
-            <a:picLocks noChangeAspect="true"/>
-          </p:cNvPicPr>
-          <p:nvPr/>
-        </p:nvPicPr>
-        <p:blipFill>
-          <a:blip r:embed="rId3"/>
-          <a:srcRect l="0" t="0" r="0" b="0"/>
-          <a:stretch>
-            <a:fillRect/>
-          </a:stretch>
-        </p:blipFill>
-        <p:spPr>
-          <a:xfrm flipH="false" flipV="false" rot="0">
-            <a:off x="0" y="0"/>
-            <a:ext cx="6925457" cy="4700654"/>
-          </a:xfrm>
-          <a:prstGeom prst="rect">
-            <a:avLst/>
-          </a:prstGeom>
-        </p:spPr>
-      </p:pic>
-      <p:sp>
-        <p:nvSpPr>
-          <p:cNvPr name="TextBox 4" id="4"/>
-          <p:cNvSpPr txBox="true"/>
-          <p:nvPr/>
-        </p:nvSpPr>
-        <p:spPr>
-          <a:xfrm rot="0">
-            <a:off x="2717556" y="3895725"/>
-            <a:ext cx="12852888" cy="2200275"/>
-          </a:xfrm>
-          <a:prstGeom prst="rect">
-            <a:avLst/>
-          </a:prstGeom>
-        </p:spPr>
-        <p:txBody>
-          <a:bodyPr anchor="t" rtlCol="false" tIns="0" lIns="0" bIns="0" rIns="0">
-            <a:spAutoFit/>
-          </a:bodyPr>
-          <a:lstStyle/>
-          <a:p>
-            <a:pPr algn="ctr">
-              <a:lnSpc>
-                <a:spcPts val="15000"/>
-              </a:lnSpc>
-            </a:pPr>
-            <a:r>
-              <a:rPr lang="en-US" sz="12500">
-                <a:solidFill>
-                  <a:srgbClr val="000000"/>
-                </a:solidFill>
-                <a:latin typeface="Jua"/>
-                <a:ea typeface="Jua"/>
-                <a:cs typeface="Jua"/>
-                <a:sym typeface="Jua"/>
-              </a:rPr>
-              <a:t>그리스</a:t>
-            </a:r>
-          </a:p>
-        </p:txBody>
+            <a:off x="1414697" y="0"/>
+            <a:ext cx="15458607" cy="10287000"/>
+          </a:xfrm>
+          <a:custGeom>
+            <a:avLst/>
+            <a:gdLst/>
+            <a:ahLst/>
+            <a:cxnLst/>
+            <a:rect r="r" b="b" t="t" l="l"/>
+            <a:pathLst>
+              <a:path h="10287000" w="15458607">
+                <a:moveTo>
+                  <a:pt x="0" y="0"/>
+                </a:moveTo>
+                <a:lnTo>
+                  <a:pt x="15458606" y="0"/>
+                </a:lnTo>
+                <a:lnTo>
+                  <a:pt x="15458606" y="10287000"/>
+                </a:lnTo>
+                <a:lnTo>
+                  <a:pt x="0" y="10287000"/>
+                </a:lnTo>
+                <a:lnTo>
+                  <a:pt x="0" y="0"/>
+                </a:lnTo>
+                <a:close/>
+              </a:path>
+            </a:pathLst>
+          </a:custGeom>
+          <a:blipFill>
+            <a:blip r:embed="rId2"/>
+            <a:stretch>
+              <a:fillRect l="0" t="0" r="0" b="0"/>
+            </a:stretch>
+          </a:blipFill>
+        </p:spPr>
       </p:sp>
     </p:spTree>
   </p:cSld>
@@ -8372,51 +8381,96 @@
           <a:chExt cx="0" cy="0"/>
         </a:xfrm>
       </p:grpSpPr>
-      <p:sp>
-        <p:nvSpPr>
-          <p:cNvPr name="Freeform 2" id="2"/>
-          <p:cNvSpPr/>
-          <p:nvPr/>
-        </p:nvSpPr>
+      <p:pic>
+        <p:nvPicPr>
+          <p:cNvPr name="Picture 2" id="2"/>
+          <p:cNvPicPr>
+            <a:picLocks noChangeAspect="true"/>
+          </p:cNvPicPr>
+          <p:nvPr/>
+        </p:nvPicPr>
+        <p:blipFill>
+          <a:blip r:embed="rId2"/>
+          <a:srcRect l="0" t="0" r="0" b="0"/>
+          <a:stretch>
+            <a:fillRect/>
+          </a:stretch>
+        </p:blipFill>
         <p:spPr>
           <a:xfrm flipH="false" flipV="false" rot="0">
-            <a:off x="891153" y="0"/>
-            <a:ext cx="16505695" cy="10287000"/>
-          </a:xfrm>
-          <a:custGeom>
-            <a:avLst/>
-            <a:gdLst/>
-            <a:ahLst/>
-            <a:cxnLst/>
-            <a:rect r="r" b="b" t="t" l="l"/>
-            <a:pathLst>
-              <a:path h="10287000" w="16505695">
-                <a:moveTo>
-                  <a:pt x="0" y="0"/>
-                </a:moveTo>
-                <a:lnTo>
-                  <a:pt x="16505694" y="0"/>
-                </a:lnTo>
-                <a:lnTo>
-                  <a:pt x="16505694" y="10287000"/>
-                </a:lnTo>
-                <a:lnTo>
-                  <a:pt x="0" y="10287000"/>
-                </a:lnTo>
-                <a:lnTo>
-                  <a:pt x="0" y="0"/>
-                </a:lnTo>
-                <a:close/>
-              </a:path>
-            </a:pathLst>
-          </a:custGeom>
-          <a:blipFill>
-            <a:blip r:embed="rId2"/>
-            <a:stretch>
-              <a:fillRect l="0" t="0" r="0" b="0"/>
-            </a:stretch>
-          </a:blipFill>
-        </p:spPr>
+            <a:off x="13655377" y="6809666"/>
+            <a:ext cx="6229999" cy="6954669"/>
+          </a:xfrm>
+          <a:prstGeom prst="rect">
+            <a:avLst/>
+          </a:prstGeom>
+        </p:spPr>
+      </p:pic>
+      <p:pic>
+        <p:nvPicPr>
+          <p:cNvPr name="Picture 3" id="3"/>
+          <p:cNvPicPr>
+            <a:picLocks noChangeAspect="true"/>
+          </p:cNvPicPr>
+          <p:nvPr/>
+        </p:nvPicPr>
+        <p:blipFill>
+          <a:blip r:embed="rId3"/>
+          <a:srcRect l="0" t="0" r="0" b="0"/>
+          <a:stretch>
+            <a:fillRect/>
+          </a:stretch>
+        </p:blipFill>
+        <p:spPr>
+          <a:xfrm flipH="false" flipV="false" rot="0">
+            <a:off x="0" y="0"/>
+            <a:ext cx="6925457" cy="4700654"/>
+          </a:xfrm>
+          <a:prstGeom prst="rect">
+            <a:avLst/>
+          </a:prstGeom>
+        </p:spPr>
+      </p:pic>
+      <p:sp>
+        <p:nvSpPr>
+          <p:cNvPr name="TextBox 4" id="4"/>
+          <p:cNvSpPr txBox="true"/>
+          <p:nvPr/>
+        </p:nvSpPr>
+        <p:spPr>
+          <a:xfrm rot="0">
+            <a:off x="2717556" y="4181475"/>
+            <a:ext cx="12852888" cy="1914525"/>
+          </a:xfrm>
+          <a:prstGeom prst="rect">
+            <a:avLst/>
+          </a:prstGeom>
+        </p:spPr>
+        <p:txBody>
+          <a:bodyPr anchor="t" rtlCol="false" tIns="0" lIns="0" bIns="0" rIns="0">
+            <a:spAutoFit/>
+          </a:bodyPr>
+          <a:lstStyle/>
+          <a:p>
+            <a:pPr algn="ctr">
+              <a:lnSpc>
+                <a:spcPts val="15000"/>
+              </a:lnSpc>
+            </a:pPr>
+            <a:r>
+              <a:rPr lang="en-US" sz="12500">
+                <a:solidFill>
+                  <a:srgbClr val="000000"/>
+                </a:solidFill>
+                <a:latin typeface="무궁화 고딕"/>
+                <a:ea typeface="무궁화 고딕"/>
+                <a:cs typeface="무궁화 고딕"/>
+                <a:sym typeface="무궁화 고딕"/>
+              </a:rPr>
+              <a:t>그리스</a:t>
+            </a:r>
+          </a:p>
+        </p:txBody>
       </p:sp>
     </p:spTree>
   </p:cSld>
@@ -8450,96 +8504,51 @@
           <a:chExt cx="0" cy="0"/>
         </a:xfrm>
       </p:grpSpPr>
-      <p:pic>
-        <p:nvPicPr>
-          <p:cNvPr name="Picture 2" id="2"/>
-          <p:cNvPicPr>
-            <a:picLocks noChangeAspect="true"/>
-          </p:cNvPicPr>
-          <p:nvPr/>
-        </p:nvPicPr>
-        <p:blipFill>
-          <a:blip r:embed="rId2"/>
-          <a:srcRect l="0" t="0" r="0" b="0"/>
-          <a:stretch>
-            <a:fillRect/>
-          </a:stretch>
-        </p:blipFill>
+      <p:sp>
+        <p:nvSpPr>
+          <p:cNvPr name="Freeform 2" id="2"/>
+          <p:cNvSpPr/>
+          <p:nvPr/>
+        </p:nvSpPr>
         <p:spPr>
           <a:xfrm flipH="false" flipV="false" rot="0">
-            <a:off x="13655377" y="6809666"/>
-            <a:ext cx="6229999" cy="6954669"/>
-          </a:xfrm>
-          <a:prstGeom prst="rect">
-            <a:avLst/>
-          </a:prstGeom>
-        </p:spPr>
-      </p:pic>
-      <p:pic>
-        <p:nvPicPr>
-          <p:cNvPr name="Picture 3" id="3"/>
-          <p:cNvPicPr>
-            <a:picLocks noChangeAspect="true"/>
-          </p:cNvPicPr>
-          <p:nvPr/>
-        </p:nvPicPr>
-        <p:blipFill>
-          <a:blip r:embed="rId3"/>
-          <a:srcRect l="0" t="0" r="0" b="0"/>
-          <a:stretch>
-            <a:fillRect/>
-          </a:stretch>
-        </p:blipFill>
-        <p:spPr>
-          <a:xfrm flipH="false" flipV="false" rot="0">
-            <a:off x="0" y="0"/>
-            <a:ext cx="6925457" cy="4700654"/>
-          </a:xfrm>
-          <a:prstGeom prst="rect">
-            <a:avLst/>
-          </a:prstGeom>
-        </p:spPr>
-      </p:pic>
-      <p:sp>
-        <p:nvSpPr>
-          <p:cNvPr name="TextBox 4" id="4"/>
-          <p:cNvSpPr txBox="true"/>
-          <p:nvPr/>
-        </p:nvSpPr>
-        <p:spPr>
-          <a:xfrm rot="0">
-            <a:off x="2717556" y="3895725"/>
-            <a:ext cx="12852888" cy="2200275"/>
-          </a:xfrm>
-          <a:prstGeom prst="rect">
-            <a:avLst/>
-          </a:prstGeom>
-        </p:spPr>
-        <p:txBody>
-          <a:bodyPr anchor="t" rtlCol="false" tIns="0" lIns="0" bIns="0" rIns="0">
-            <a:spAutoFit/>
-          </a:bodyPr>
-          <a:lstStyle/>
-          <a:p>
-            <a:pPr algn="ctr">
-              <a:lnSpc>
-                <a:spcPts val="15000"/>
-              </a:lnSpc>
-            </a:pPr>
-            <a:r>
-              <a:rPr lang="en-US" sz="12500">
-                <a:solidFill>
-                  <a:srgbClr val="000000"/>
-                </a:solidFill>
-                <a:latin typeface="Jua"/>
-                <a:ea typeface="Jua"/>
-                <a:cs typeface="Jua"/>
-                <a:sym typeface="Jua"/>
-              </a:rPr>
-              <a:t>폴란드</a:t>
-            </a:r>
-          </a:p>
-        </p:txBody>
+            <a:off x="891153" y="0"/>
+            <a:ext cx="16505695" cy="10287000"/>
+          </a:xfrm>
+          <a:custGeom>
+            <a:avLst/>
+            <a:gdLst/>
+            <a:ahLst/>
+            <a:cxnLst/>
+            <a:rect r="r" b="b" t="t" l="l"/>
+            <a:pathLst>
+              <a:path h="10287000" w="16505695">
+                <a:moveTo>
+                  <a:pt x="0" y="0"/>
+                </a:moveTo>
+                <a:lnTo>
+                  <a:pt x="16505694" y="0"/>
+                </a:lnTo>
+                <a:lnTo>
+                  <a:pt x="16505694" y="10287000"/>
+                </a:lnTo>
+                <a:lnTo>
+                  <a:pt x="0" y="10287000"/>
+                </a:lnTo>
+                <a:lnTo>
+                  <a:pt x="0" y="0"/>
+                </a:lnTo>
+                <a:close/>
+              </a:path>
+            </a:pathLst>
+          </a:custGeom>
+          <a:blipFill>
+            <a:blip r:embed="rId2"/>
+            <a:stretch>
+              <a:fillRect l="0" t="0" r="0" b="0"/>
+            </a:stretch>
+          </a:blipFill>
+        </p:spPr>
       </p:sp>
     </p:spTree>
   </p:cSld>
@@ -8573,51 +8582,96 @@
           <a:chExt cx="0" cy="0"/>
         </a:xfrm>
       </p:grpSpPr>
-      <p:sp>
-        <p:nvSpPr>
-          <p:cNvPr name="Freeform 2" id="2"/>
-          <p:cNvSpPr/>
-          <p:nvPr/>
-        </p:nvSpPr>
+      <p:pic>
+        <p:nvPicPr>
+          <p:cNvPr name="Picture 2" id="2"/>
+          <p:cNvPicPr>
+            <a:picLocks noChangeAspect="true"/>
+          </p:cNvPicPr>
+          <p:nvPr/>
+        </p:nvPicPr>
+        <p:blipFill>
+          <a:blip r:embed="rId2"/>
+          <a:srcRect l="0" t="0" r="0" b="0"/>
+          <a:stretch>
+            <a:fillRect/>
+          </a:stretch>
+        </p:blipFill>
         <p:spPr>
           <a:xfrm flipH="false" flipV="false" rot="0">
-            <a:off x="1320139" y="-133597"/>
-            <a:ext cx="15458607" cy="10287000"/>
-          </a:xfrm>
-          <a:custGeom>
-            <a:avLst/>
-            <a:gdLst/>
-            <a:ahLst/>
-            <a:cxnLst/>
-            <a:rect r="r" b="b" t="t" l="l"/>
-            <a:pathLst>
-              <a:path h="10287000" w="15458607">
-                <a:moveTo>
-                  <a:pt x="0" y="0"/>
-                </a:moveTo>
-                <a:lnTo>
-                  <a:pt x="15458607" y="0"/>
-                </a:lnTo>
-                <a:lnTo>
-                  <a:pt x="15458607" y="10287000"/>
-                </a:lnTo>
-                <a:lnTo>
-                  <a:pt x="0" y="10287000"/>
-                </a:lnTo>
-                <a:lnTo>
-                  <a:pt x="0" y="0"/>
-                </a:lnTo>
-                <a:close/>
-              </a:path>
-            </a:pathLst>
-          </a:custGeom>
-          <a:blipFill>
-            <a:blip r:embed="rId2"/>
-            <a:stretch>
-              <a:fillRect l="0" t="0" r="0" b="0"/>
-            </a:stretch>
-          </a:blipFill>
-        </p:spPr>
+            <a:off x="13655377" y="6809666"/>
+            <a:ext cx="6229999" cy="6954669"/>
+          </a:xfrm>
+          <a:prstGeom prst="rect">
+            <a:avLst/>
+          </a:prstGeom>
+        </p:spPr>
+      </p:pic>
+      <p:pic>
+        <p:nvPicPr>
+          <p:cNvPr name="Picture 3" id="3"/>
+          <p:cNvPicPr>
+            <a:picLocks noChangeAspect="true"/>
+          </p:cNvPicPr>
+          <p:nvPr/>
+        </p:nvPicPr>
+        <p:blipFill>
+          <a:blip r:embed="rId3"/>
+          <a:srcRect l="0" t="0" r="0" b="0"/>
+          <a:stretch>
+            <a:fillRect/>
+          </a:stretch>
+        </p:blipFill>
+        <p:spPr>
+          <a:xfrm flipH="false" flipV="false" rot="0">
+            <a:off x="0" y="0"/>
+            <a:ext cx="6925457" cy="4700654"/>
+          </a:xfrm>
+          <a:prstGeom prst="rect">
+            <a:avLst/>
+          </a:prstGeom>
+        </p:spPr>
+      </p:pic>
+      <p:sp>
+        <p:nvSpPr>
+          <p:cNvPr name="TextBox 4" id="4"/>
+          <p:cNvSpPr txBox="true"/>
+          <p:nvPr/>
+        </p:nvSpPr>
+        <p:spPr>
+          <a:xfrm rot="0">
+            <a:off x="2717556" y="4181475"/>
+            <a:ext cx="12852888" cy="1914525"/>
+          </a:xfrm>
+          <a:prstGeom prst="rect">
+            <a:avLst/>
+          </a:prstGeom>
+        </p:spPr>
+        <p:txBody>
+          <a:bodyPr anchor="t" rtlCol="false" tIns="0" lIns="0" bIns="0" rIns="0">
+            <a:spAutoFit/>
+          </a:bodyPr>
+          <a:lstStyle/>
+          <a:p>
+            <a:pPr algn="ctr">
+              <a:lnSpc>
+                <a:spcPts val="15000"/>
+              </a:lnSpc>
+            </a:pPr>
+            <a:r>
+              <a:rPr lang="en-US" sz="12500">
+                <a:solidFill>
+                  <a:srgbClr val="000000"/>
+                </a:solidFill>
+                <a:latin typeface="무궁화 고딕"/>
+                <a:ea typeface="무궁화 고딕"/>
+                <a:cs typeface="무궁화 고딕"/>
+                <a:sym typeface="무궁화 고딕"/>
+              </a:rPr>
+              <a:t>폴란드</a:t>
+            </a:r>
+          </a:p>
+        </p:txBody>
       </p:sp>
     </p:spTree>
   </p:cSld>
@@ -8651,96 +8705,51 @@
           <a:chExt cx="0" cy="0"/>
         </a:xfrm>
       </p:grpSpPr>
-      <p:pic>
-        <p:nvPicPr>
-          <p:cNvPr name="Picture 2" id="2"/>
-          <p:cNvPicPr>
-            <a:picLocks noChangeAspect="true"/>
-          </p:cNvPicPr>
-          <p:nvPr/>
-        </p:nvPicPr>
-        <p:blipFill>
-          <a:blip r:embed="rId2"/>
-          <a:srcRect l="0" t="0" r="0" b="0"/>
-          <a:stretch>
-            <a:fillRect/>
-          </a:stretch>
-        </p:blipFill>
+      <p:sp>
+        <p:nvSpPr>
+          <p:cNvPr name="Freeform 2" id="2"/>
+          <p:cNvSpPr/>
+          <p:nvPr/>
+        </p:nvSpPr>
         <p:spPr>
           <a:xfrm flipH="false" flipV="false" rot="0">
-            <a:off x="13655377" y="6809666"/>
-            <a:ext cx="6229999" cy="6954669"/>
-          </a:xfrm>
-          <a:prstGeom prst="rect">
-            <a:avLst/>
-          </a:prstGeom>
-        </p:spPr>
-      </p:pic>
-      <p:pic>
-        <p:nvPicPr>
-          <p:cNvPr name="Picture 3" id="3"/>
-          <p:cNvPicPr>
-            <a:picLocks noChangeAspect="true"/>
-          </p:cNvPicPr>
-          <p:nvPr/>
-        </p:nvPicPr>
-        <p:blipFill>
-          <a:blip r:embed="rId3"/>
-          <a:srcRect l="0" t="0" r="0" b="0"/>
-          <a:stretch>
-            <a:fillRect/>
-          </a:stretch>
-        </p:blipFill>
-        <p:spPr>
-          <a:xfrm flipH="false" flipV="false" rot="0">
-            <a:off x="0" y="0"/>
-            <a:ext cx="6925457" cy="4700654"/>
-          </a:xfrm>
-          <a:prstGeom prst="rect">
-            <a:avLst/>
-          </a:prstGeom>
-        </p:spPr>
-      </p:pic>
-      <p:sp>
-        <p:nvSpPr>
-          <p:cNvPr name="TextBox 4" id="4"/>
-          <p:cNvSpPr txBox="true"/>
-          <p:nvPr/>
-        </p:nvSpPr>
-        <p:spPr>
-          <a:xfrm rot="0">
-            <a:off x="2717556" y="3895725"/>
-            <a:ext cx="12852888" cy="2200275"/>
-          </a:xfrm>
-          <a:prstGeom prst="rect">
-            <a:avLst/>
-          </a:prstGeom>
-        </p:spPr>
-        <p:txBody>
-          <a:bodyPr anchor="t" rtlCol="false" tIns="0" lIns="0" bIns="0" rIns="0">
-            <a:spAutoFit/>
-          </a:bodyPr>
-          <a:lstStyle/>
-          <a:p>
-            <a:pPr algn="ctr">
-              <a:lnSpc>
-                <a:spcPts val="15000"/>
-              </a:lnSpc>
-            </a:pPr>
-            <a:r>
-              <a:rPr lang="en-US" sz="12500">
-                <a:solidFill>
-                  <a:srgbClr val="000000"/>
-                </a:solidFill>
-                <a:latin typeface="Jua"/>
-                <a:ea typeface="Jua"/>
-                <a:cs typeface="Jua"/>
-                <a:sym typeface="Jua"/>
-              </a:rPr>
-              <a:t>콜롬비아</a:t>
-            </a:r>
-          </a:p>
-        </p:txBody>
+            <a:off x="1320139" y="-133597"/>
+            <a:ext cx="15458607" cy="10287000"/>
+          </a:xfrm>
+          <a:custGeom>
+            <a:avLst/>
+            <a:gdLst/>
+            <a:ahLst/>
+            <a:cxnLst/>
+            <a:rect r="r" b="b" t="t" l="l"/>
+            <a:pathLst>
+              <a:path h="10287000" w="15458607">
+                <a:moveTo>
+                  <a:pt x="0" y="0"/>
+                </a:moveTo>
+                <a:lnTo>
+                  <a:pt x="15458607" y="0"/>
+                </a:lnTo>
+                <a:lnTo>
+                  <a:pt x="15458607" y="10287000"/>
+                </a:lnTo>
+                <a:lnTo>
+                  <a:pt x="0" y="10287000"/>
+                </a:lnTo>
+                <a:lnTo>
+                  <a:pt x="0" y="0"/>
+                </a:lnTo>
+                <a:close/>
+              </a:path>
+            </a:pathLst>
+          </a:custGeom>
+          <a:blipFill>
+            <a:blip r:embed="rId2"/>
+            <a:stretch>
+              <a:fillRect l="0" t="0" r="0" b="0"/>
+            </a:stretch>
+          </a:blipFill>
+        </p:spPr>
       </p:sp>
     </p:spTree>
   </p:cSld>
@@ -8774,51 +8783,96 @@
           <a:chExt cx="0" cy="0"/>
         </a:xfrm>
       </p:grpSpPr>
-      <p:sp>
-        <p:nvSpPr>
-          <p:cNvPr name="Freeform 2" id="2"/>
-          <p:cNvSpPr/>
-          <p:nvPr/>
-        </p:nvSpPr>
+      <p:pic>
+        <p:nvPicPr>
+          <p:cNvPr name="Picture 2" id="2"/>
+          <p:cNvPicPr>
+            <a:picLocks noChangeAspect="true"/>
+          </p:cNvPicPr>
+          <p:nvPr/>
+        </p:nvPicPr>
+        <p:blipFill>
+          <a:blip r:embed="rId2"/>
+          <a:srcRect l="0" t="0" r="0" b="0"/>
+          <a:stretch>
+            <a:fillRect/>
+          </a:stretch>
+        </p:blipFill>
         <p:spPr>
           <a:xfrm flipH="false" flipV="false" rot="0">
-            <a:off x="0" y="571500"/>
-            <a:ext cx="18288000" cy="9144000"/>
-          </a:xfrm>
-          <a:custGeom>
-            <a:avLst/>
-            <a:gdLst/>
-            <a:ahLst/>
-            <a:cxnLst/>
-            <a:rect r="r" b="b" t="t" l="l"/>
-            <a:pathLst>
-              <a:path h="9144000" w="18288000">
-                <a:moveTo>
-                  <a:pt x="0" y="0"/>
-                </a:moveTo>
-                <a:lnTo>
-                  <a:pt x="18288000" y="0"/>
-                </a:lnTo>
-                <a:lnTo>
-                  <a:pt x="18288000" y="9144000"/>
-                </a:lnTo>
-                <a:lnTo>
-                  <a:pt x="0" y="9144000"/>
-                </a:lnTo>
-                <a:lnTo>
-                  <a:pt x="0" y="0"/>
-                </a:lnTo>
-                <a:close/>
-              </a:path>
-            </a:pathLst>
-          </a:custGeom>
-          <a:blipFill>
-            <a:blip r:embed="rId2"/>
-            <a:stretch>
-              <a:fillRect l="0" t="0" r="0" b="0"/>
-            </a:stretch>
-          </a:blipFill>
-        </p:spPr>
+            <a:off x="13655377" y="6809666"/>
+            <a:ext cx="6229999" cy="6954669"/>
+          </a:xfrm>
+          <a:prstGeom prst="rect">
+            <a:avLst/>
+          </a:prstGeom>
+        </p:spPr>
+      </p:pic>
+      <p:pic>
+        <p:nvPicPr>
+          <p:cNvPr name="Picture 3" id="3"/>
+          <p:cNvPicPr>
+            <a:picLocks noChangeAspect="true"/>
+          </p:cNvPicPr>
+          <p:nvPr/>
+        </p:nvPicPr>
+        <p:blipFill>
+          <a:blip r:embed="rId3"/>
+          <a:srcRect l="0" t="0" r="0" b="0"/>
+          <a:stretch>
+            <a:fillRect/>
+          </a:stretch>
+        </p:blipFill>
+        <p:spPr>
+          <a:xfrm flipH="false" flipV="false" rot="0">
+            <a:off x="0" y="0"/>
+            <a:ext cx="6925457" cy="4700654"/>
+          </a:xfrm>
+          <a:prstGeom prst="rect">
+            <a:avLst/>
+          </a:prstGeom>
+        </p:spPr>
+      </p:pic>
+      <p:sp>
+        <p:nvSpPr>
+          <p:cNvPr name="TextBox 4" id="4"/>
+          <p:cNvSpPr txBox="true"/>
+          <p:nvPr/>
+        </p:nvSpPr>
+        <p:spPr>
+          <a:xfrm rot="0">
+            <a:off x="2717556" y="4181475"/>
+            <a:ext cx="12852888" cy="1914525"/>
+          </a:xfrm>
+          <a:prstGeom prst="rect">
+            <a:avLst/>
+          </a:prstGeom>
+        </p:spPr>
+        <p:txBody>
+          <a:bodyPr anchor="t" rtlCol="false" tIns="0" lIns="0" bIns="0" rIns="0">
+            <a:spAutoFit/>
+          </a:bodyPr>
+          <a:lstStyle/>
+          <a:p>
+            <a:pPr algn="ctr">
+              <a:lnSpc>
+                <a:spcPts val="15000"/>
+              </a:lnSpc>
+            </a:pPr>
+            <a:r>
+              <a:rPr lang="en-US" sz="12500">
+                <a:solidFill>
+                  <a:srgbClr val="000000"/>
+                </a:solidFill>
+                <a:latin typeface="무궁화 고딕"/>
+                <a:ea typeface="무궁화 고딕"/>
+                <a:cs typeface="무궁화 고딕"/>
+                <a:sym typeface="무궁화 고딕"/>
+              </a:rPr>
+              <a:t>콜롬비아</a:t>
+            </a:r>
+          </a:p>
+        </p:txBody>
       </p:sp>
     </p:spTree>
   </p:cSld>
@@ -8852,96 +8906,51 @@
           <a:chExt cx="0" cy="0"/>
         </a:xfrm>
       </p:grpSpPr>
-      <p:pic>
-        <p:nvPicPr>
-          <p:cNvPr name="Picture 2" id="2"/>
-          <p:cNvPicPr>
-            <a:picLocks noChangeAspect="true"/>
-          </p:cNvPicPr>
-          <p:nvPr/>
-        </p:nvPicPr>
-        <p:blipFill>
-          <a:blip r:embed="rId2"/>
-          <a:srcRect l="0" t="0" r="0" b="0"/>
-          <a:stretch>
-            <a:fillRect/>
-          </a:stretch>
-        </p:blipFill>
+      <p:sp>
+        <p:nvSpPr>
+          <p:cNvPr name="Freeform 2" id="2"/>
+          <p:cNvSpPr/>
+          <p:nvPr/>
+        </p:nvSpPr>
         <p:spPr>
           <a:xfrm flipH="false" flipV="false" rot="0">
-            <a:off x="13655377" y="6809666"/>
-            <a:ext cx="6229999" cy="6954669"/>
-          </a:xfrm>
-          <a:prstGeom prst="rect">
-            <a:avLst/>
-          </a:prstGeom>
-        </p:spPr>
-      </p:pic>
-      <p:pic>
-        <p:nvPicPr>
-          <p:cNvPr name="Picture 3" id="3"/>
-          <p:cNvPicPr>
-            <a:picLocks noChangeAspect="true"/>
-          </p:cNvPicPr>
-          <p:nvPr/>
-        </p:nvPicPr>
-        <p:blipFill>
-          <a:blip r:embed="rId3"/>
-          <a:srcRect l="0" t="0" r="0" b="0"/>
-          <a:stretch>
-            <a:fillRect/>
-          </a:stretch>
-        </p:blipFill>
-        <p:spPr>
-          <a:xfrm flipH="false" flipV="false" rot="0">
-            <a:off x="0" y="0"/>
-            <a:ext cx="6925457" cy="4700654"/>
-          </a:xfrm>
-          <a:prstGeom prst="rect">
-            <a:avLst/>
-          </a:prstGeom>
-        </p:spPr>
-      </p:pic>
-      <p:sp>
-        <p:nvSpPr>
-          <p:cNvPr name="TextBox 4" id="4"/>
-          <p:cNvSpPr txBox="true"/>
-          <p:nvPr/>
-        </p:nvSpPr>
-        <p:spPr>
-          <a:xfrm rot="0">
-            <a:off x="2717556" y="3895725"/>
-            <a:ext cx="12852888" cy="2200275"/>
-          </a:xfrm>
-          <a:prstGeom prst="rect">
-            <a:avLst/>
-          </a:prstGeom>
-        </p:spPr>
-        <p:txBody>
-          <a:bodyPr anchor="t" rtlCol="false" tIns="0" lIns="0" bIns="0" rIns="0">
-            <a:spAutoFit/>
-          </a:bodyPr>
-          <a:lstStyle/>
-          <a:p>
-            <a:pPr algn="ctr">
-              <a:lnSpc>
-                <a:spcPts val="15000"/>
-              </a:lnSpc>
-            </a:pPr>
-            <a:r>
-              <a:rPr lang="en-US" sz="12500">
-                <a:solidFill>
-                  <a:srgbClr val="000000"/>
-                </a:solidFill>
-                <a:latin typeface="Jua"/>
-                <a:ea typeface="Jua"/>
-                <a:cs typeface="Jua"/>
-                <a:sym typeface="Jua"/>
-              </a:rPr>
-              <a:t>나이지리아</a:t>
-            </a:r>
-          </a:p>
-        </p:txBody>
+            <a:off x="0" y="571500"/>
+            <a:ext cx="18288000" cy="9144000"/>
+          </a:xfrm>
+          <a:custGeom>
+            <a:avLst/>
+            <a:gdLst/>
+            <a:ahLst/>
+            <a:cxnLst/>
+            <a:rect r="r" b="b" t="t" l="l"/>
+            <a:pathLst>
+              <a:path h="9144000" w="18288000">
+                <a:moveTo>
+                  <a:pt x="0" y="0"/>
+                </a:moveTo>
+                <a:lnTo>
+                  <a:pt x="18288000" y="0"/>
+                </a:lnTo>
+                <a:lnTo>
+                  <a:pt x="18288000" y="9144000"/>
+                </a:lnTo>
+                <a:lnTo>
+                  <a:pt x="0" y="9144000"/>
+                </a:lnTo>
+                <a:lnTo>
+                  <a:pt x="0" y="0"/>
+                </a:lnTo>
+                <a:close/>
+              </a:path>
+            </a:pathLst>
+          </a:custGeom>
+          <a:blipFill>
+            <a:blip r:embed="rId2"/>
+            <a:stretch>
+              <a:fillRect l="0" t="0" r="0" b="0"/>
+            </a:stretch>
+          </a:blipFill>
+        </p:spPr>
       </p:sp>
     </p:spTree>
   </p:cSld>
@@ -8975,51 +8984,96 @@
           <a:chExt cx="0" cy="0"/>
         </a:xfrm>
       </p:grpSpPr>
-      <p:sp>
-        <p:nvSpPr>
-          <p:cNvPr name="Freeform 2" id="2"/>
-          <p:cNvSpPr/>
-          <p:nvPr/>
-        </p:nvSpPr>
+      <p:pic>
+        <p:nvPicPr>
+          <p:cNvPr name="Picture 2" id="2"/>
+          <p:cNvPicPr>
+            <a:picLocks noChangeAspect="true"/>
+          </p:cNvPicPr>
+          <p:nvPr/>
+        </p:nvPicPr>
+        <p:blipFill>
+          <a:blip r:embed="rId2"/>
+          <a:srcRect l="0" t="0" r="0" b="0"/>
+          <a:stretch>
+            <a:fillRect/>
+          </a:stretch>
+        </p:blipFill>
         <p:spPr>
           <a:xfrm flipH="false" flipV="false" rot="0">
-            <a:off x="0" y="571500"/>
-            <a:ext cx="18288000" cy="9144000"/>
-          </a:xfrm>
-          <a:custGeom>
-            <a:avLst/>
-            <a:gdLst/>
-            <a:ahLst/>
-            <a:cxnLst/>
-            <a:rect r="r" b="b" t="t" l="l"/>
-            <a:pathLst>
-              <a:path h="9144000" w="18288000">
-                <a:moveTo>
-                  <a:pt x="0" y="0"/>
-                </a:moveTo>
-                <a:lnTo>
-                  <a:pt x="18288000" y="0"/>
-                </a:lnTo>
-                <a:lnTo>
-                  <a:pt x="18288000" y="9144000"/>
-                </a:lnTo>
-                <a:lnTo>
-                  <a:pt x="0" y="9144000"/>
-                </a:lnTo>
-                <a:lnTo>
-                  <a:pt x="0" y="0"/>
-                </a:lnTo>
-                <a:close/>
-              </a:path>
-            </a:pathLst>
-          </a:custGeom>
-          <a:blipFill>
-            <a:blip r:embed="rId2"/>
-            <a:stretch>
-              <a:fillRect l="0" t="0" r="0" b="0"/>
-            </a:stretch>
-          </a:blipFill>
-        </p:spPr>
+            <a:off x="13655377" y="6809666"/>
+            <a:ext cx="6229999" cy="6954669"/>
+          </a:xfrm>
+          <a:prstGeom prst="rect">
+            <a:avLst/>
+          </a:prstGeom>
+        </p:spPr>
+      </p:pic>
+      <p:pic>
+        <p:nvPicPr>
+          <p:cNvPr name="Picture 3" id="3"/>
+          <p:cNvPicPr>
+            <a:picLocks noChangeAspect="true"/>
+          </p:cNvPicPr>
+          <p:nvPr/>
+        </p:nvPicPr>
+        <p:blipFill>
+          <a:blip r:embed="rId3"/>
+          <a:srcRect l="0" t="0" r="0" b="0"/>
+          <a:stretch>
+            <a:fillRect/>
+          </a:stretch>
+        </p:blipFill>
+        <p:spPr>
+          <a:xfrm flipH="false" flipV="false" rot="0">
+            <a:off x="0" y="0"/>
+            <a:ext cx="6925457" cy="4700654"/>
+          </a:xfrm>
+          <a:prstGeom prst="rect">
+            <a:avLst/>
+          </a:prstGeom>
+        </p:spPr>
+      </p:pic>
+      <p:sp>
+        <p:nvSpPr>
+          <p:cNvPr name="TextBox 4" id="4"/>
+          <p:cNvSpPr txBox="true"/>
+          <p:nvPr/>
+        </p:nvSpPr>
+        <p:spPr>
+          <a:xfrm rot="0">
+            <a:off x="2717556" y="4181475"/>
+            <a:ext cx="12852888" cy="1914525"/>
+          </a:xfrm>
+          <a:prstGeom prst="rect">
+            <a:avLst/>
+          </a:prstGeom>
+        </p:spPr>
+        <p:txBody>
+          <a:bodyPr anchor="t" rtlCol="false" tIns="0" lIns="0" bIns="0" rIns="0">
+            <a:spAutoFit/>
+          </a:bodyPr>
+          <a:lstStyle/>
+          <a:p>
+            <a:pPr algn="ctr">
+              <a:lnSpc>
+                <a:spcPts val="15000"/>
+              </a:lnSpc>
+            </a:pPr>
+            <a:r>
+              <a:rPr lang="en-US" sz="12500">
+                <a:solidFill>
+                  <a:srgbClr val="000000"/>
+                </a:solidFill>
+                <a:latin typeface="무궁화 고딕"/>
+                <a:ea typeface="무궁화 고딕"/>
+                <a:cs typeface="무궁화 고딕"/>
+                <a:sym typeface="무궁화 고딕"/>
+              </a:rPr>
+              <a:t>나이지리아</a:t>
+            </a:r>
+          </a:p>
+        </p:txBody>
       </p:sp>
     </p:spTree>
   </p:cSld>
@@ -9053,96 +9107,51 @@
           <a:chExt cx="0" cy="0"/>
         </a:xfrm>
       </p:grpSpPr>
-      <p:pic>
-        <p:nvPicPr>
-          <p:cNvPr name="Picture 2" id="2"/>
-          <p:cNvPicPr>
-            <a:picLocks noChangeAspect="true"/>
-          </p:cNvPicPr>
-          <p:nvPr/>
-        </p:nvPicPr>
-        <p:blipFill>
-          <a:blip r:embed="rId2"/>
-          <a:srcRect l="0" t="0" r="0" b="0"/>
-          <a:stretch>
-            <a:fillRect/>
-          </a:stretch>
-        </p:blipFill>
+      <p:sp>
+        <p:nvSpPr>
+          <p:cNvPr name="Freeform 2" id="2"/>
+          <p:cNvSpPr/>
+          <p:nvPr/>
+        </p:nvSpPr>
         <p:spPr>
           <a:xfrm flipH="false" flipV="false" rot="0">
-            <a:off x="13655377" y="6809666"/>
-            <a:ext cx="6229999" cy="6954669"/>
-          </a:xfrm>
-          <a:prstGeom prst="rect">
-            <a:avLst/>
-          </a:prstGeom>
-        </p:spPr>
-      </p:pic>
-      <p:pic>
-        <p:nvPicPr>
-          <p:cNvPr name="Picture 3" id="3"/>
-          <p:cNvPicPr>
-            <a:picLocks noChangeAspect="true"/>
-          </p:cNvPicPr>
-          <p:nvPr/>
-        </p:nvPicPr>
-        <p:blipFill>
-          <a:blip r:embed="rId3"/>
-          <a:srcRect l="0" t="0" r="0" b="0"/>
-          <a:stretch>
-            <a:fillRect/>
-          </a:stretch>
-        </p:blipFill>
-        <p:spPr>
-          <a:xfrm flipH="false" flipV="false" rot="0">
-            <a:off x="0" y="0"/>
-            <a:ext cx="6925457" cy="4700654"/>
-          </a:xfrm>
-          <a:prstGeom prst="rect">
-            <a:avLst/>
-          </a:prstGeom>
-        </p:spPr>
-      </p:pic>
-      <p:sp>
-        <p:nvSpPr>
-          <p:cNvPr name="TextBox 4" id="4"/>
-          <p:cNvSpPr txBox="true"/>
-          <p:nvPr/>
-        </p:nvSpPr>
-        <p:spPr>
-          <a:xfrm rot="0">
-            <a:off x="2717556" y="3895725"/>
-            <a:ext cx="12852888" cy="2200275"/>
-          </a:xfrm>
-          <a:prstGeom prst="rect">
-            <a:avLst/>
-          </a:prstGeom>
-        </p:spPr>
-        <p:txBody>
-          <a:bodyPr anchor="t" rtlCol="false" tIns="0" lIns="0" bIns="0" rIns="0">
-            <a:spAutoFit/>
-          </a:bodyPr>
-          <a:lstStyle/>
-          <a:p>
-            <a:pPr algn="ctr">
-              <a:lnSpc>
-                <a:spcPts val="15000"/>
-              </a:lnSpc>
-            </a:pPr>
-            <a:r>
-              <a:rPr lang="en-US" sz="12500">
-                <a:solidFill>
-                  <a:srgbClr val="000000"/>
-                </a:solidFill>
-                <a:latin typeface="Jua"/>
-                <a:ea typeface="Jua"/>
-                <a:cs typeface="Jua"/>
-                <a:sym typeface="Jua"/>
-              </a:rPr>
-              <a:t>뉴질랜드</a:t>
-            </a:r>
-          </a:p>
-        </p:txBody>
+            <a:off x="0" y="571500"/>
+            <a:ext cx="18288000" cy="9144000"/>
+          </a:xfrm>
+          <a:custGeom>
+            <a:avLst/>
+            <a:gdLst/>
+            <a:ahLst/>
+            <a:cxnLst/>
+            <a:rect r="r" b="b" t="t" l="l"/>
+            <a:pathLst>
+              <a:path h="9144000" w="18288000">
+                <a:moveTo>
+                  <a:pt x="0" y="0"/>
+                </a:moveTo>
+                <a:lnTo>
+                  <a:pt x="18288000" y="0"/>
+                </a:lnTo>
+                <a:lnTo>
+                  <a:pt x="18288000" y="9144000"/>
+                </a:lnTo>
+                <a:lnTo>
+                  <a:pt x="0" y="9144000"/>
+                </a:lnTo>
+                <a:lnTo>
+                  <a:pt x="0" y="0"/>
+                </a:lnTo>
+                <a:close/>
+              </a:path>
+            </a:pathLst>
+          </a:custGeom>
+          <a:blipFill>
+            <a:blip r:embed="rId2"/>
+            <a:stretch>
+              <a:fillRect l="0" t="0" r="0" b="0"/>
+            </a:stretch>
+          </a:blipFill>
+        </p:spPr>
       </p:sp>
     </p:spTree>
   </p:cSld>
@@ -9176,51 +9185,96 @@
           <a:chExt cx="0" cy="0"/>
         </a:xfrm>
       </p:grpSpPr>
-      <p:sp>
-        <p:nvSpPr>
-          <p:cNvPr name="Freeform 2" id="2"/>
-          <p:cNvSpPr/>
-          <p:nvPr/>
-        </p:nvSpPr>
+      <p:pic>
+        <p:nvPicPr>
+          <p:cNvPr name="Picture 2" id="2"/>
+          <p:cNvPicPr>
+            <a:picLocks noChangeAspect="true"/>
+          </p:cNvPicPr>
+          <p:nvPr/>
+        </p:nvPicPr>
+        <p:blipFill>
+          <a:blip r:embed="rId2"/>
+          <a:srcRect l="0" t="0" r="0" b="0"/>
+          <a:stretch>
+            <a:fillRect/>
+          </a:stretch>
+        </p:blipFill>
         <p:spPr>
           <a:xfrm flipH="false" flipV="false" rot="0">
-            <a:off x="0" y="319966"/>
-            <a:ext cx="18288000" cy="9647068"/>
-          </a:xfrm>
-          <a:custGeom>
-            <a:avLst/>
-            <a:gdLst/>
-            <a:ahLst/>
-            <a:cxnLst/>
-            <a:rect r="r" b="b" t="t" l="l"/>
-            <a:pathLst>
-              <a:path h="9647068" w="18288000">
-                <a:moveTo>
-                  <a:pt x="0" y="0"/>
-                </a:moveTo>
-                <a:lnTo>
-                  <a:pt x="18288000" y="0"/>
-                </a:lnTo>
-                <a:lnTo>
-                  <a:pt x="18288000" y="9647068"/>
-                </a:lnTo>
-                <a:lnTo>
-                  <a:pt x="0" y="9647068"/>
-                </a:lnTo>
-                <a:lnTo>
-                  <a:pt x="0" y="0"/>
-                </a:lnTo>
-                <a:close/>
-              </a:path>
-            </a:pathLst>
-          </a:custGeom>
-          <a:blipFill>
-            <a:blip r:embed="rId2"/>
-            <a:stretch>
-              <a:fillRect l="0" t="0" r="0" b="0"/>
-            </a:stretch>
-          </a:blipFill>
-        </p:spPr>
+            <a:off x="13655377" y="6809666"/>
+            <a:ext cx="6229999" cy="6954669"/>
+          </a:xfrm>
+          <a:prstGeom prst="rect">
+            <a:avLst/>
+          </a:prstGeom>
+        </p:spPr>
+      </p:pic>
+      <p:pic>
+        <p:nvPicPr>
+          <p:cNvPr name="Picture 3" id="3"/>
+          <p:cNvPicPr>
+            <a:picLocks noChangeAspect="true"/>
+          </p:cNvPicPr>
+          <p:nvPr/>
+        </p:nvPicPr>
+        <p:blipFill>
+          <a:blip r:embed="rId3"/>
+          <a:srcRect l="0" t="0" r="0" b="0"/>
+          <a:stretch>
+            <a:fillRect/>
+          </a:stretch>
+        </p:blipFill>
+        <p:spPr>
+          <a:xfrm flipH="false" flipV="false" rot="0">
+            <a:off x="0" y="0"/>
+            <a:ext cx="6925457" cy="4700654"/>
+          </a:xfrm>
+          <a:prstGeom prst="rect">
+            <a:avLst/>
+          </a:prstGeom>
+        </p:spPr>
+      </p:pic>
+      <p:sp>
+        <p:nvSpPr>
+          <p:cNvPr name="TextBox 4" id="4"/>
+          <p:cNvSpPr txBox="true"/>
+          <p:nvPr/>
+        </p:nvSpPr>
+        <p:spPr>
+          <a:xfrm rot="0">
+            <a:off x="2717556" y="4181475"/>
+            <a:ext cx="12852888" cy="1914525"/>
+          </a:xfrm>
+          <a:prstGeom prst="rect">
+            <a:avLst/>
+          </a:prstGeom>
+        </p:spPr>
+        <p:txBody>
+          <a:bodyPr anchor="t" rtlCol="false" tIns="0" lIns="0" bIns="0" rIns="0">
+            <a:spAutoFit/>
+          </a:bodyPr>
+          <a:lstStyle/>
+          <a:p>
+            <a:pPr algn="ctr">
+              <a:lnSpc>
+                <a:spcPts val="15000"/>
+              </a:lnSpc>
+            </a:pPr>
+            <a:r>
+              <a:rPr lang="en-US" sz="12500">
+                <a:solidFill>
+                  <a:srgbClr val="000000"/>
+                </a:solidFill>
+                <a:latin typeface="무궁화 고딕"/>
+                <a:ea typeface="무궁화 고딕"/>
+                <a:cs typeface="무궁화 고딕"/>
+                <a:sym typeface="무궁화 고딕"/>
+              </a:rPr>
+              <a:t>대한민국</a:t>
+            </a:r>
+          </a:p>
+        </p:txBody>
       </p:sp>
     </p:spTree>
   </p:cSld>
@@ -9254,51 +9308,96 @@
           <a:chExt cx="0" cy="0"/>
         </a:xfrm>
       </p:grpSpPr>
-      <p:sp>
-        <p:nvSpPr>
-          <p:cNvPr name="Freeform 2" id="2"/>
-          <p:cNvSpPr/>
-          <p:nvPr/>
-        </p:nvSpPr>
+      <p:pic>
+        <p:nvPicPr>
+          <p:cNvPr name="Picture 2" id="2"/>
+          <p:cNvPicPr>
+            <a:picLocks noChangeAspect="true"/>
+          </p:cNvPicPr>
+          <p:nvPr/>
+        </p:nvPicPr>
+        <p:blipFill>
+          <a:blip r:embed="rId2"/>
+          <a:srcRect l="0" t="0" r="0" b="0"/>
+          <a:stretch>
+            <a:fillRect/>
+          </a:stretch>
+        </p:blipFill>
         <p:spPr>
           <a:xfrm flipH="false" flipV="false" rot="0">
-            <a:off x="1414697" y="0"/>
-            <a:ext cx="15458607" cy="10287000"/>
-          </a:xfrm>
-          <a:custGeom>
-            <a:avLst/>
-            <a:gdLst/>
-            <a:ahLst/>
-            <a:cxnLst/>
-            <a:rect r="r" b="b" t="t" l="l"/>
-            <a:pathLst>
-              <a:path h="10287000" w="15458607">
-                <a:moveTo>
-                  <a:pt x="0" y="0"/>
-                </a:moveTo>
-                <a:lnTo>
-                  <a:pt x="15458606" y="0"/>
-                </a:lnTo>
-                <a:lnTo>
-                  <a:pt x="15458606" y="10287000"/>
-                </a:lnTo>
-                <a:lnTo>
-                  <a:pt x="0" y="10287000"/>
-                </a:lnTo>
-                <a:lnTo>
-                  <a:pt x="0" y="0"/>
-                </a:lnTo>
-                <a:close/>
-              </a:path>
-            </a:pathLst>
-          </a:custGeom>
-          <a:blipFill>
-            <a:blip r:embed="rId2"/>
-            <a:stretch>
-              <a:fillRect l="0" t="0" r="0" b="0"/>
-            </a:stretch>
-          </a:blipFill>
-        </p:spPr>
+            <a:off x="13655377" y="6809666"/>
+            <a:ext cx="6229999" cy="6954669"/>
+          </a:xfrm>
+          <a:prstGeom prst="rect">
+            <a:avLst/>
+          </a:prstGeom>
+        </p:spPr>
+      </p:pic>
+      <p:pic>
+        <p:nvPicPr>
+          <p:cNvPr name="Picture 3" id="3"/>
+          <p:cNvPicPr>
+            <a:picLocks noChangeAspect="true"/>
+          </p:cNvPicPr>
+          <p:nvPr/>
+        </p:nvPicPr>
+        <p:blipFill>
+          <a:blip r:embed="rId3"/>
+          <a:srcRect l="0" t="0" r="0" b="0"/>
+          <a:stretch>
+            <a:fillRect/>
+          </a:stretch>
+        </p:blipFill>
+        <p:spPr>
+          <a:xfrm flipH="false" flipV="false" rot="0">
+            <a:off x="0" y="0"/>
+            <a:ext cx="6925457" cy="4700654"/>
+          </a:xfrm>
+          <a:prstGeom prst="rect">
+            <a:avLst/>
+          </a:prstGeom>
+        </p:spPr>
+      </p:pic>
+      <p:sp>
+        <p:nvSpPr>
+          <p:cNvPr name="TextBox 4" id="4"/>
+          <p:cNvSpPr txBox="true"/>
+          <p:nvPr/>
+        </p:nvSpPr>
+        <p:spPr>
+          <a:xfrm rot="0">
+            <a:off x="2717556" y="4181475"/>
+            <a:ext cx="12852888" cy="1914525"/>
+          </a:xfrm>
+          <a:prstGeom prst="rect">
+            <a:avLst/>
+          </a:prstGeom>
+        </p:spPr>
+        <p:txBody>
+          <a:bodyPr anchor="t" rtlCol="false" tIns="0" lIns="0" bIns="0" rIns="0">
+            <a:spAutoFit/>
+          </a:bodyPr>
+          <a:lstStyle/>
+          <a:p>
+            <a:pPr algn="ctr">
+              <a:lnSpc>
+                <a:spcPts val="15000"/>
+              </a:lnSpc>
+            </a:pPr>
+            <a:r>
+              <a:rPr lang="en-US" sz="12500">
+                <a:solidFill>
+                  <a:srgbClr val="000000"/>
+                </a:solidFill>
+                <a:latin typeface="무궁화 고딕"/>
+                <a:ea typeface="무궁화 고딕"/>
+                <a:cs typeface="무궁화 고딕"/>
+                <a:sym typeface="무궁화 고딕"/>
+              </a:rPr>
+              <a:t>뉴질랜드</a:t>
+            </a:r>
+          </a:p>
+        </p:txBody>
       </p:sp>
     </p:spTree>
   </p:cSld>
@@ -9332,96 +9431,51 @@
           <a:chExt cx="0" cy="0"/>
         </a:xfrm>
       </p:grpSpPr>
-      <p:pic>
-        <p:nvPicPr>
-          <p:cNvPr name="Picture 2" id="2"/>
-          <p:cNvPicPr>
-            <a:picLocks noChangeAspect="true"/>
-          </p:cNvPicPr>
-          <p:nvPr/>
-        </p:nvPicPr>
-        <p:blipFill>
-          <a:blip r:embed="rId2"/>
-          <a:srcRect l="0" t="0" r="0" b="0"/>
-          <a:stretch>
-            <a:fillRect/>
-          </a:stretch>
-        </p:blipFill>
+      <p:sp>
+        <p:nvSpPr>
+          <p:cNvPr name="Freeform 2" id="2"/>
+          <p:cNvSpPr/>
+          <p:nvPr/>
+        </p:nvSpPr>
         <p:spPr>
           <a:xfrm flipH="false" flipV="false" rot="0">
-            <a:off x="13655377" y="6809666"/>
-            <a:ext cx="6229999" cy="6954669"/>
-          </a:xfrm>
-          <a:prstGeom prst="rect">
-            <a:avLst/>
-          </a:prstGeom>
-        </p:spPr>
-      </p:pic>
-      <p:pic>
-        <p:nvPicPr>
-          <p:cNvPr name="Picture 3" id="3"/>
-          <p:cNvPicPr>
-            <a:picLocks noChangeAspect="true"/>
-          </p:cNvPicPr>
-          <p:nvPr/>
-        </p:nvPicPr>
-        <p:blipFill>
-          <a:blip r:embed="rId3"/>
-          <a:srcRect l="0" t="0" r="0" b="0"/>
-          <a:stretch>
-            <a:fillRect/>
-          </a:stretch>
-        </p:blipFill>
-        <p:spPr>
-          <a:xfrm flipH="false" flipV="false" rot="0">
-            <a:off x="0" y="0"/>
-            <a:ext cx="6925457" cy="4700654"/>
-          </a:xfrm>
-          <a:prstGeom prst="rect">
-            <a:avLst/>
-          </a:prstGeom>
-        </p:spPr>
-      </p:pic>
-      <p:sp>
-        <p:nvSpPr>
-          <p:cNvPr name="TextBox 4" id="4"/>
-          <p:cNvSpPr txBox="true"/>
-          <p:nvPr/>
-        </p:nvSpPr>
-        <p:spPr>
-          <a:xfrm rot="0">
-            <a:off x="2717556" y="3895725"/>
-            <a:ext cx="12852888" cy="2200275"/>
-          </a:xfrm>
-          <a:prstGeom prst="rect">
-            <a:avLst/>
-          </a:prstGeom>
-        </p:spPr>
-        <p:txBody>
-          <a:bodyPr anchor="t" rtlCol="false" tIns="0" lIns="0" bIns="0" rIns="0">
-            <a:spAutoFit/>
-          </a:bodyPr>
-          <a:lstStyle/>
-          <a:p>
-            <a:pPr algn="ctr">
-              <a:lnSpc>
-                <a:spcPts val="15000"/>
-              </a:lnSpc>
-            </a:pPr>
-            <a:r>
-              <a:rPr lang="en-US" sz="12500">
-                <a:solidFill>
-                  <a:srgbClr val="000000"/>
-                </a:solidFill>
-                <a:latin typeface="Jua"/>
-                <a:ea typeface="Jua"/>
-                <a:cs typeface="Jua"/>
-                <a:sym typeface="Jua"/>
-              </a:rPr>
-              <a:t>베트남</a:t>
-            </a:r>
-          </a:p>
-        </p:txBody>
+            <a:off x="1414697" y="0"/>
+            <a:ext cx="15458607" cy="10287000"/>
+          </a:xfrm>
+          <a:custGeom>
+            <a:avLst/>
+            <a:gdLst/>
+            <a:ahLst/>
+            <a:cxnLst/>
+            <a:rect r="r" b="b" t="t" l="l"/>
+            <a:pathLst>
+              <a:path h="10287000" w="15458607">
+                <a:moveTo>
+                  <a:pt x="0" y="0"/>
+                </a:moveTo>
+                <a:lnTo>
+                  <a:pt x="15458606" y="0"/>
+                </a:lnTo>
+                <a:lnTo>
+                  <a:pt x="15458606" y="10287000"/>
+                </a:lnTo>
+                <a:lnTo>
+                  <a:pt x="0" y="10287000"/>
+                </a:lnTo>
+                <a:lnTo>
+                  <a:pt x="0" y="0"/>
+                </a:lnTo>
+                <a:close/>
+              </a:path>
+            </a:pathLst>
+          </a:custGeom>
+          <a:blipFill>
+            <a:blip r:embed="rId2"/>
+            <a:stretch>
+              <a:fillRect l="0" t="0" r="0" b="0"/>
+            </a:stretch>
+          </a:blipFill>
+        </p:spPr>
       </p:sp>
     </p:spTree>
   </p:cSld>
@@ -9455,51 +9509,96 @@
           <a:chExt cx="0" cy="0"/>
         </a:xfrm>
       </p:grpSpPr>
-      <p:sp>
-        <p:nvSpPr>
-          <p:cNvPr name="Freeform 2" id="2"/>
-          <p:cNvSpPr/>
-          <p:nvPr/>
-        </p:nvSpPr>
+      <p:pic>
+        <p:nvPicPr>
+          <p:cNvPr name="Picture 2" id="2"/>
+          <p:cNvPicPr>
+            <a:picLocks noChangeAspect="true"/>
+          </p:cNvPicPr>
+          <p:nvPr/>
+        </p:nvPicPr>
+        <p:blipFill>
+          <a:blip r:embed="rId2"/>
+          <a:srcRect l="0" t="0" r="0" b="0"/>
+          <a:stretch>
+            <a:fillRect/>
+          </a:stretch>
+        </p:blipFill>
         <p:spPr>
           <a:xfrm flipH="false" flipV="false" rot="0">
-            <a:off x="0" y="571500"/>
-            <a:ext cx="18288000" cy="9144000"/>
-          </a:xfrm>
-          <a:custGeom>
-            <a:avLst/>
-            <a:gdLst/>
-            <a:ahLst/>
-            <a:cxnLst/>
-            <a:rect r="r" b="b" t="t" l="l"/>
-            <a:pathLst>
-              <a:path h="9144000" w="18288000">
-                <a:moveTo>
-                  <a:pt x="0" y="0"/>
-                </a:moveTo>
-                <a:lnTo>
-                  <a:pt x="18288000" y="0"/>
-                </a:lnTo>
-                <a:lnTo>
-                  <a:pt x="18288000" y="9144000"/>
-                </a:lnTo>
-                <a:lnTo>
-                  <a:pt x="0" y="9144000"/>
-                </a:lnTo>
-                <a:lnTo>
-                  <a:pt x="0" y="0"/>
-                </a:lnTo>
-                <a:close/>
-              </a:path>
-            </a:pathLst>
-          </a:custGeom>
-          <a:blipFill>
-            <a:blip r:embed="rId2"/>
-            <a:stretch>
-              <a:fillRect l="0" t="0" r="0" b="0"/>
-            </a:stretch>
-          </a:blipFill>
-        </p:spPr>
+            <a:off x="13655377" y="6809666"/>
+            <a:ext cx="6229999" cy="6954669"/>
+          </a:xfrm>
+          <a:prstGeom prst="rect">
+            <a:avLst/>
+          </a:prstGeom>
+        </p:spPr>
+      </p:pic>
+      <p:pic>
+        <p:nvPicPr>
+          <p:cNvPr name="Picture 3" id="3"/>
+          <p:cNvPicPr>
+            <a:picLocks noChangeAspect="true"/>
+          </p:cNvPicPr>
+          <p:nvPr/>
+        </p:nvPicPr>
+        <p:blipFill>
+          <a:blip r:embed="rId3"/>
+          <a:srcRect l="0" t="0" r="0" b="0"/>
+          <a:stretch>
+            <a:fillRect/>
+          </a:stretch>
+        </p:blipFill>
+        <p:spPr>
+          <a:xfrm flipH="false" flipV="false" rot="0">
+            <a:off x="0" y="0"/>
+            <a:ext cx="6925457" cy="4700654"/>
+          </a:xfrm>
+          <a:prstGeom prst="rect">
+            <a:avLst/>
+          </a:prstGeom>
+        </p:spPr>
+      </p:pic>
+      <p:sp>
+        <p:nvSpPr>
+          <p:cNvPr name="TextBox 4" id="4"/>
+          <p:cNvSpPr txBox="true"/>
+          <p:nvPr/>
+        </p:nvSpPr>
+        <p:spPr>
+          <a:xfrm rot="0">
+            <a:off x="2717556" y="4181475"/>
+            <a:ext cx="12852888" cy="1914525"/>
+          </a:xfrm>
+          <a:prstGeom prst="rect">
+            <a:avLst/>
+          </a:prstGeom>
+        </p:spPr>
+        <p:txBody>
+          <a:bodyPr anchor="t" rtlCol="false" tIns="0" lIns="0" bIns="0" rIns="0">
+            <a:spAutoFit/>
+          </a:bodyPr>
+          <a:lstStyle/>
+          <a:p>
+            <a:pPr algn="ctr">
+              <a:lnSpc>
+                <a:spcPts val="15000"/>
+              </a:lnSpc>
+            </a:pPr>
+            <a:r>
+              <a:rPr lang="en-US" sz="12500">
+                <a:solidFill>
+                  <a:srgbClr val="000000"/>
+                </a:solidFill>
+                <a:latin typeface="무궁화 고딕"/>
+                <a:ea typeface="무궁화 고딕"/>
+                <a:cs typeface="무궁화 고딕"/>
+                <a:sym typeface="무궁화 고딕"/>
+              </a:rPr>
+              <a:t>베트남</a:t>
+            </a:r>
+          </a:p>
+        </p:txBody>
       </p:sp>
     </p:spTree>
   </p:cSld>
@@ -9533,96 +9632,51 @@
           <a:chExt cx="0" cy="0"/>
         </a:xfrm>
       </p:grpSpPr>
-      <p:pic>
-        <p:nvPicPr>
-          <p:cNvPr name="Picture 2" id="2"/>
-          <p:cNvPicPr>
-            <a:picLocks noChangeAspect="true"/>
-          </p:cNvPicPr>
-          <p:nvPr/>
-        </p:nvPicPr>
-        <p:blipFill>
-          <a:blip r:embed="rId2"/>
-          <a:srcRect l="0" t="0" r="0" b="0"/>
-          <a:stretch>
-            <a:fillRect/>
-          </a:stretch>
-        </p:blipFill>
+      <p:sp>
+        <p:nvSpPr>
+          <p:cNvPr name="Freeform 2" id="2"/>
+          <p:cNvSpPr/>
+          <p:nvPr/>
+        </p:nvSpPr>
         <p:spPr>
           <a:xfrm flipH="false" flipV="false" rot="0">
-            <a:off x="13655377" y="6809666"/>
-            <a:ext cx="6229999" cy="6954669"/>
-          </a:xfrm>
-          <a:prstGeom prst="rect">
-            <a:avLst/>
-          </a:prstGeom>
-        </p:spPr>
-      </p:pic>
-      <p:pic>
-        <p:nvPicPr>
-          <p:cNvPr name="Picture 3" id="3"/>
-          <p:cNvPicPr>
-            <a:picLocks noChangeAspect="true"/>
-          </p:cNvPicPr>
-          <p:nvPr/>
-        </p:nvPicPr>
-        <p:blipFill>
-          <a:blip r:embed="rId3"/>
-          <a:srcRect l="0" t="0" r="0" b="0"/>
-          <a:stretch>
-            <a:fillRect/>
-          </a:stretch>
-        </p:blipFill>
-        <p:spPr>
-          <a:xfrm flipH="false" flipV="false" rot="0">
-            <a:off x="0" y="0"/>
-            <a:ext cx="6925457" cy="4700654"/>
-          </a:xfrm>
-          <a:prstGeom prst="rect">
-            <a:avLst/>
-          </a:prstGeom>
-        </p:spPr>
-      </p:pic>
-      <p:sp>
-        <p:nvSpPr>
-          <p:cNvPr name="TextBox 4" id="4"/>
-          <p:cNvSpPr txBox="true"/>
-          <p:nvPr/>
-        </p:nvSpPr>
-        <p:spPr>
-          <a:xfrm rot="0">
-            <a:off x="2717556" y="3895725"/>
-            <a:ext cx="12852888" cy="2200275"/>
-          </a:xfrm>
-          <a:prstGeom prst="rect">
-            <a:avLst/>
-          </a:prstGeom>
-        </p:spPr>
-        <p:txBody>
-          <a:bodyPr anchor="t" rtlCol="false" tIns="0" lIns="0" bIns="0" rIns="0">
-            <a:spAutoFit/>
-          </a:bodyPr>
-          <a:lstStyle/>
-          <a:p>
-            <a:pPr algn="ctr">
-              <a:lnSpc>
-                <a:spcPts val="15000"/>
-              </a:lnSpc>
-            </a:pPr>
-            <a:r>
-              <a:rPr lang="en-US" sz="12500">
-                <a:solidFill>
-                  <a:srgbClr val="000000"/>
-                </a:solidFill>
-                <a:latin typeface="Jua"/>
-                <a:ea typeface="Jua"/>
-                <a:cs typeface="Jua"/>
-                <a:sym typeface="Jua"/>
-              </a:rPr>
-              <a:t>필리핀</a:t>
-            </a:r>
-          </a:p>
-        </p:txBody>
+            <a:off x="0" y="571500"/>
+            <a:ext cx="18288000" cy="9144000"/>
+          </a:xfrm>
+          <a:custGeom>
+            <a:avLst/>
+            <a:gdLst/>
+            <a:ahLst/>
+            <a:cxnLst/>
+            <a:rect r="r" b="b" t="t" l="l"/>
+            <a:pathLst>
+              <a:path h="9144000" w="18288000">
+                <a:moveTo>
+                  <a:pt x="0" y="0"/>
+                </a:moveTo>
+                <a:lnTo>
+                  <a:pt x="18288000" y="0"/>
+                </a:lnTo>
+                <a:lnTo>
+                  <a:pt x="18288000" y="9144000"/>
+                </a:lnTo>
+                <a:lnTo>
+                  <a:pt x="0" y="9144000"/>
+                </a:lnTo>
+                <a:lnTo>
+                  <a:pt x="0" y="0"/>
+                </a:lnTo>
+                <a:close/>
+              </a:path>
+            </a:pathLst>
+          </a:custGeom>
+          <a:blipFill>
+            <a:blip r:embed="rId2"/>
+            <a:stretch>
+              <a:fillRect l="0" t="0" r="0" b="0"/>
+            </a:stretch>
+          </a:blipFill>
+        </p:spPr>
       </p:sp>
     </p:spTree>
   </p:cSld>
@@ -9672,25 +9726,50 @@
           </a:stretch>
         </p:blipFill>
         <p:spPr>
-          <a:xfrm flipH="false" flipV="false" rot="-7408585">
-            <a:off x="4499355" y="-533795"/>
-            <a:ext cx="9289290" cy="10369815"/>
+          <a:xfrm flipH="false" flipV="false" rot="0">
+            <a:off x="13655377" y="6809666"/>
+            <a:ext cx="6229999" cy="6954669"/>
           </a:xfrm>
           <a:prstGeom prst="rect">
             <a:avLst/>
           </a:prstGeom>
         </p:spPr>
       </p:pic>
-      <p:sp>
-        <p:nvSpPr>
-          <p:cNvPr name="TextBox 3" id="3"/>
+      <p:pic>
+        <p:nvPicPr>
+          <p:cNvPr name="Picture 3" id="3"/>
+          <p:cNvPicPr>
+            <a:picLocks noChangeAspect="true"/>
+          </p:cNvPicPr>
+          <p:nvPr/>
+        </p:nvPicPr>
+        <p:blipFill>
+          <a:blip r:embed="rId3"/>
+          <a:srcRect l="0" t="0" r="0" b="0"/>
+          <a:stretch>
+            <a:fillRect/>
+          </a:stretch>
+        </p:blipFill>
+        <p:spPr>
+          <a:xfrm flipH="false" flipV="false" rot="0">
+            <a:off x="0" y="0"/>
+            <a:ext cx="6925457" cy="4700654"/>
+          </a:xfrm>
+          <a:prstGeom prst="rect">
+            <a:avLst/>
+          </a:prstGeom>
+        </p:spPr>
+      </p:pic>
+      <p:sp>
+        <p:nvSpPr>
+          <p:cNvPr name="TextBox 4" id="4"/>
           <p:cNvSpPr txBox="true"/>
           <p:nvPr/>
         </p:nvSpPr>
         <p:spPr>
           <a:xfrm rot="0">
-            <a:off x="4421807" y="3895725"/>
-            <a:ext cx="9444385" cy="2200275"/>
+            <a:off x="2717556" y="4181475"/>
+            <a:ext cx="12852888" cy="1914525"/>
           </a:xfrm>
           <a:prstGeom prst="rect">
             <a:avLst/>
@@ -9712,10 +9791,108 @@
                 <a:solidFill>
                   <a:srgbClr val="000000"/>
                 </a:solidFill>
-                <a:latin typeface="Jua"/>
-                <a:ea typeface="Jua"/>
-                <a:cs typeface="Jua"/>
-                <a:sym typeface="Jua"/>
+                <a:latin typeface="무궁화 고딕"/>
+                <a:ea typeface="무궁화 고딕"/>
+                <a:cs typeface="무궁화 고딕"/>
+                <a:sym typeface="무궁화 고딕"/>
+              </a:rPr>
+              <a:t>필리핀</a:t>
+            </a:r>
+          </a:p>
+        </p:txBody>
+      </p:sp>
+    </p:spTree>
+  </p:cSld>
+  <p:clrMapOvr>
+    <a:masterClrMapping/>
+  </p:clrMapOvr>
+</p:sld>
+</file>
+
+<file path=ppt/slides/slide65.xml><?xml version="1.0" encoding="utf-8"?>
+<p:sld xmlns:p="http://schemas.openxmlformats.org/presentationml/2006/main" xmlns:a="http://schemas.openxmlformats.org/drawingml/2006/main" xmlns:r="http://schemas.openxmlformats.org/officeDocument/2006/relationships">
+  <p:cSld>
+    <p:bg>
+      <p:bgPr>
+        <a:solidFill>
+          <a:srgbClr val="FFFAEF"/>
+        </a:solidFill>
+      </p:bgPr>
+    </p:bg>
+    <p:spTree>
+      <p:nvGrpSpPr>
+        <p:cNvPr id="1" name=""/>
+        <p:cNvGrpSpPr/>
+        <p:nvPr/>
+      </p:nvGrpSpPr>
+      <p:grpSpPr>
+        <a:xfrm>
+          <a:off x="0" y="0"/>
+          <a:ext cx="0" cy="0"/>
+          <a:chOff x="0" y="0"/>
+          <a:chExt cx="0" cy="0"/>
+        </a:xfrm>
+      </p:grpSpPr>
+      <p:pic>
+        <p:nvPicPr>
+          <p:cNvPr name="Picture 2" id="2"/>
+          <p:cNvPicPr>
+            <a:picLocks noChangeAspect="true"/>
+          </p:cNvPicPr>
+          <p:nvPr/>
+        </p:nvPicPr>
+        <p:blipFill>
+          <a:blip r:embed="rId2"/>
+          <a:srcRect l="0" t="0" r="0" b="0"/>
+          <a:stretch>
+            <a:fillRect/>
+          </a:stretch>
+        </p:blipFill>
+        <p:spPr>
+          <a:xfrm flipH="false" flipV="false" rot="-7408585">
+            <a:off x="4499355" y="-533795"/>
+            <a:ext cx="9289290" cy="10369815"/>
+          </a:xfrm>
+          <a:prstGeom prst="rect">
+            <a:avLst/>
+          </a:prstGeom>
+        </p:spPr>
+      </p:pic>
+      <p:sp>
+        <p:nvSpPr>
+          <p:cNvPr name="TextBox 3" id="3"/>
+          <p:cNvSpPr txBox="true"/>
+          <p:nvPr/>
+        </p:nvSpPr>
+        <p:spPr>
+          <a:xfrm rot="0">
+            <a:off x="4421807" y="4181475"/>
+            <a:ext cx="9444385" cy="1914525"/>
+          </a:xfrm>
+          <a:prstGeom prst="rect">
+            <a:avLst/>
+          </a:prstGeom>
+        </p:spPr>
+        <p:txBody>
+          <a:bodyPr anchor="t" rtlCol="false" tIns="0" lIns="0" bIns="0" rIns="0">
+            <a:spAutoFit/>
+          </a:bodyPr>
+          <a:lstStyle/>
+          <a:p>
+            <a:pPr algn="ctr">
+              <a:lnSpc>
+                <a:spcPts val="15000"/>
+              </a:lnSpc>
+            </a:pPr>
+            <a:r>
+              <a:rPr lang="en-US" sz="12500">
+                <a:solidFill>
+                  <a:srgbClr val="000000"/>
+                </a:solidFill>
+                <a:latin typeface="무궁화 고딕"/>
+                <a:ea typeface="무궁화 고딕"/>
+                <a:cs typeface="무궁화 고딕"/>
+                <a:sym typeface="무궁화 고딕"/>
               </a:rPr>
               <a:t>감사합니다!</a:t>
             </a:r>
@@ -9804,96 +9981,51 @@
           <a:chExt cx="0" cy="0"/>
         </a:xfrm>
       </p:grpSpPr>
-      <p:pic>
-        <p:nvPicPr>
-          <p:cNvPr name="Picture 2" id="2"/>
-          <p:cNvPicPr>
-            <a:picLocks noChangeAspect="true"/>
-          </p:cNvPicPr>
-          <p:nvPr/>
-        </p:nvPicPr>
-        <p:blipFill>
-          <a:blip r:embed="rId2"/>
-          <a:srcRect l="0" t="0" r="0" b="0"/>
-          <a:stretch>
-            <a:fillRect/>
-          </a:stretch>
-        </p:blipFill>
+      <p:sp>
+        <p:nvSpPr>
+          <p:cNvPr name="Freeform 2" id="2"/>
+          <p:cNvSpPr/>
+          <p:nvPr/>
+        </p:nvSpPr>
         <p:spPr>
           <a:xfrm flipH="false" flipV="false" rot="0">
-            <a:off x="13655377" y="6809666"/>
-            <a:ext cx="6229999" cy="6954669"/>
-          </a:xfrm>
-          <a:prstGeom prst="rect">
-            <a:avLst/>
-          </a:prstGeom>
-        </p:spPr>
-      </p:pic>
-      <p:pic>
-        <p:nvPicPr>
-          <p:cNvPr name="Picture 3" id="3"/>
-          <p:cNvPicPr>
-            <a:picLocks noChangeAspect="true"/>
-          </p:cNvPicPr>
-          <p:nvPr/>
-        </p:nvPicPr>
-        <p:blipFill>
-          <a:blip r:embed="rId3"/>
-          <a:srcRect l="0" t="0" r="0" b="0"/>
-          <a:stretch>
-            <a:fillRect/>
-          </a:stretch>
-        </p:blipFill>
-        <p:spPr>
-          <a:xfrm flipH="false" flipV="false" rot="0">
-            <a:off x="0" y="0"/>
-            <a:ext cx="6925457" cy="4700654"/>
-          </a:xfrm>
-          <a:prstGeom prst="rect">
-            <a:avLst/>
-          </a:prstGeom>
-        </p:spPr>
-      </p:pic>
-      <p:sp>
-        <p:nvSpPr>
-          <p:cNvPr name="TextBox 4" id="4"/>
-          <p:cNvSpPr txBox="true"/>
-          <p:nvPr/>
-        </p:nvSpPr>
-        <p:spPr>
-          <a:xfrm rot="0">
-            <a:off x="2717556" y="3895725"/>
-            <a:ext cx="12852888" cy="2200275"/>
-          </a:xfrm>
-          <a:prstGeom prst="rect">
-            <a:avLst/>
-          </a:prstGeom>
-        </p:spPr>
-        <p:txBody>
-          <a:bodyPr anchor="t" rtlCol="false" tIns="0" lIns="0" bIns="0" rIns="0">
-            <a:spAutoFit/>
-          </a:bodyPr>
-          <a:lstStyle/>
-          <a:p>
-            <a:pPr algn="ctr">
-              <a:lnSpc>
-                <a:spcPts val="15000"/>
-              </a:lnSpc>
-            </a:pPr>
-            <a:r>
-              <a:rPr lang="en-US" sz="12500">
-                <a:solidFill>
-                  <a:srgbClr val="000000"/>
-                </a:solidFill>
-                <a:latin typeface="Jua"/>
-                <a:ea typeface="Jua"/>
-                <a:cs typeface="Jua"/>
-                <a:sym typeface="Jua"/>
-              </a:rPr>
-              <a:t>미국</a:t>
-            </a:r>
-          </a:p>
-        </p:txBody>
+            <a:off x="0" y="319966"/>
+            <a:ext cx="18288000" cy="9647068"/>
+          </a:xfrm>
+          <a:custGeom>
+            <a:avLst/>
+            <a:gdLst/>
+            <a:ahLst/>
+            <a:cxnLst/>
+            <a:rect r="r" b="b" t="t" l="l"/>
+            <a:pathLst>
+              <a:path h="9647068" w="18288000">
+                <a:moveTo>
+                  <a:pt x="0" y="0"/>
+                </a:moveTo>
+                <a:lnTo>
+                  <a:pt x="18288000" y="0"/>
+                </a:lnTo>
+                <a:lnTo>
+                  <a:pt x="18288000" y="9647068"/>
+                </a:lnTo>
+                <a:lnTo>
+                  <a:pt x="0" y="9647068"/>
+                </a:lnTo>
+                <a:lnTo>
+                  <a:pt x="0" y="0"/>
+                </a:lnTo>
+                <a:close/>
+              </a:path>
+            </a:pathLst>
+          </a:custGeom>
+          <a:blipFill>
+            <a:blip r:embed="rId2"/>
+            <a:stretch>
+              <a:fillRect l="0" t="0" r="0" b="0"/>
+            </a:stretch>
+          </a:blipFill>
+        </p:spPr>
       </p:sp>
     </p:spTree>
   </p:cSld>
@@ -9927,51 +10059,96 @@
           <a:chExt cx="0" cy="0"/>
         </a:xfrm>
       </p:grpSpPr>
-      <p:sp>
-        <p:nvSpPr>
-          <p:cNvPr name="Freeform 2" id="2"/>
-          <p:cNvSpPr/>
-          <p:nvPr/>
-        </p:nvSpPr>
+      <p:pic>
+        <p:nvPicPr>
+          <p:cNvPr name="Picture 2" id="2"/>
+          <p:cNvPicPr>
+            <a:picLocks noChangeAspect="true"/>
+          </p:cNvPicPr>
+          <p:nvPr/>
+        </p:nvPicPr>
+        <p:blipFill>
+          <a:blip r:embed="rId2"/>
+          <a:srcRect l="0" t="0" r="0" b="0"/>
+          <a:stretch>
+            <a:fillRect/>
+          </a:stretch>
+        </p:blipFill>
         <p:spPr>
           <a:xfrm flipH="false" flipV="false" rot="0">
-            <a:off x="1370726" y="0"/>
-            <a:ext cx="15546548" cy="10345521"/>
-          </a:xfrm>
-          <a:custGeom>
-            <a:avLst/>
-            <a:gdLst/>
-            <a:ahLst/>
-            <a:cxnLst/>
-            <a:rect r="r" b="b" t="t" l="l"/>
-            <a:pathLst>
-              <a:path h="10345521" w="15546548">
-                <a:moveTo>
-                  <a:pt x="0" y="0"/>
-                </a:moveTo>
-                <a:lnTo>
-                  <a:pt x="15546548" y="0"/>
-                </a:lnTo>
-                <a:lnTo>
-                  <a:pt x="15546548" y="10345521"/>
-                </a:lnTo>
-                <a:lnTo>
-                  <a:pt x="0" y="10345521"/>
-                </a:lnTo>
-                <a:lnTo>
-                  <a:pt x="0" y="0"/>
-                </a:lnTo>
-                <a:close/>
-              </a:path>
-            </a:pathLst>
-          </a:custGeom>
-          <a:blipFill>
-            <a:blip r:embed="rId2"/>
-            <a:stretch>
-              <a:fillRect l="0" t="0" r="0" b="0"/>
-            </a:stretch>
-          </a:blipFill>
-        </p:spPr>
+            <a:off x="13655377" y="6809666"/>
+            <a:ext cx="6229999" cy="6954669"/>
+          </a:xfrm>
+          <a:prstGeom prst="rect">
+            <a:avLst/>
+          </a:prstGeom>
+        </p:spPr>
+      </p:pic>
+      <p:pic>
+        <p:nvPicPr>
+          <p:cNvPr name="Picture 3" id="3"/>
+          <p:cNvPicPr>
+            <a:picLocks noChangeAspect="true"/>
+          </p:cNvPicPr>
+          <p:nvPr/>
+        </p:nvPicPr>
+        <p:blipFill>
+          <a:blip r:embed="rId3"/>
+          <a:srcRect l="0" t="0" r="0" b="0"/>
+          <a:stretch>
+            <a:fillRect/>
+          </a:stretch>
+        </p:blipFill>
+        <p:spPr>
+          <a:xfrm flipH="false" flipV="false" rot="0">
+            <a:off x="0" y="0"/>
+            <a:ext cx="6925457" cy="4700654"/>
+          </a:xfrm>
+          <a:prstGeom prst="rect">
+            <a:avLst/>
+          </a:prstGeom>
+        </p:spPr>
+      </p:pic>
+      <p:sp>
+        <p:nvSpPr>
+          <p:cNvPr name="TextBox 4" id="4"/>
+          <p:cNvSpPr txBox="true"/>
+          <p:nvPr/>
+        </p:nvSpPr>
+        <p:spPr>
+          <a:xfrm rot="0">
+            <a:off x="2717556" y="4181475"/>
+            <a:ext cx="12852888" cy="1914525"/>
+          </a:xfrm>
+          <a:prstGeom prst="rect">
+            <a:avLst/>
+          </a:prstGeom>
+        </p:spPr>
+        <p:txBody>
+          <a:bodyPr anchor="t" rtlCol="false" tIns="0" lIns="0" bIns="0" rIns="0">
+            <a:spAutoFit/>
+          </a:bodyPr>
+          <a:lstStyle/>
+          <a:p>
+            <a:pPr algn="ctr">
+              <a:lnSpc>
+                <a:spcPts val="15000"/>
+              </a:lnSpc>
+            </a:pPr>
+            <a:r>
+              <a:rPr lang="en-US" sz="12500">
+                <a:solidFill>
+                  <a:srgbClr val="000000"/>
+                </a:solidFill>
+                <a:latin typeface="무궁화 고딕"/>
+                <a:ea typeface="무궁화 고딕"/>
+                <a:cs typeface="무궁화 고딕"/>
+                <a:sym typeface="무궁화 고딕"/>
+              </a:rPr>
+              <a:t>미국</a:t>
+            </a:r>
+          </a:p>
+        </p:txBody>
       </p:sp>
     </p:spTree>
   </p:cSld>
@@ -10005,96 +10182,51 @@
           <a:chExt cx="0" cy="0"/>
         </a:xfrm>
       </p:grpSpPr>
-      <p:pic>
-        <p:nvPicPr>
-          <p:cNvPr name="Picture 2" id="2"/>
-          <p:cNvPicPr>
-            <a:picLocks noChangeAspect="true"/>
-          </p:cNvPicPr>
-          <p:nvPr/>
-        </p:nvPicPr>
-        <p:blipFill>
-          <a:blip r:embed="rId2"/>
-          <a:srcRect l="0" t="0" r="0" b="0"/>
-          <a:stretch>
-            <a:fillRect/>
-          </a:stretch>
-        </p:blipFill>
+      <p:sp>
+        <p:nvSpPr>
+          <p:cNvPr name="Freeform 2" id="2"/>
+          <p:cNvSpPr/>
+          <p:nvPr/>
+        </p:nvSpPr>
         <p:spPr>
           <a:xfrm flipH="false" flipV="false" rot="0">
-            <a:off x="13655377" y="6809666"/>
-            <a:ext cx="6229999" cy="6954669"/>
-          </a:xfrm>
-          <a:prstGeom prst="rect">
-            <a:avLst/>
-          </a:prstGeom>
-        </p:spPr>
-      </p:pic>
-      <p:pic>
-        <p:nvPicPr>
-          <p:cNvPr name="Picture 3" id="3"/>
-          <p:cNvPicPr>
-            <a:picLocks noChangeAspect="true"/>
-          </p:cNvPicPr>
-          <p:nvPr/>
-        </p:nvPicPr>
-        <p:blipFill>
-          <a:blip r:embed="rId3"/>
-          <a:srcRect l="0" t="0" r="0" b="0"/>
-          <a:stretch>
-            <a:fillRect/>
-          </a:stretch>
-        </p:blipFill>
-        <p:spPr>
-          <a:xfrm flipH="false" flipV="false" rot="0">
-            <a:off x="0" y="0"/>
-            <a:ext cx="6925457" cy="4700654"/>
-          </a:xfrm>
-          <a:prstGeom prst="rect">
-            <a:avLst/>
-          </a:prstGeom>
-        </p:spPr>
-      </p:pic>
-      <p:sp>
-        <p:nvSpPr>
-          <p:cNvPr name="TextBox 4" id="4"/>
-          <p:cNvSpPr txBox="true"/>
-          <p:nvPr/>
-        </p:nvSpPr>
-        <p:spPr>
-          <a:xfrm rot="0">
-            <a:off x="2717556" y="3895725"/>
-            <a:ext cx="12852888" cy="2200275"/>
-          </a:xfrm>
-          <a:prstGeom prst="rect">
-            <a:avLst/>
-          </a:prstGeom>
-        </p:spPr>
-        <p:txBody>
-          <a:bodyPr anchor="t" rtlCol="false" tIns="0" lIns="0" bIns="0" rIns="0">
-            <a:spAutoFit/>
-          </a:bodyPr>
-          <a:lstStyle/>
-          <a:p>
-            <a:pPr algn="ctr">
-              <a:lnSpc>
-                <a:spcPts val="15000"/>
-              </a:lnSpc>
-            </a:pPr>
-            <a:r>
-              <a:rPr lang="en-US" sz="12500">
-                <a:solidFill>
-                  <a:srgbClr val="000000"/>
-                </a:solidFill>
-                <a:latin typeface="Jua"/>
-                <a:ea typeface="Jua"/>
-                <a:cs typeface="Jua"/>
-                <a:sym typeface="Jua"/>
-              </a:rPr>
-              <a:t>일본</a:t>
-            </a:r>
-          </a:p>
-        </p:txBody>
+            <a:off x="1370726" y="0"/>
+            <a:ext cx="15546548" cy="10345521"/>
+          </a:xfrm>
+          <a:custGeom>
+            <a:avLst/>
+            <a:gdLst/>
+            <a:ahLst/>
+            <a:cxnLst/>
+            <a:rect r="r" b="b" t="t" l="l"/>
+            <a:pathLst>
+              <a:path h="10345521" w="15546548">
+                <a:moveTo>
+                  <a:pt x="0" y="0"/>
+                </a:moveTo>
+                <a:lnTo>
+                  <a:pt x="15546548" y="0"/>
+                </a:lnTo>
+                <a:lnTo>
+                  <a:pt x="15546548" y="10345521"/>
+                </a:lnTo>
+                <a:lnTo>
+                  <a:pt x="0" y="10345521"/>
+                </a:lnTo>
+                <a:lnTo>
+                  <a:pt x="0" y="0"/>
+                </a:lnTo>
+                <a:close/>
+              </a:path>
+            </a:pathLst>
+          </a:custGeom>
+          <a:blipFill>
+            <a:blip r:embed="rId2"/>
+            <a:stretch>
+              <a:fillRect l="0" t="0" r="0" b="0"/>
+            </a:stretch>
+          </a:blipFill>
+        </p:spPr>
       </p:sp>
     </p:spTree>
   </p:cSld>
